--- a/assets/lessons/lectures/digital-signal-processing/fourier-transform-2018.pptx
+++ b/assets/lessons/lectures/digital-signal-processing/fourier-transform-2018.pptx
@@ -19,7 +19,7 @@
     <p:sldId id="268" r:id="rId10"/>
     <p:sldId id="256" r:id="rId11"/>
   </p:sldIdLst>
-  <p:sldSz cx="12192000" cy="6858000"/>
+  <p:sldSz cx="12192000" cy="7543800"/>
   <p:notesSz cx="6858000" cy="9144000"/>
   <p:defaultTextStyle>
     <a:defPPr>
@@ -122,6 +122,185 @@
     </p:ext>
   </p:extLst>
 </p:presentation>
+</file>
+
+<file path=ppt/customXml/item1.xml><?xml version="1.0" encoding="utf-8"?>
+<ct:contentTypeSchema xmlns:ct="http://schemas.microsoft.com/office/2006/metadata/contentType" xmlns:ma="http://schemas.microsoft.com/office/2006/metadata/properties/metaAttributes" ct:_="" ma:_="" ma:contentTypeName="Document" ma:contentTypeID="0x01010016C36F108F9F92488C988DDF36346911" ma:contentTypeVersion="5" ma:contentTypeDescription="Create a new document." ma:contentTypeScope="" ma:versionID="c417924321fef32731141cd966ef6f94">
+  <xsd:schema xmlns:xsd="http://www.w3.org/2001/XMLSchema" xmlns:xs="http://www.w3.org/2001/XMLSchema" xmlns:p="http://schemas.microsoft.com/office/2006/metadata/properties" xmlns:ns2="1bb24863-89de-455f-aabf-4424925aa312" targetNamespace="http://schemas.microsoft.com/office/2006/metadata/properties" ma:root="true" ma:fieldsID="a7d3b2212d350eb904df17fc79fef4f4" ns2:_="">
+    <xsd:import namespace="1bb24863-89de-455f-aabf-4424925aa312"/>
+    <xsd:element name="properties">
+      <xsd:complexType>
+        <xsd:sequence>
+          <xsd:element name="documentManagement">
+            <xsd:complexType>
+              <xsd:all>
+                <xsd:element ref="ns2:MediaServiceMetadata" minOccurs="0"/>
+                <xsd:element ref="ns2:MediaServiceFastMetadata" minOccurs="0"/>
+                <xsd:element ref="ns2:MediaServiceAutoTags" minOccurs="0"/>
+                <xsd:element ref="ns2:MediaServiceOCR" minOccurs="0"/>
+                <xsd:element ref="ns2:MediaServiceDateTaken" minOccurs="0"/>
+              </xsd:all>
+            </xsd:complexType>
+          </xsd:element>
+        </xsd:sequence>
+      </xsd:complexType>
+    </xsd:element>
+  </xsd:schema>
+  <xsd:schema xmlns:xsd="http://www.w3.org/2001/XMLSchema" xmlns:xs="http://www.w3.org/2001/XMLSchema" xmlns:dms="http://schemas.microsoft.com/office/2006/documentManagement/types" xmlns:pc="http://schemas.microsoft.com/office/infopath/2007/PartnerControls" targetNamespace="1bb24863-89de-455f-aabf-4424925aa312" elementFormDefault="qualified">
+    <xsd:import namespace="http://schemas.microsoft.com/office/2006/documentManagement/types"/>
+    <xsd:import namespace="http://schemas.microsoft.com/office/infopath/2007/PartnerControls"/>
+    <xsd:element name="MediaServiceMetadata" ma:index="8" nillable="true" ma:displayName="MediaServiceMetadata" ma:hidden="true" ma:internalName="MediaServiceMetadata" ma:readOnly="true">
+      <xsd:simpleType>
+        <xsd:restriction base="dms:Note"/>
+      </xsd:simpleType>
+    </xsd:element>
+    <xsd:element name="MediaServiceFastMetadata" ma:index="9" nillable="true" ma:displayName="MediaServiceFastMetadata" ma:hidden="true" ma:internalName="MediaServiceFastMetadata" ma:readOnly="true">
+      <xsd:simpleType>
+        <xsd:restriction base="dms:Note"/>
+      </xsd:simpleType>
+    </xsd:element>
+    <xsd:element name="MediaServiceAutoTags" ma:index="10" nillable="true" ma:displayName="MediaServiceAutoTags" ma:internalName="MediaServiceAutoTags" ma:readOnly="true">
+      <xsd:simpleType>
+        <xsd:restriction base="dms:Text"/>
+      </xsd:simpleType>
+    </xsd:element>
+    <xsd:element name="MediaServiceOCR" ma:index="11" nillable="true" ma:displayName="MediaServiceOCR" ma:internalName="MediaServiceOCR" ma:readOnly="true">
+      <xsd:simpleType>
+        <xsd:restriction base="dms:Note">
+          <xsd:maxLength value="255"/>
+        </xsd:restriction>
+      </xsd:simpleType>
+    </xsd:element>
+    <xsd:element name="MediaServiceDateTaken" ma:index="12" nillable="true" ma:displayName="MediaServiceDateTaken" ma:hidden="true" ma:internalName="MediaServiceDateTaken" ma:readOnly="true">
+      <xsd:simpleType>
+        <xsd:restriction base="dms:Text"/>
+      </xsd:simpleType>
+    </xsd:element>
+  </xsd:schema>
+  <xsd:schema xmlns="http://schemas.openxmlformats.org/package/2006/metadata/core-properties" xmlns:xsd="http://www.w3.org/2001/XMLSchema" xmlns:xsi="http://www.w3.org/2001/XMLSchema-instance" xmlns:dc="http://purl.org/dc/elements/1.1/" xmlns:dcterms="http://purl.org/dc/terms/" xmlns:odoc="http://schemas.microsoft.com/internal/obd" targetNamespace="http://schemas.openxmlformats.org/package/2006/metadata/core-properties" elementFormDefault="qualified" attributeFormDefault="unqualified" blockDefault="#all">
+    <xsd:import namespace="http://purl.org/dc/elements/1.1/" schemaLocation="http://dublincore.org/schemas/xmls/qdc/2003/04/02/dc.xsd"/>
+    <xsd:import namespace="http://purl.org/dc/terms/" schemaLocation="http://dublincore.org/schemas/xmls/qdc/2003/04/02/dcterms.xsd"/>
+    <xsd:element name="coreProperties" type="CT_coreProperties"/>
+    <xsd:complexType name="CT_coreProperties">
+      <xsd:all>
+        <xsd:element ref="dc:creator" minOccurs="0" maxOccurs="1"/>
+        <xsd:element ref="dcterms:created" minOccurs="0" maxOccurs="1"/>
+        <xsd:element ref="dc:identifier" minOccurs="0" maxOccurs="1"/>
+        <xsd:element name="contentType" minOccurs="0" maxOccurs="1" type="xsd:string" ma:index="0" ma:displayName="Content Type"/>
+        <xsd:element ref="dc:title" minOccurs="0" maxOccurs="1" ma:index="4" ma:displayName="Title"/>
+        <xsd:element ref="dc:subject" minOccurs="0" maxOccurs="1"/>
+        <xsd:element ref="dc:description" minOccurs="0" maxOccurs="1"/>
+        <xsd:element name="keywords" minOccurs="0" maxOccurs="1" type="xsd:string"/>
+        <xsd:element ref="dc:language" minOccurs="0" maxOccurs="1"/>
+        <xsd:element name="category" minOccurs="0" maxOccurs="1" type="xsd:string"/>
+        <xsd:element name="version" minOccurs="0" maxOccurs="1" type="xsd:string"/>
+        <xsd:element name="revision" minOccurs="0" maxOccurs="1" type="xsd:string">
+          <xsd:annotation>
+            <xsd:documentation>
+                        This value indicates the number of saves or revisions. The application is responsible for updating this value after each revision.
+                    </xsd:documentation>
+          </xsd:annotation>
+        </xsd:element>
+        <xsd:element name="lastModifiedBy" minOccurs="0" maxOccurs="1" type="xsd:string"/>
+        <xsd:element ref="dcterms:modified" minOccurs="0" maxOccurs="1"/>
+        <xsd:element name="contentStatus" minOccurs="0" maxOccurs="1" type="xsd:string"/>
+      </xsd:all>
+    </xsd:complexType>
+  </xsd:schema>
+  <xs:schema xmlns:pc="http://schemas.microsoft.com/office/infopath/2007/PartnerControls" xmlns:xs="http://www.w3.org/2001/XMLSchema" targetNamespace="http://schemas.microsoft.com/office/infopath/2007/PartnerControls" elementFormDefault="qualified" attributeFormDefault="unqualified">
+    <xs:element name="Person">
+      <xs:complexType>
+        <xs:sequence>
+          <xs:element ref="pc:DisplayName" minOccurs="0"/>
+          <xs:element ref="pc:AccountId" minOccurs="0"/>
+          <xs:element ref="pc:AccountType" minOccurs="0"/>
+        </xs:sequence>
+      </xs:complexType>
+    </xs:element>
+    <xs:element name="DisplayName" type="xs:string"/>
+    <xs:element name="AccountId" type="xs:string"/>
+    <xs:element name="AccountType" type="xs:string"/>
+    <xs:element name="BDCAssociatedEntity">
+      <xs:complexType>
+        <xs:sequence>
+          <xs:element ref="pc:BDCEntity" minOccurs="0" maxOccurs="unbounded"/>
+        </xs:sequence>
+        <xs:attribute ref="pc:EntityNamespace"/>
+        <xs:attribute ref="pc:EntityName"/>
+        <xs:attribute ref="pc:SystemInstanceName"/>
+        <xs:attribute ref="pc:AssociationName"/>
+      </xs:complexType>
+    </xs:element>
+    <xs:attribute name="EntityNamespace" type="xs:string"/>
+    <xs:attribute name="EntityName" type="xs:string"/>
+    <xs:attribute name="SystemInstanceName" type="xs:string"/>
+    <xs:attribute name="AssociationName" type="xs:string"/>
+    <xs:element name="BDCEntity">
+      <xs:complexType>
+        <xs:sequence>
+          <xs:element ref="pc:EntityDisplayName" minOccurs="0"/>
+          <xs:element ref="pc:EntityInstanceReference" minOccurs="0"/>
+          <xs:element ref="pc:EntityId1" minOccurs="0"/>
+          <xs:element ref="pc:EntityId2" minOccurs="0"/>
+          <xs:element ref="pc:EntityId3" minOccurs="0"/>
+          <xs:element ref="pc:EntityId4" minOccurs="0"/>
+          <xs:element ref="pc:EntityId5" minOccurs="0"/>
+        </xs:sequence>
+      </xs:complexType>
+    </xs:element>
+    <xs:element name="EntityDisplayName" type="xs:string"/>
+    <xs:element name="EntityInstanceReference" type="xs:string"/>
+    <xs:element name="EntityId1" type="xs:string"/>
+    <xs:element name="EntityId2" type="xs:string"/>
+    <xs:element name="EntityId3" type="xs:string"/>
+    <xs:element name="EntityId4" type="xs:string"/>
+    <xs:element name="EntityId5" type="xs:string"/>
+    <xs:element name="Terms">
+      <xs:complexType>
+        <xs:sequence>
+          <xs:element ref="pc:TermInfo" minOccurs="0" maxOccurs="unbounded"/>
+        </xs:sequence>
+      </xs:complexType>
+    </xs:element>
+    <xs:element name="TermInfo">
+      <xs:complexType>
+        <xs:sequence>
+          <xs:element ref="pc:TermName" minOccurs="0"/>
+          <xs:element ref="pc:TermId" minOccurs="0"/>
+        </xs:sequence>
+      </xs:complexType>
+    </xs:element>
+    <xs:element name="TermName" type="xs:string"/>
+    <xs:element name="TermId" type="xs:string"/>
+  </xs:schema>
+</ct:contentTypeSchema>
+</file>
+
+<file path=ppt/customXml/item2.xml><?xml version="1.0" encoding="utf-8"?>
+<?mso-contentType ?>
+<FormTemplates xmlns="http://schemas.microsoft.com/sharepoint/v3/contenttype/forms">
+  <Display>DocumentLibraryForm</Display>
+  <Edit>DocumentLibraryForm</Edit>
+  <New>DocumentLibraryForm</New>
+</FormTemplates>
+</file>
+
+<file path=ppt/customXml/item3.xml><?xml version="1.0" encoding="utf-8"?>
+<p:properties xmlns:p="http://schemas.microsoft.com/office/2006/metadata/properties" xmlns:xsi="http://www.w3.org/2001/XMLSchema-instance" xmlns:pc="http://schemas.microsoft.com/office/infopath/2007/PartnerControls">
+  <documentManagement/>
+</p:properties>
+</file>
+
+<file path=ppt/customXml/itemProps1.xml><?xml version="1.0" encoding="utf-8"?>
+<ds:datastoreItem xmlns:ds="http://schemas.openxmlformats.org/officeDocument/2006/customXml" ds:itemID="{B8E7755C-1895-46E5-A40F-F24D3B32E1D8}"/>
+</file>
+
+<file path=ppt/customXml/itemProps2.xml><?xml version="1.0" encoding="utf-8"?>
+<ds:datastoreItem xmlns:ds="http://schemas.openxmlformats.org/officeDocument/2006/customXml" ds:itemID="{E0F840A3-BDB6-4416-AA30-A85F865FB74D}"/>
+</file>
+
+<file path=ppt/customXml/itemProps3.xml><?xml version="1.0" encoding="utf-8"?>
+<ds:datastoreItem xmlns:ds="http://schemas.openxmlformats.org/officeDocument/2006/customXml" ds:itemID="{865623FC-D581-47FE-9CAC-3BA026FBA1AF}"/>
 </file>
 
 <file path=ppt/notesMasters/notesMaster1.xml><?xml version="1.0" encoding="utf-8"?>
@@ -508,7 +687,7 @@
         </p:nvSpPr>
         <p:spPr>
           <a:xfrm>
-            <a:off x="1524000" y="1122363"/>
+            <a:off x="1524000" y="1465263"/>
             <a:ext cx="9144000" cy="2387600"/>
           </a:xfrm>
         </p:spPr>
@@ -516,7 +695,7 @@
           <a:bodyPr anchor="b"/>
           <a:lstStyle>
             <a:lvl1pPr algn="ctr">
-              <a:defRPr sz="6000"/>
+              <a:defRPr sz="4800"/>
             </a:lvl1pPr>
           </a:lstStyle>
           <a:p>
@@ -545,7 +724,7 @@
         </p:nvSpPr>
         <p:spPr>
           <a:xfrm>
-            <a:off x="1524000" y="3602038"/>
+            <a:off x="1524000" y="3944938"/>
             <a:ext cx="9144000" cy="1655762"/>
           </a:xfrm>
         </p:spPr>
@@ -554,39 +733,39 @@
           <a:lstStyle>
             <a:lvl1pPr marL="0" indent="0" algn="ctr">
               <a:buNone/>
-              <a:defRPr sz="2400"/>
+              <a:defRPr sz="1920"/>
             </a:lvl1pPr>
             <a:lvl2pPr marL="457200" indent="0" algn="ctr">
               <a:buNone/>
-              <a:defRPr sz="2000"/>
+              <a:defRPr sz="1600"/>
             </a:lvl2pPr>
             <a:lvl3pPr marL="914400" indent="0" algn="ctr">
               <a:buNone/>
-              <a:defRPr sz="1800"/>
+              <a:defRPr sz="1440"/>
             </a:lvl3pPr>
             <a:lvl4pPr marL="1371600" indent="0" algn="ctr">
               <a:buNone/>
-              <a:defRPr sz="1600"/>
+              <a:defRPr sz="1280"/>
             </a:lvl4pPr>
             <a:lvl5pPr marL="1828800" indent="0" algn="ctr">
               <a:buNone/>
-              <a:defRPr sz="1600"/>
+              <a:defRPr sz="1280"/>
             </a:lvl5pPr>
             <a:lvl6pPr marL="2286000" indent="0" algn="ctr">
               <a:buNone/>
-              <a:defRPr sz="1600"/>
+              <a:defRPr sz="1280"/>
             </a:lvl6pPr>
             <a:lvl7pPr marL="2743200" indent="0" algn="ctr">
               <a:buNone/>
-              <a:defRPr sz="1600"/>
+              <a:defRPr sz="1280"/>
             </a:lvl7pPr>
             <a:lvl8pPr marL="3200400" indent="0" algn="ctr">
               <a:buNone/>
-              <a:defRPr sz="1600"/>
+              <a:defRPr sz="1280"/>
             </a:lvl8pPr>
             <a:lvl9pPr marL="3657600" indent="0" algn="ctr">
               <a:buNone/>
-              <a:defRPr sz="1600"/>
+              <a:defRPr sz="1280"/>
             </a:lvl9pPr>
           </a:lstStyle>
           <a:p>
@@ -647,35 +826,6 @@
           <a:bodyPr/>
           <a:lstStyle/>
           <a:p>
-            <a:endParaRPr lang="en-US"/>
-          </a:p>
-        </p:txBody>
-      </p:sp>
-      <p:sp>
-        <p:nvSpPr>
-          <p:cNvPr id="6" name="Slide Number Placeholder 5">
-            <a:extLst>
-              <a:ext uri="{FF2B5EF4-FFF2-40B4-BE49-F238E27FC236}">
-                <a16:creationId xmlns:a16="http://schemas.microsoft.com/office/drawing/2014/main" id="{9803C01F-60CF-4D6B-AC1F-944BF654DE59}"/>
-              </a:ext>
-            </a:extLst>
-          </p:cNvPr>
-          <p:cNvSpPr>
-            <a:spLocks noGrp="1"/>
-          </p:cNvSpPr>
-          <p:nvPr>
-            <p:ph type="sldNum" sz="quarter" idx="12"/>
-          </p:nvPr>
-        </p:nvSpPr>
-        <p:spPr/>
-        <p:txBody>
-          <a:bodyPr/>
-          <a:lstStyle/>
-          <a:p>
-            <a:fld id="{A7A2ED00-DBE6-4EB1-9131-CB7486CD5D1F}" type="slidenum">
-              <a:rPr lang="en-US" smtClean="0"/>
-              <a:t>‹#›</a:t>
-            </a:fld>
             <a:endParaRPr lang="en-US"/>
           </a:p>
         </p:txBody>
@@ -849,35 +999,6 @@
           </a:p>
         </p:txBody>
       </p:sp>
-      <p:sp>
-        <p:nvSpPr>
-          <p:cNvPr id="6" name="Slide Number Placeholder 5">
-            <a:extLst>
-              <a:ext uri="{FF2B5EF4-FFF2-40B4-BE49-F238E27FC236}">
-                <a16:creationId xmlns:a16="http://schemas.microsoft.com/office/drawing/2014/main" id="{916CB5BC-CEF5-41C0-A3C6-0228199CC91C}"/>
-              </a:ext>
-            </a:extLst>
-          </p:cNvPr>
-          <p:cNvSpPr>
-            <a:spLocks noGrp="1"/>
-          </p:cNvSpPr>
-          <p:nvPr>
-            <p:ph type="sldNum" sz="quarter" idx="12"/>
-          </p:nvPr>
-        </p:nvSpPr>
-        <p:spPr/>
-        <p:txBody>
-          <a:bodyPr/>
-          <a:lstStyle/>
-          <a:p>
-            <a:fld id="{A7A2ED00-DBE6-4EB1-9131-CB7486CD5D1F}" type="slidenum">
-              <a:rPr lang="en-US" smtClean="0"/>
-              <a:t>‹#›</a:t>
-            </a:fld>
-            <a:endParaRPr lang="en-US"/>
-          </a:p>
-        </p:txBody>
-      </p:sp>
     </p:spTree>
     <p:extLst>
       <p:ext uri="{BB962C8B-B14F-4D97-AF65-F5344CB8AC3E}">
@@ -926,7 +1047,7 @@
         </p:nvSpPr>
         <p:spPr>
           <a:xfrm>
-            <a:off x="8724900" y="365125"/>
+            <a:off x="8724900" y="708025"/>
             <a:ext cx="2628900" cy="5811838"/>
           </a:xfrm>
         </p:spPr>
@@ -959,7 +1080,7 @@
         </p:nvSpPr>
         <p:spPr>
           <a:xfrm>
-            <a:off x="838200" y="365125"/>
+            <a:off x="838200" y="708025"/>
             <a:ext cx="7734300" cy="5811838"/>
           </a:xfrm>
         </p:spPr>
@@ -1053,35 +1174,6 @@
           <a:bodyPr/>
           <a:lstStyle/>
           <a:p>
-            <a:endParaRPr lang="en-US"/>
-          </a:p>
-        </p:txBody>
-      </p:sp>
-      <p:sp>
-        <p:nvSpPr>
-          <p:cNvPr id="6" name="Slide Number Placeholder 5">
-            <a:extLst>
-              <a:ext uri="{FF2B5EF4-FFF2-40B4-BE49-F238E27FC236}">
-                <a16:creationId xmlns:a16="http://schemas.microsoft.com/office/drawing/2014/main" id="{967EF8FA-0268-4238-9ABE-711773920782}"/>
-              </a:ext>
-            </a:extLst>
-          </p:cNvPr>
-          <p:cNvSpPr>
-            <a:spLocks noGrp="1"/>
-          </p:cNvSpPr>
-          <p:nvPr>
-            <p:ph type="sldNum" sz="quarter" idx="12"/>
-          </p:nvPr>
-        </p:nvSpPr>
-        <p:spPr/>
-        <p:txBody>
-          <a:bodyPr/>
-          <a:lstStyle/>
-          <a:p>
-            <a:fld id="{A7A2ED00-DBE6-4EB1-9131-CB7486CD5D1F}" type="slidenum">
-              <a:rPr lang="en-US" smtClean="0"/>
-              <a:t>‹#›</a:t>
-            </a:fld>
             <a:endParaRPr lang="en-US"/>
           </a:p>
         </p:txBody>
@@ -1255,35 +1347,6 @@
           </a:p>
         </p:txBody>
       </p:sp>
-      <p:sp>
-        <p:nvSpPr>
-          <p:cNvPr id="6" name="Slide Number Placeholder 5">
-            <a:extLst>
-              <a:ext uri="{FF2B5EF4-FFF2-40B4-BE49-F238E27FC236}">
-                <a16:creationId xmlns:a16="http://schemas.microsoft.com/office/drawing/2014/main" id="{5C9E4413-133B-42E0-8FF1-0C300F155FC8}"/>
-              </a:ext>
-            </a:extLst>
-          </p:cNvPr>
-          <p:cNvSpPr>
-            <a:spLocks noGrp="1"/>
-          </p:cNvSpPr>
-          <p:nvPr>
-            <p:ph type="sldNum" sz="quarter" idx="12"/>
-          </p:nvPr>
-        </p:nvSpPr>
-        <p:spPr/>
-        <p:txBody>
-          <a:bodyPr/>
-          <a:lstStyle/>
-          <a:p>
-            <a:fld id="{A7A2ED00-DBE6-4EB1-9131-CB7486CD5D1F}" type="slidenum">
-              <a:rPr lang="en-US" smtClean="0"/>
-              <a:t>‹#›</a:t>
-            </a:fld>
-            <a:endParaRPr lang="en-US"/>
-          </a:p>
-        </p:txBody>
-      </p:sp>
     </p:spTree>
     <p:extLst>
       <p:ext uri="{BB962C8B-B14F-4D97-AF65-F5344CB8AC3E}">
@@ -1332,7 +1395,7 @@
         </p:nvSpPr>
         <p:spPr>
           <a:xfrm>
-            <a:off x="831850" y="1709738"/>
+            <a:off x="831850" y="2052638"/>
             <a:ext cx="10515600" cy="2852737"/>
           </a:xfrm>
         </p:spPr>
@@ -1340,7 +1403,7 @@
           <a:bodyPr anchor="b"/>
           <a:lstStyle>
             <a:lvl1pPr>
-              <a:defRPr sz="6000"/>
+              <a:defRPr sz="4800"/>
             </a:lvl1pPr>
           </a:lstStyle>
           <a:p>
@@ -1369,7 +1432,7 @@
         </p:nvSpPr>
         <p:spPr>
           <a:xfrm>
-            <a:off x="831850" y="4589463"/>
+            <a:off x="831850" y="4932363"/>
             <a:ext cx="10515600" cy="1500187"/>
           </a:xfrm>
         </p:spPr>
@@ -1378,7 +1441,7 @@
           <a:lstStyle>
             <a:lvl1pPr marL="0" indent="0">
               <a:buNone/>
-              <a:defRPr sz="2400">
+              <a:defRPr sz="1920">
                 <a:solidFill>
                   <a:schemeClr val="tx1">
                     <a:tint val="75000"/>
@@ -1388,7 +1451,7 @@
             </a:lvl1pPr>
             <a:lvl2pPr marL="457200" indent="0">
               <a:buNone/>
-              <a:defRPr sz="2000">
+              <a:defRPr sz="1600">
                 <a:solidFill>
                   <a:schemeClr val="tx1">
                     <a:tint val="75000"/>
@@ -1398,7 +1461,7 @@
             </a:lvl2pPr>
             <a:lvl3pPr marL="914400" indent="0">
               <a:buNone/>
-              <a:defRPr sz="1800">
+              <a:defRPr sz="1440">
                 <a:solidFill>
                   <a:schemeClr val="tx1">
                     <a:tint val="75000"/>
@@ -1408,7 +1471,7 @@
             </a:lvl3pPr>
             <a:lvl4pPr marL="1371600" indent="0">
               <a:buNone/>
-              <a:defRPr sz="1600">
+              <a:defRPr sz="1280">
                 <a:solidFill>
                   <a:schemeClr val="tx1">
                     <a:tint val="75000"/>
@@ -1418,7 +1481,7 @@
             </a:lvl4pPr>
             <a:lvl5pPr marL="1828800" indent="0">
               <a:buNone/>
-              <a:defRPr sz="1600">
+              <a:defRPr sz="1280">
                 <a:solidFill>
                   <a:schemeClr val="tx1">
                     <a:tint val="75000"/>
@@ -1428,7 +1491,7 @@
             </a:lvl5pPr>
             <a:lvl6pPr marL="2286000" indent="0">
               <a:buNone/>
-              <a:defRPr sz="1600">
+              <a:defRPr sz="1280">
                 <a:solidFill>
                   <a:schemeClr val="tx1">
                     <a:tint val="75000"/>
@@ -1438,7 +1501,7 @@
             </a:lvl6pPr>
             <a:lvl7pPr marL="2743200" indent="0">
               <a:buNone/>
-              <a:defRPr sz="1600">
+              <a:defRPr sz="1280">
                 <a:solidFill>
                   <a:schemeClr val="tx1">
                     <a:tint val="75000"/>
@@ -1448,7 +1511,7 @@
             </a:lvl7pPr>
             <a:lvl8pPr marL="3200400" indent="0">
               <a:buNone/>
-              <a:defRPr sz="1600">
+              <a:defRPr sz="1280">
                 <a:solidFill>
                   <a:schemeClr val="tx1">
                     <a:tint val="75000"/>
@@ -1458,7 +1521,7 @@
             </a:lvl8pPr>
             <a:lvl9pPr marL="3657600" indent="0">
               <a:buNone/>
-              <a:defRPr sz="1600">
+              <a:defRPr sz="1280">
                 <a:solidFill>
                   <a:schemeClr val="tx1">
                     <a:tint val="75000"/>
@@ -1526,35 +1589,6 @@
           <a:bodyPr/>
           <a:lstStyle/>
           <a:p>
-            <a:endParaRPr lang="en-US"/>
-          </a:p>
-        </p:txBody>
-      </p:sp>
-      <p:sp>
-        <p:nvSpPr>
-          <p:cNvPr id="6" name="Slide Number Placeholder 5">
-            <a:extLst>
-              <a:ext uri="{FF2B5EF4-FFF2-40B4-BE49-F238E27FC236}">
-                <a16:creationId xmlns:a16="http://schemas.microsoft.com/office/drawing/2014/main" id="{386E241A-1F15-4402-8303-35EF8A83C27C}"/>
-              </a:ext>
-            </a:extLst>
-          </p:cNvPr>
-          <p:cNvSpPr>
-            <a:spLocks noGrp="1"/>
-          </p:cNvSpPr>
-          <p:nvPr>
-            <p:ph type="sldNum" sz="quarter" idx="12"/>
-          </p:nvPr>
-        </p:nvSpPr>
-        <p:spPr/>
-        <p:txBody>
-          <a:bodyPr/>
-          <a:lstStyle/>
-          <a:p>
-            <a:fld id="{A7A2ED00-DBE6-4EB1-9131-CB7486CD5D1F}" type="slidenum">
-              <a:rPr lang="en-US" smtClean="0"/>
-              <a:t>‹#›</a:t>
-            </a:fld>
             <a:endParaRPr lang="en-US"/>
           </a:p>
         </p:txBody>
@@ -1635,7 +1669,7 @@
         </p:nvSpPr>
         <p:spPr>
           <a:xfrm>
-            <a:off x="838200" y="1825625"/>
+            <a:off x="838200" y="2168525"/>
             <a:ext cx="5181600" cy="4351338"/>
           </a:xfrm>
         </p:spPr>
@@ -1697,7 +1731,7 @@
         </p:nvSpPr>
         <p:spPr>
           <a:xfrm>
-            <a:off x="6172200" y="1825625"/>
+            <a:off x="6172200" y="2168525"/>
             <a:ext cx="5181600" cy="4351338"/>
           </a:xfrm>
         </p:spPr>
@@ -1791,35 +1825,6 @@
           <a:bodyPr/>
           <a:lstStyle/>
           <a:p>
-            <a:endParaRPr lang="en-US"/>
-          </a:p>
-        </p:txBody>
-      </p:sp>
-      <p:sp>
-        <p:nvSpPr>
-          <p:cNvPr id="7" name="Slide Number Placeholder 6">
-            <a:extLst>
-              <a:ext uri="{FF2B5EF4-FFF2-40B4-BE49-F238E27FC236}">
-                <a16:creationId xmlns:a16="http://schemas.microsoft.com/office/drawing/2014/main" id="{1E469732-7F77-4782-8B09-1786F3F1C1C5}"/>
-              </a:ext>
-            </a:extLst>
-          </p:cNvPr>
-          <p:cNvSpPr>
-            <a:spLocks noGrp="1"/>
-          </p:cNvSpPr>
-          <p:nvPr>
-            <p:ph type="sldNum" sz="quarter" idx="12"/>
-          </p:nvPr>
-        </p:nvSpPr>
-        <p:spPr/>
-        <p:txBody>
-          <a:bodyPr/>
-          <a:lstStyle/>
-          <a:p>
-            <a:fld id="{A7A2ED00-DBE6-4EB1-9131-CB7486CD5D1F}" type="slidenum">
-              <a:rPr lang="en-US" smtClean="0"/>
-              <a:t>‹#›</a:t>
-            </a:fld>
             <a:endParaRPr lang="en-US"/>
           </a:p>
         </p:txBody>
@@ -1872,7 +1877,7 @@
         </p:nvSpPr>
         <p:spPr>
           <a:xfrm>
-            <a:off x="839788" y="365125"/>
+            <a:off x="839788" y="708025"/>
             <a:ext cx="10515600" cy="1325563"/>
           </a:xfrm>
         </p:spPr>
@@ -1905,7 +1910,7 @@
         </p:nvSpPr>
         <p:spPr>
           <a:xfrm>
-            <a:off x="839788" y="1681163"/>
+            <a:off x="839788" y="2024063"/>
             <a:ext cx="5157787" cy="823912"/>
           </a:xfrm>
         </p:spPr>
@@ -1914,39 +1919,39 @@
           <a:lstStyle>
             <a:lvl1pPr marL="0" indent="0">
               <a:buNone/>
-              <a:defRPr sz="2400" b="1"/>
+              <a:defRPr sz="1920" b="1"/>
             </a:lvl1pPr>
             <a:lvl2pPr marL="457200" indent="0">
               <a:buNone/>
-              <a:defRPr sz="2000" b="1"/>
+              <a:defRPr sz="1600" b="1"/>
             </a:lvl2pPr>
             <a:lvl3pPr marL="914400" indent="0">
               <a:buNone/>
-              <a:defRPr sz="1800" b="1"/>
+              <a:defRPr sz="1440" b="1"/>
             </a:lvl3pPr>
             <a:lvl4pPr marL="1371600" indent="0">
               <a:buNone/>
-              <a:defRPr sz="1600" b="1"/>
+              <a:defRPr sz="1280" b="1"/>
             </a:lvl4pPr>
             <a:lvl5pPr marL="1828800" indent="0">
               <a:buNone/>
-              <a:defRPr sz="1600" b="1"/>
+              <a:defRPr sz="1280" b="1"/>
             </a:lvl5pPr>
             <a:lvl6pPr marL="2286000" indent="0">
               <a:buNone/>
-              <a:defRPr sz="1600" b="1"/>
+              <a:defRPr sz="1280" b="1"/>
             </a:lvl6pPr>
             <a:lvl7pPr marL="2743200" indent="0">
               <a:buNone/>
-              <a:defRPr sz="1600" b="1"/>
+              <a:defRPr sz="1280" b="1"/>
             </a:lvl7pPr>
             <a:lvl8pPr marL="3200400" indent="0">
               <a:buNone/>
-              <a:defRPr sz="1600" b="1"/>
+              <a:defRPr sz="1280" b="1"/>
             </a:lvl8pPr>
             <a:lvl9pPr marL="3657600" indent="0">
               <a:buNone/>
-              <a:defRPr sz="1600" b="1"/>
+              <a:defRPr sz="1280" b="1"/>
             </a:lvl9pPr>
           </a:lstStyle>
           <a:p>
@@ -1976,7 +1981,7 @@
         </p:nvSpPr>
         <p:spPr>
           <a:xfrm>
-            <a:off x="839788" y="2505075"/>
+            <a:off x="839788" y="2847975"/>
             <a:ext cx="5157787" cy="3684588"/>
           </a:xfrm>
         </p:spPr>
@@ -2038,7 +2043,7 @@
         </p:nvSpPr>
         <p:spPr>
           <a:xfrm>
-            <a:off x="6172200" y="1681163"/>
+            <a:off x="6172200" y="2024063"/>
             <a:ext cx="5183188" cy="823912"/>
           </a:xfrm>
         </p:spPr>
@@ -2047,39 +2052,39 @@
           <a:lstStyle>
             <a:lvl1pPr marL="0" indent="0">
               <a:buNone/>
-              <a:defRPr sz="2400" b="1"/>
+              <a:defRPr sz="1920" b="1"/>
             </a:lvl1pPr>
             <a:lvl2pPr marL="457200" indent="0">
               <a:buNone/>
-              <a:defRPr sz="2000" b="1"/>
+              <a:defRPr sz="1600" b="1"/>
             </a:lvl2pPr>
             <a:lvl3pPr marL="914400" indent="0">
               <a:buNone/>
-              <a:defRPr sz="1800" b="1"/>
+              <a:defRPr sz="1440" b="1"/>
             </a:lvl3pPr>
             <a:lvl4pPr marL="1371600" indent="0">
               <a:buNone/>
-              <a:defRPr sz="1600" b="1"/>
+              <a:defRPr sz="1280" b="1"/>
             </a:lvl4pPr>
             <a:lvl5pPr marL="1828800" indent="0">
               <a:buNone/>
-              <a:defRPr sz="1600" b="1"/>
+              <a:defRPr sz="1280" b="1"/>
             </a:lvl5pPr>
             <a:lvl6pPr marL="2286000" indent="0">
               <a:buNone/>
-              <a:defRPr sz="1600" b="1"/>
+              <a:defRPr sz="1280" b="1"/>
             </a:lvl6pPr>
             <a:lvl7pPr marL="2743200" indent="0">
               <a:buNone/>
-              <a:defRPr sz="1600" b="1"/>
+              <a:defRPr sz="1280" b="1"/>
             </a:lvl7pPr>
             <a:lvl8pPr marL="3200400" indent="0">
               <a:buNone/>
-              <a:defRPr sz="1600" b="1"/>
+              <a:defRPr sz="1280" b="1"/>
             </a:lvl8pPr>
             <a:lvl9pPr marL="3657600" indent="0">
               <a:buNone/>
-              <a:defRPr sz="1600" b="1"/>
+              <a:defRPr sz="1280" b="1"/>
             </a:lvl9pPr>
           </a:lstStyle>
           <a:p>
@@ -2109,7 +2114,7 @@
         </p:nvSpPr>
         <p:spPr>
           <a:xfrm>
-            <a:off x="6172200" y="2505075"/>
+            <a:off x="6172200" y="2847975"/>
             <a:ext cx="5183188" cy="3684588"/>
           </a:xfrm>
         </p:spPr>
@@ -2203,35 +2208,6 @@
           <a:bodyPr/>
           <a:lstStyle/>
           <a:p>
-            <a:endParaRPr lang="en-US"/>
-          </a:p>
-        </p:txBody>
-      </p:sp>
-      <p:sp>
-        <p:nvSpPr>
-          <p:cNvPr id="9" name="Slide Number Placeholder 8">
-            <a:extLst>
-              <a:ext uri="{FF2B5EF4-FFF2-40B4-BE49-F238E27FC236}">
-                <a16:creationId xmlns:a16="http://schemas.microsoft.com/office/drawing/2014/main" id="{DDDE09EA-E922-4B33-A98A-9ACB931B0888}"/>
-              </a:ext>
-            </a:extLst>
-          </p:cNvPr>
-          <p:cNvSpPr>
-            <a:spLocks noGrp="1"/>
-          </p:cNvSpPr>
-          <p:nvPr>
-            <p:ph type="sldNum" sz="quarter" idx="12"/>
-          </p:nvPr>
-        </p:nvSpPr>
-        <p:spPr/>
-        <p:txBody>
-          <a:bodyPr/>
-          <a:lstStyle/>
-          <a:p>
-            <a:fld id="{A7A2ED00-DBE6-4EB1-9131-CB7486CD5D1F}" type="slidenum">
-              <a:rPr lang="en-US" smtClean="0"/>
-              <a:t>‹#›</a:t>
-            </a:fld>
             <a:endParaRPr lang="en-US"/>
           </a:p>
         </p:txBody>
@@ -2348,35 +2324,6 @@
           </a:p>
         </p:txBody>
       </p:sp>
-      <p:sp>
-        <p:nvSpPr>
-          <p:cNvPr id="5" name="Slide Number Placeholder 4">
-            <a:extLst>
-              <a:ext uri="{FF2B5EF4-FFF2-40B4-BE49-F238E27FC236}">
-                <a16:creationId xmlns:a16="http://schemas.microsoft.com/office/drawing/2014/main" id="{FDFCB2F3-1F61-4779-97E7-B398919B8FF9}"/>
-              </a:ext>
-            </a:extLst>
-          </p:cNvPr>
-          <p:cNvSpPr>
-            <a:spLocks noGrp="1"/>
-          </p:cNvSpPr>
-          <p:nvPr>
-            <p:ph type="sldNum" sz="quarter" idx="12"/>
-          </p:nvPr>
-        </p:nvSpPr>
-        <p:spPr/>
-        <p:txBody>
-          <a:bodyPr/>
-          <a:lstStyle/>
-          <a:p>
-            <a:fld id="{A7A2ED00-DBE6-4EB1-9131-CB7486CD5D1F}" type="slidenum">
-              <a:rPr lang="en-US" smtClean="0"/>
-              <a:t>‹#›</a:t>
-            </a:fld>
-            <a:endParaRPr lang="en-US"/>
-          </a:p>
-        </p:txBody>
-      </p:sp>
     </p:spTree>
     <p:extLst>
       <p:ext uri="{BB962C8B-B14F-4D97-AF65-F5344CB8AC3E}">
@@ -2461,35 +2408,6 @@
           </a:p>
         </p:txBody>
       </p:sp>
-      <p:sp>
-        <p:nvSpPr>
-          <p:cNvPr id="4" name="Slide Number Placeholder 3">
-            <a:extLst>
-              <a:ext uri="{FF2B5EF4-FFF2-40B4-BE49-F238E27FC236}">
-                <a16:creationId xmlns:a16="http://schemas.microsoft.com/office/drawing/2014/main" id="{D79F247A-ECC6-497E-A9FE-C093CE35565E}"/>
-              </a:ext>
-            </a:extLst>
-          </p:cNvPr>
-          <p:cNvSpPr>
-            <a:spLocks noGrp="1"/>
-          </p:cNvSpPr>
-          <p:nvPr>
-            <p:ph type="sldNum" sz="quarter" idx="12"/>
-          </p:nvPr>
-        </p:nvSpPr>
-        <p:spPr/>
-        <p:txBody>
-          <a:bodyPr/>
-          <a:lstStyle/>
-          <a:p>
-            <a:fld id="{A7A2ED00-DBE6-4EB1-9131-CB7486CD5D1F}" type="slidenum">
-              <a:rPr lang="en-US" smtClean="0"/>
-              <a:t>‹#›</a:t>
-            </a:fld>
-            <a:endParaRPr lang="en-US"/>
-          </a:p>
-        </p:txBody>
-      </p:sp>
     </p:spTree>
     <p:extLst>
       <p:ext uri="{BB962C8B-B14F-4D97-AF65-F5344CB8AC3E}">
@@ -2538,7 +2456,7 @@
         </p:nvSpPr>
         <p:spPr>
           <a:xfrm>
-            <a:off x="839788" y="457200"/>
+            <a:off x="839788" y="800100"/>
             <a:ext cx="3932237" cy="1600200"/>
           </a:xfrm>
         </p:spPr>
@@ -2546,7 +2464,7 @@
           <a:bodyPr anchor="b"/>
           <a:lstStyle>
             <a:lvl1pPr>
-              <a:defRPr sz="3200"/>
+              <a:defRPr sz="2560"/>
             </a:lvl1pPr>
           </a:lstStyle>
           <a:p>
@@ -2575,7 +2493,7 @@
         </p:nvSpPr>
         <p:spPr>
           <a:xfrm>
-            <a:off x="5183188" y="987425"/>
+            <a:off x="5183188" y="1330325"/>
             <a:ext cx="6172200" cy="4873625"/>
           </a:xfrm>
         </p:spPr>
@@ -2583,31 +2501,31 @@
           <a:bodyPr/>
           <a:lstStyle>
             <a:lvl1pPr>
-              <a:defRPr sz="3200"/>
+              <a:defRPr sz="2560"/>
             </a:lvl1pPr>
             <a:lvl2pPr>
-              <a:defRPr sz="2800"/>
+              <a:defRPr sz="2240"/>
             </a:lvl2pPr>
             <a:lvl3pPr>
-              <a:defRPr sz="2400"/>
+              <a:defRPr sz="1920"/>
             </a:lvl3pPr>
             <a:lvl4pPr>
-              <a:defRPr sz="2000"/>
+              <a:defRPr sz="1600"/>
             </a:lvl4pPr>
             <a:lvl5pPr>
-              <a:defRPr sz="2000"/>
+              <a:defRPr sz="1600"/>
             </a:lvl5pPr>
             <a:lvl6pPr>
-              <a:defRPr sz="2000"/>
+              <a:defRPr sz="1600"/>
             </a:lvl6pPr>
             <a:lvl7pPr>
-              <a:defRPr sz="2000"/>
+              <a:defRPr sz="1600"/>
             </a:lvl7pPr>
             <a:lvl8pPr>
-              <a:defRPr sz="2000"/>
+              <a:defRPr sz="1600"/>
             </a:lvl8pPr>
             <a:lvl9pPr>
-              <a:defRPr sz="2000"/>
+              <a:defRPr sz="1600"/>
             </a:lvl9pPr>
           </a:lstStyle>
           <a:p>
@@ -2665,7 +2583,7 @@
         </p:nvSpPr>
         <p:spPr>
           <a:xfrm>
-            <a:off x="839788" y="2057400"/>
+            <a:off x="839788" y="2400300"/>
             <a:ext cx="3932237" cy="3811588"/>
           </a:xfrm>
         </p:spPr>
@@ -2674,39 +2592,39 @@
           <a:lstStyle>
             <a:lvl1pPr marL="0" indent="0">
               <a:buNone/>
-              <a:defRPr sz="1600"/>
+              <a:defRPr sz="1280"/>
             </a:lvl1pPr>
             <a:lvl2pPr marL="457200" indent="0">
               <a:buNone/>
-              <a:defRPr sz="1400"/>
+              <a:defRPr sz="1120"/>
             </a:lvl2pPr>
             <a:lvl3pPr marL="914400" indent="0">
               <a:buNone/>
-              <a:defRPr sz="1200"/>
+              <a:defRPr sz="960"/>
             </a:lvl3pPr>
             <a:lvl4pPr marL="1371600" indent="0">
               <a:buNone/>
-              <a:defRPr sz="1000"/>
+              <a:defRPr sz="800"/>
             </a:lvl4pPr>
             <a:lvl5pPr marL="1828800" indent="0">
               <a:buNone/>
-              <a:defRPr sz="1000"/>
+              <a:defRPr sz="800"/>
             </a:lvl5pPr>
             <a:lvl6pPr marL="2286000" indent="0">
               <a:buNone/>
-              <a:defRPr sz="1000"/>
+              <a:defRPr sz="800"/>
             </a:lvl6pPr>
             <a:lvl7pPr marL="2743200" indent="0">
               <a:buNone/>
-              <a:defRPr sz="1000"/>
+              <a:defRPr sz="800"/>
             </a:lvl7pPr>
             <a:lvl8pPr marL="3200400" indent="0">
               <a:buNone/>
-              <a:defRPr sz="1000"/>
+              <a:defRPr sz="800"/>
             </a:lvl8pPr>
             <a:lvl9pPr marL="3657600" indent="0">
               <a:buNone/>
-              <a:defRPr sz="1000"/>
+              <a:defRPr sz="800"/>
             </a:lvl9pPr>
           </a:lstStyle>
           <a:p>
@@ -2768,35 +2686,6 @@
           <a:bodyPr/>
           <a:lstStyle/>
           <a:p>
-            <a:endParaRPr lang="en-US"/>
-          </a:p>
-        </p:txBody>
-      </p:sp>
-      <p:sp>
-        <p:nvSpPr>
-          <p:cNvPr id="7" name="Slide Number Placeholder 6">
-            <a:extLst>
-              <a:ext uri="{FF2B5EF4-FFF2-40B4-BE49-F238E27FC236}">
-                <a16:creationId xmlns:a16="http://schemas.microsoft.com/office/drawing/2014/main" id="{5C83070E-930B-4752-A498-E12CB9DF834D}"/>
-              </a:ext>
-            </a:extLst>
-          </p:cNvPr>
-          <p:cNvSpPr>
-            <a:spLocks noGrp="1"/>
-          </p:cNvSpPr>
-          <p:nvPr>
-            <p:ph type="sldNum" sz="quarter" idx="12"/>
-          </p:nvPr>
-        </p:nvSpPr>
-        <p:spPr/>
-        <p:txBody>
-          <a:bodyPr/>
-          <a:lstStyle/>
-          <a:p>
-            <a:fld id="{A7A2ED00-DBE6-4EB1-9131-CB7486CD5D1F}" type="slidenum">
-              <a:rPr lang="en-US" smtClean="0"/>
-              <a:t>‹#›</a:t>
-            </a:fld>
             <a:endParaRPr lang="en-US"/>
           </a:p>
         </p:txBody>
@@ -2849,7 +2738,7 @@
         </p:nvSpPr>
         <p:spPr>
           <a:xfrm>
-            <a:off x="839788" y="457200"/>
+            <a:off x="839788" y="800100"/>
             <a:ext cx="3932237" cy="1600200"/>
           </a:xfrm>
         </p:spPr>
@@ -2857,7 +2746,7 @@
           <a:bodyPr anchor="b"/>
           <a:lstStyle>
             <a:lvl1pPr>
-              <a:defRPr sz="3200"/>
+              <a:defRPr sz="2560"/>
             </a:lvl1pPr>
           </a:lstStyle>
           <a:p>
@@ -2886,7 +2775,7 @@
         </p:nvSpPr>
         <p:spPr>
           <a:xfrm>
-            <a:off x="5183188" y="987425"/>
+            <a:off x="5183188" y="1330325"/>
             <a:ext cx="6172200" cy="4873625"/>
           </a:xfrm>
         </p:spPr>
@@ -2895,39 +2784,39 @@
           <a:lstStyle>
             <a:lvl1pPr marL="0" indent="0">
               <a:buNone/>
-              <a:defRPr sz="3200"/>
+              <a:defRPr sz="2560"/>
             </a:lvl1pPr>
             <a:lvl2pPr marL="457200" indent="0">
               <a:buNone/>
-              <a:defRPr sz="2800"/>
+              <a:defRPr sz="2240"/>
             </a:lvl2pPr>
             <a:lvl3pPr marL="914400" indent="0">
               <a:buNone/>
-              <a:defRPr sz="2400"/>
+              <a:defRPr sz="1920"/>
             </a:lvl3pPr>
             <a:lvl4pPr marL="1371600" indent="0">
               <a:buNone/>
-              <a:defRPr sz="2000"/>
+              <a:defRPr sz="1600"/>
             </a:lvl4pPr>
             <a:lvl5pPr marL="1828800" indent="0">
               <a:buNone/>
-              <a:defRPr sz="2000"/>
+              <a:defRPr sz="1600"/>
             </a:lvl5pPr>
             <a:lvl6pPr marL="2286000" indent="0">
               <a:buNone/>
-              <a:defRPr sz="2000"/>
+              <a:defRPr sz="1600"/>
             </a:lvl6pPr>
             <a:lvl7pPr marL="2743200" indent="0">
               <a:buNone/>
-              <a:defRPr sz="2000"/>
+              <a:defRPr sz="1600"/>
             </a:lvl7pPr>
             <a:lvl8pPr marL="3200400" indent="0">
               <a:buNone/>
-              <a:defRPr sz="2000"/>
+              <a:defRPr sz="1600"/>
             </a:lvl8pPr>
             <a:lvl9pPr marL="3657600" indent="0">
               <a:buNone/>
-              <a:defRPr sz="2000"/>
+              <a:defRPr sz="1600"/>
             </a:lvl9pPr>
           </a:lstStyle>
           <a:p>
@@ -2953,7 +2842,7 @@
         </p:nvSpPr>
         <p:spPr>
           <a:xfrm>
-            <a:off x="839788" y="2057400"/>
+            <a:off x="839788" y="2400300"/>
             <a:ext cx="3932237" cy="3811588"/>
           </a:xfrm>
         </p:spPr>
@@ -2962,39 +2851,39 @@
           <a:lstStyle>
             <a:lvl1pPr marL="0" indent="0">
               <a:buNone/>
-              <a:defRPr sz="1600"/>
+              <a:defRPr sz="1280"/>
             </a:lvl1pPr>
             <a:lvl2pPr marL="457200" indent="0">
               <a:buNone/>
-              <a:defRPr sz="1400"/>
+              <a:defRPr sz="1120"/>
             </a:lvl2pPr>
             <a:lvl3pPr marL="914400" indent="0">
               <a:buNone/>
-              <a:defRPr sz="1200"/>
+              <a:defRPr sz="960"/>
             </a:lvl3pPr>
             <a:lvl4pPr marL="1371600" indent="0">
               <a:buNone/>
-              <a:defRPr sz="1000"/>
+              <a:defRPr sz="800"/>
             </a:lvl4pPr>
             <a:lvl5pPr marL="1828800" indent="0">
               <a:buNone/>
-              <a:defRPr sz="1000"/>
+              <a:defRPr sz="800"/>
             </a:lvl5pPr>
             <a:lvl6pPr marL="2286000" indent="0">
               <a:buNone/>
-              <a:defRPr sz="1000"/>
+              <a:defRPr sz="800"/>
             </a:lvl6pPr>
             <a:lvl7pPr marL="2743200" indent="0">
               <a:buNone/>
-              <a:defRPr sz="1000"/>
+              <a:defRPr sz="800"/>
             </a:lvl7pPr>
             <a:lvl8pPr marL="3200400" indent="0">
               <a:buNone/>
-              <a:defRPr sz="1000"/>
+              <a:defRPr sz="800"/>
             </a:lvl8pPr>
             <a:lvl9pPr marL="3657600" indent="0">
               <a:buNone/>
-              <a:defRPr sz="1000"/>
+              <a:defRPr sz="800"/>
             </a:lvl9pPr>
           </a:lstStyle>
           <a:p>
@@ -3056,35 +2945,6 @@
           <a:bodyPr/>
           <a:lstStyle/>
           <a:p>
-            <a:endParaRPr lang="en-US"/>
-          </a:p>
-        </p:txBody>
-      </p:sp>
-      <p:sp>
-        <p:nvSpPr>
-          <p:cNvPr id="7" name="Slide Number Placeholder 6">
-            <a:extLst>
-              <a:ext uri="{FF2B5EF4-FFF2-40B4-BE49-F238E27FC236}">
-                <a16:creationId xmlns:a16="http://schemas.microsoft.com/office/drawing/2014/main" id="{FA604FB6-B488-4823-A04E-73451C543522}"/>
-              </a:ext>
-            </a:extLst>
-          </p:cNvPr>
-          <p:cNvSpPr>
-            <a:spLocks noGrp="1"/>
-          </p:cNvSpPr>
-          <p:nvPr>
-            <p:ph type="sldNum" sz="quarter" idx="12"/>
-          </p:nvPr>
-        </p:nvSpPr>
-        <p:spPr/>
-        <p:txBody>
-          <a:bodyPr/>
-          <a:lstStyle/>
-          <a:p>
-            <a:fld id="{A7A2ED00-DBE6-4EB1-9131-CB7486CD5D1F}" type="slidenum">
-              <a:rPr lang="en-US" smtClean="0"/>
-              <a:t>‹#›</a:t>
-            </a:fld>
             <a:endParaRPr lang="en-US"/>
           </a:p>
         </p:txBody>
@@ -3142,7 +3002,7 @@
         </p:nvSpPr>
         <p:spPr>
           <a:xfrm>
-            <a:off x="838200" y="365125"/>
+            <a:off x="838200" y="708025"/>
             <a:ext cx="10515600" cy="1325563"/>
           </a:xfrm>
           <a:prstGeom prst="rect">
@@ -3180,7 +3040,7 @@
         </p:nvSpPr>
         <p:spPr>
           <a:xfrm>
-            <a:off x="838200" y="1825625"/>
+            <a:off x="838200" y="2168525"/>
             <a:ext cx="10515600" cy="4351338"/>
           </a:xfrm>
           <a:prstGeom prst="rect">
@@ -3247,7 +3107,7 @@
         </p:nvSpPr>
         <p:spPr>
           <a:xfrm>
-            <a:off x="838200" y="6356350"/>
+            <a:off x="838200" y="6699250"/>
             <a:ext cx="2743200" cy="365125"/>
           </a:xfrm>
           <a:prstGeom prst="rect">
@@ -3258,7 +3118,7 @@
           <a:bodyPr vert="horz" lIns="91440" tIns="45720" rIns="91440" bIns="45720" rtlCol="0" anchor="ctr"/>
           <a:lstStyle>
             <a:lvl1pPr algn="l">
-              <a:defRPr sz="1200">
+              <a:defRPr sz="960">
                 <a:solidFill>
                   <a:schemeClr val="tx1">
                     <a:tint val="75000"/>
@@ -3294,7 +3154,7 @@
         </p:nvSpPr>
         <p:spPr>
           <a:xfrm>
-            <a:off x="4038600" y="6356350"/>
+            <a:off x="4038600" y="6699250"/>
             <a:ext cx="4114800" cy="365125"/>
           </a:xfrm>
           <a:prstGeom prst="rect">
@@ -3305,7 +3165,7 @@
           <a:bodyPr vert="horz" lIns="91440" tIns="45720" rIns="91440" bIns="45720" rtlCol="0" anchor="ctr"/>
           <a:lstStyle>
             <a:lvl1pPr algn="ctr">
-              <a:defRPr sz="1200">
+              <a:defRPr sz="960">
                 <a:solidFill>
                   <a:schemeClr val="tx1">
                     <a:tint val="75000"/>
@@ -3315,53 +3175,6 @@
             </a:lvl1pPr>
           </a:lstStyle>
           <a:p>
-            <a:endParaRPr lang="en-US"/>
-          </a:p>
-        </p:txBody>
-      </p:sp>
-      <p:sp>
-        <p:nvSpPr>
-          <p:cNvPr id="6" name="Slide Number Placeholder 5">
-            <a:extLst>
-              <a:ext uri="{FF2B5EF4-FFF2-40B4-BE49-F238E27FC236}">
-                <a16:creationId xmlns:a16="http://schemas.microsoft.com/office/drawing/2014/main" id="{F94C909D-C22C-43D3-AF66-2624F435F8AD}"/>
-              </a:ext>
-            </a:extLst>
-          </p:cNvPr>
-          <p:cNvSpPr>
-            <a:spLocks noGrp="1"/>
-          </p:cNvSpPr>
-          <p:nvPr>
-            <p:ph type="sldNum" sz="quarter" idx="4"/>
-          </p:nvPr>
-        </p:nvSpPr>
-        <p:spPr>
-          <a:xfrm>
-            <a:off x="8610600" y="6356350"/>
-            <a:ext cx="2743200" cy="365125"/>
-          </a:xfrm>
-          <a:prstGeom prst="rect">
-            <a:avLst/>
-          </a:prstGeom>
-        </p:spPr>
-        <p:txBody>
-          <a:bodyPr vert="horz" lIns="91440" tIns="45720" rIns="91440" bIns="45720" rtlCol="0" anchor="ctr"/>
-          <a:lstStyle>
-            <a:lvl1pPr algn="r">
-              <a:defRPr sz="1200">
-                <a:solidFill>
-                  <a:schemeClr val="tx1">
-                    <a:tint val="75000"/>
-                  </a:schemeClr>
-                </a:solidFill>
-              </a:defRPr>
-            </a:lvl1pPr>
-          </a:lstStyle>
-          <a:p>
-            <a:fld id="{A7A2ED00-DBE6-4EB1-9131-CB7486CD5D1F}" type="slidenum">
-              <a:rPr lang="en-US" smtClean="0"/>
-              <a:t>‹#›</a:t>
-            </a:fld>
             <a:endParaRPr lang="en-US"/>
           </a:p>
         </p:txBody>
@@ -3398,11 +3211,11 @@
           <a:spcPct val="0"/>
         </a:spcBef>
         <a:buNone/>
-        <a:defRPr sz="4400" kern="1200">
+        <a:defRPr sz="3520" kern="1200">
           <a:solidFill>
             <a:schemeClr val="tx1"/>
           </a:solidFill>
-          <a:latin typeface="+mj-lt"/>
+          <a:latin typeface="Arial"/>
           <a:ea typeface="+mj-ea"/>
           <a:cs typeface="+mj-cs"/>
         </a:defRPr>
@@ -3418,11 +3231,11 @@
         </a:spcBef>
         <a:buFont typeface="Arial" panose="020B0604020202020204" pitchFamily="34" charset="0"/>
         <a:buChar char="•"/>
-        <a:defRPr sz="2800" kern="1200">
+        <a:defRPr sz="2240" kern="1200">
           <a:solidFill>
             <a:schemeClr val="tx1"/>
           </a:solidFill>
-          <a:latin typeface="+mn-lt"/>
+          <a:latin typeface="Arial"/>
           <a:ea typeface="+mn-ea"/>
           <a:cs typeface="+mn-cs"/>
         </a:defRPr>
@@ -3436,11 +3249,11 @@
         </a:spcBef>
         <a:buFont typeface="Arial" panose="020B0604020202020204" pitchFamily="34" charset="0"/>
         <a:buChar char="•"/>
-        <a:defRPr sz="2400" kern="1200">
+        <a:defRPr sz="1920" kern="1200">
           <a:solidFill>
             <a:schemeClr val="tx1"/>
           </a:solidFill>
-          <a:latin typeface="+mn-lt"/>
+          <a:latin typeface="Arial"/>
           <a:ea typeface="+mn-ea"/>
           <a:cs typeface="+mn-cs"/>
         </a:defRPr>
@@ -3454,11 +3267,11 @@
         </a:spcBef>
         <a:buFont typeface="Arial" panose="020B0604020202020204" pitchFamily="34" charset="0"/>
         <a:buChar char="•"/>
-        <a:defRPr sz="2000" kern="1200">
+        <a:defRPr sz="1600" kern="1200">
           <a:solidFill>
             <a:schemeClr val="tx1"/>
           </a:solidFill>
-          <a:latin typeface="+mn-lt"/>
+          <a:latin typeface="Arial"/>
           <a:ea typeface="+mn-ea"/>
           <a:cs typeface="+mn-cs"/>
         </a:defRPr>
@@ -3472,11 +3285,11 @@
         </a:spcBef>
         <a:buFont typeface="Arial" panose="020B0604020202020204" pitchFamily="34" charset="0"/>
         <a:buChar char="•"/>
-        <a:defRPr sz="1800" kern="1200">
+        <a:defRPr sz="1440" kern="1200">
           <a:solidFill>
             <a:schemeClr val="tx1"/>
           </a:solidFill>
-          <a:latin typeface="+mn-lt"/>
+          <a:latin typeface="Arial"/>
           <a:ea typeface="+mn-ea"/>
           <a:cs typeface="+mn-cs"/>
         </a:defRPr>
@@ -3490,11 +3303,11 @@
         </a:spcBef>
         <a:buFont typeface="Arial" panose="020B0604020202020204" pitchFamily="34" charset="0"/>
         <a:buChar char="•"/>
-        <a:defRPr sz="1800" kern="1200">
+        <a:defRPr sz="1440" kern="1200">
           <a:solidFill>
             <a:schemeClr val="tx1"/>
           </a:solidFill>
-          <a:latin typeface="+mn-lt"/>
+          <a:latin typeface="Arial"/>
           <a:ea typeface="+mn-ea"/>
           <a:cs typeface="+mn-cs"/>
         </a:defRPr>
@@ -3508,11 +3321,11 @@
         </a:spcBef>
         <a:buFont typeface="Arial" panose="020B0604020202020204" pitchFamily="34" charset="0"/>
         <a:buChar char="•"/>
-        <a:defRPr sz="1800" kern="1200">
+        <a:defRPr sz="1440" kern="1200">
           <a:solidFill>
             <a:schemeClr val="tx1"/>
           </a:solidFill>
-          <a:latin typeface="+mn-lt"/>
+          <a:latin typeface="Arial"/>
           <a:ea typeface="+mn-ea"/>
           <a:cs typeface="+mn-cs"/>
         </a:defRPr>
@@ -3526,11 +3339,11 @@
         </a:spcBef>
         <a:buFont typeface="Arial" panose="020B0604020202020204" pitchFamily="34" charset="0"/>
         <a:buChar char="•"/>
-        <a:defRPr sz="1800" kern="1200">
+        <a:defRPr sz="1440" kern="1200">
           <a:solidFill>
             <a:schemeClr val="tx1"/>
           </a:solidFill>
-          <a:latin typeface="+mn-lt"/>
+          <a:latin typeface="Arial"/>
           <a:ea typeface="+mn-ea"/>
           <a:cs typeface="+mn-cs"/>
         </a:defRPr>
@@ -3544,11 +3357,11 @@
         </a:spcBef>
         <a:buFont typeface="Arial" panose="020B0604020202020204" pitchFamily="34" charset="0"/>
         <a:buChar char="•"/>
-        <a:defRPr sz="1800" kern="1200">
+        <a:defRPr sz="1440" kern="1200">
           <a:solidFill>
             <a:schemeClr val="tx1"/>
           </a:solidFill>
-          <a:latin typeface="+mn-lt"/>
+          <a:latin typeface="Arial"/>
           <a:ea typeface="+mn-ea"/>
           <a:cs typeface="+mn-cs"/>
         </a:defRPr>
@@ -3562,11 +3375,11 @@
         </a:spcBef>
         <a:buFont typeface="Arial" panose="020B0604020202020204" pitchFamily="34" charset="0"/>
         <a:buChar char="•"/>
-        <a:defRPr sz="1800" kern="1200">
+        <a:defRPr sz="1440" kern="1200">
           <a:solidFill>
             <a:schemeClr val="tx1"/>
           </a:solidFill>
-          <a:latin typeface="+mn-lt"/>
+          <a:latin typeface="Arial"/>
           <a:ea typeface="+mn-ea"/>
           <a:cs typeface="+mn-cs"/>
         </a:defRPr>
@@ -3577,91 +3390,91 @@
         <a:defRPr lang="en-US"/>
       </a:defPPr>
       <a:lvl1pPr marL="0" algn="l" defTabSz="914400" rtl="0" eaLnBrk="1" latinLnBrk="0" hangingPunct="1">
-        <a:defRPr sz="1800" kern="1200">
+        <a:defRPr sz="1440" kern="1200">
           <a:solidFill>
             <a:schemeClr val="tx1"/>
           </a:solidFill>
-          <a:latin typeface="+mn-lt"/>
+          <a:latin typeface="Arial"/>
           <a:ea typeface="+mn-ea"/>
           <a:cs typeface="+mn-cs"/>
         </a:defRPr>
       </a:lvl1pPr>
       <a:lvl2pPr marL="457200" algn="l" defTabSz="914400" rtl="0" eaLnBrk="1" latinLnBrk="0" hangingPunct="1">
-        <a:defRPr sz="1800" kern="1200">
+        <a:defRPr sz="1440" kern="1200">
           <a:solidFill>
             <a:schemeClr val="tx1"/>
           </a:solidFill>
-          <a:latin typeface="+mn-lt"/>
+          <a:latin typeface="Arial"/>
           <a:ea typeface="+mn-ea"/>
           <a:cs typeface="+mn-cs"/>
         </a:defRPr>
       </a:lvl2pPr>
       <a:lvl3pPr marL="914400" algn="l" defTabSz="914400" rtl="0" eaLnBrk="1" latinLnBrk="0" hangingPunct="1">
-        <a:defRPr sz="1800" kern="1200">
+        <a:defRPr sz="1440" kern="1200">
           <a:solidFill>
             <a:schemeClr val="tx1"/>
           </a:solidFill>
-          <a:latin typeface="+mn-lt"/>
+          <a:latin typeface="Arial"/>
           <a:ea typeface="+mn-ea"/>
           <a:cs typeface="+mn-cs"/>
         </a:defRPr>
       </a:lvl3pPr>
       <a:lvl4pPr marL="1371600" algn="l" defTabSz="914400" rtl="0" eaLnBrk="1" latinLnBrk="0" hangingPunct="1">
-        <a:defRPr sz="1800" kern="1200">
+        <a:defRPr sz="1440" kern="1200">
           <a:solidFill>
             <a:schemeClr val="tx1"/>
           </a:solidFill>
-          <a:latin typeface="+mn-lt"/>
+          <a:latin typeface="Arial"/>
           <a:ea typeface="+mn-ea"/>
           <a:cs typeface="+mn-cs"/>
         </a:defRPr>
       </a:lvl4pPr>
       <a:lvl5pPr marL="1828800" algn="l" defTabSz="914400" rtl="0" eaLnBrk="1" latinLnBrk="0" hangingPunct="1">
-        <a:defRPr sz="1800" kern="1200">
+        <a:defRPr sz="1440" kern="1200">
           <a:solidFill>
             <a:schemeClr val="tx1"/>
           </a:solidFill>
-          <a:latin typeface="+mn-lt"/>
+          <a:latin typeface="Arial"/>
           <a:ea typeface="+mn-ea"/>
           <a:cs typeface="+mn-cs"/>
         </a:defRPr>
       </a:lvl5pPr>
       <a:lvl6pPr marL="2286000" algn="l" defTabSz="914400" rtl="0" eaLnBrk="1" latinLnBrk="0" hangingPunct="1">
-        <a:defRPr sz="1800" kern="1200">
+        <a:defRPr sz="1440" kern="1200">
           <a:solidFill>
             <a:schemeClr val="tx1"/>
           </a:solidFill>
-          <a:latin typeface="+mn-lt"/>
+          <a:latin typeface="Arial"/>
           <a:ea typeface="+mn-ea"/>
           <a:cs typeface="+mn-cs"/>
         </a:defRPr>
       </a:lvl6pPr>
       <a:lvl7pPr marL="2743200" algn="l" defTabSz="914400" rtl="0" eaLnBrk="1" latinLnBrk="0" hangingPunct="1">
-        <a:defRPr sz="1800" kern="1200">
+        <a:defRPr sz="1440" kern="1200">
           <a:solidFill>
             <a:schemeClr val="tx1"/>
           </a:solidFill>
-          <a:latin typeface="+mn-lt"/>
+          <a:latin typeface="Arial"/>
           <a:ea typeface="+mn-ea"/>
           <a:cs typeface="+mn-cs"/>
         </a:defRPr>
       </a:lvl7pPr>
       <a:lvl8pPr marL="3200400" algn="l" defTabSz="914400" rtl="0" eaLnBrk="1" latinLnBrk="0" hangingPunct="1">
-        <a:defRPr sz="1800" kern="1200">
+        <a:defRPr sz="1440" kern="1200">
           <a:solidFill>
             <a:schemeClr val="tx1"/>
           </a:solidFill>
-          <a:latin typeface="+mn-lt"/>
+          <a:latin typeface="Arial"/>
           <a:ea typeface="+mn-ea"/>
           <a:cs typeface="+mn-cs"/>
         </a:defRPr>
       </a:lvl8pPr>
       <a:lvl9pPr marL="3657600" algn="l" defTabSz="914400" rtl="0" eaLnBrk="1" latinLnBrk="0" hangingPunct="1">
-        <a:defRPr sz="1800" kern="1200">
+        <a:defRPr sz="1440" kern="1200">
           <a:solidFill>
             <a:schemeClr val="tx1"/>
           </a:solidFill>
-          <a:latin typeface="+mn-lt"/>
+          <a:latin typeface="Arial"/>
           <a:ea typeface="+mn-ea"/>
           <a:cs typeface="+mn-cs"/>
         </a:defRPr>
@@ -3721,7 +3534,7 @@
         </p:nvSpPr>
         <p:spPr>
           <a:xfrm>
-            <a:off x="0" y="0"/>
+            <a:off x="0" y="342900"/>
             <a:ext cx="12191999" cy="6858000"/>
           </a:xfrm>
           <a:prstGeom prst="rect">
@@ -3786,7 +3599,7 @@
         </p:nvSpPr>
         <p:spPr>
           <a:xfrm flipH="1">
-            <a:off x="0" y="0"/>
+            <a:off x="0" y="342900"/>
             <a:ext cx="4421332" cy="6858000"/>
           </a:xfrm>
           <a:custGeom>
@@ -3911,7 +3724,7 @@
               <a:tabLst/>
               <a:defRPr/>
             </a:pPr>
-            <a:endParaRPr kumimoji="0" lang="en-US" sz="1800" b="0" i="0" u="none" strike="noStrike" kern="1200" cap="none" spc="0" normalizeH="0" baseline="0" noProof="0">
+            <a:endParaRPr kumimoji="0" lang="en-US" sz="1440" b="0" i="0" u="none" strike="noStrike" kern="1200" cap="none" spc="0" normalizeH="0" baseline="0" noProof="0">
               <a:ln>
                 <a:noFill/>
               </a:ln>
@@ -3921,7 +3734,7 @@
               <a:effectLst/>
               <a:uLnTx/>
               <a:uFillTx/>
-              <a:latin typeface="Calibri" panose="020F0502020204030204"/>
+              <a:latin typeface="Arial" panose="020F0502020204030204"/>
               <a:ea typeface="+mn-ea"/>
               <a:cs typeface="+mn-cs"/>
             </a:endParaRPr>
@@ -3953,7 +3766,7 @@
         </p:nvSpPr>
         <p:spPr>
           <a:xfrm>
-            <a:off x="1" y="0"/>
+            <a:off x="1" y="342900"/>
             <a:ext cx="4232227" cy="6858000"/>
           </a:xfrm>
           <a:custGeom>
@@ -4076,7 +3889,7 @@
               <a:tabLst/>
               <a:defRPr/>
             </a:pPr>
-            <a:endParaRPr kumimoji="0" lang="en-US" sz="1800" b="0" i="0" u="none" strike="noStrike" kern="1200" cap="none" spc="0" normalizeH="0" baseline="0" noProof="0">
+            <a:endParaRPr kumimoji="0" lang="en-US" sz="1440" b="0" i="0" u="none" strike="noStrike" kern="1200" cap="none" spc="0" normalizeH="0" baseline="0" noProof="0">
               <a:ln>
                 <a:noFill/>
               </a:ln>
@@ -4086,7 +3899,7 @@
               <a:effectLst/>
               <a:uLnTx/>
               <a:uFillTx/>
-              <a:latin typeface="Calibri" panose="020F0502020204030204"/>
+              <a:latin typeface="Arial" panose="020F0502020204030204"/>
               <a:ea typeface="+mn-ea"/>
               <a:cs typeface="+mn-cs"/>
             </a:endParaRPr>
@@ -4111,7 +3924,7 @@
         </p:nvSpPr>
         <p:spPr>
           <a:xfrm>
-            <a:off x="804672" y="1412489"/>
+            <a:off x="804672" y="1755389"/>
             <a:ext cx="2871095" cy="2156621"/>
           </a:xfrm>
         </p:spPr>
@@ -4122,7 +3935,7 @@
           <a:lstStyle/>
           <a:p>
             <a:r>
-              <a:rPr lang="en-US" sz="3600">
+              <a:rPr lang="en-US" sz="2880">
                 <a:solidFill>
                   <a:srgbClr val="FFFFFF"/>
                 </a:solidFill>
@@ -4168,7 +3981,7 @@
                   </a:lnSpc>
                 </a:pPr>
                 <a:r>
-                  <a:rPr lang="en-US" sz="2900" dirty="0"/>
+                  <a:rPr lang="en-US" sz="2320" dirty="0"/>
                   <a:t>Fourier Series (sines, cosines or complex exponentials of discrete frequencies </a:t>
                 </a:r>
                 <a14:m>
@@ -4176,14 +3989,14 @@
                     <m:sSub>
                       <m:sSubPr>
                         <m:ctrlPr>
-                          <a:rPr lang="en-US" sz="2900" i="1">
+                          <a:rPr lang="en-US" sz="2320" i="1">
                             <a:latin typeface="Cambria Math" panose="02040503050406030204" pitchFamily="18" charset="0"/>
                           </a:rPr>
                         </m:ctrlPr>
                       </m:sSubPr>
                       <m:e>
                         <m:r>
-                          <a:rPr lang="en-US" sz="2900" i="1">
+                          <a:rPr lang="en-US" sz="2320" i="1">
                             <a:latin typeface="Cambria Math" panose="02040503050406030204" pitchFamily="18" charset="0"/>
                             <a:ea typeface="Cambria Math" panose="02040503050406030204" pitchFamily="18" charset="0"/>
                           </a:rPr>
@@ -4192,7 +4005,7 @@
                       </m:e>
                       <m:sub>
                         <m:r>
-                          <a:rPr lang="en-US" sz="2900" b="0" i="1">
+                          <a:rPr lang="en-US" sz="2320" b="0" i="1">
                             <a:latin typeface="Cambria Math" panose="02040503050406030204" pitchFamily="18" charset="0"/>
                           </a:rPr>
                           <m:t>0</m:t>
@@ -4200,7 +4013,7 @@
                       </m:sub>
                     </m:sSub>
                     <m:r>
-                      <a:rPr lang="en-US" sz="2900" b="0" i="1">
+                      <a:rPr lang="en-US" sz="2320" b="0" i="1">
                         <a:latin typeface="Cambria Math" panose="02040503050406030204" pitchFamily="18" charset="0"/>
                       </a:rPr>
                       <m:t>𝑘</m:t>
@@ -4208,7 +4021,7 @@
                   </m:oMath>
                 </a14:m>
                 <a:r>
-                  <a:rPr lang="en-US" sz="2900" dirty="0"/>
+                  <a:rPr lang="en-US" sz="2320" dirty="0"/>
                   <a:t>) are used to analyze the frequency content of periodic signals </a:t>
                 </a:r>
               </a:p>
@@ -4219,7 +4032,7 @@
                   </a:lnSpc>
                 </a:pPr>
                 <a:r>
-                  <a:rPr lang="en-US" sz="2900" dirty="0"/>
+                  <a:rPr lang="en-US" sz="2320" dirty="0"/>
                   <a:t>Fourier Transform is used to analyze the frequency content of non-periodic signal. </a:t>
                 </a:r>
               </a:p>
@@ -4230,12 +4043,12 @@
                   </a:lnSpc>
                 </a:pPr>
                 <a:r>
-                  <a:rPr lang="en-US" sz="2900" dirty="0"/>
+                  <a:rPr lang="en-US" sz="2320" dirty="0"/>
                   <a:t>Frequency is a continuous parameter. </a:t>
                 </a:r>
               </a:p>
               <a:p>
-                <a:endParaRPr lang="en-US" sz="2900" dirty="0"/>
+                <a:endParaRPr lang="en-US" sz="2320" dirty="0"/>
               </a:p>
               <a:p>
                 <a:pPr marL="0" indent="0">
@@ -4248,7 +4061,7 @@
                     </m:oMathParaPr>
                     <m:oMath xmlns:m="http://schemas.openxmlformats.org/officeDocument/2006/math">
                       <m:r>
-                        <a:rPr lang="en-US" sz="2900" b="0" i="1">
+                        <a:rPr lang="en-US" sz="2320" b="0" i="1">
                           <a:latin typeface="Cambria Math" panose="02040503050406030204" pitchFamily="18" charset="0"/>
                         </a:rPr>
                         <m:t>𝑥</m:t>
@@ -4256,14 +4069,14 @@
                       <m:d>
                         <m:dPr>
                           <m:ctrlPr>
-                            <a:rPr lang="en-US" sz="2900" b="0" i="1">
+                            <a:rPr lang="en-US" sz="2320" b="0" i="1">
                               <a:latin typeface="Cambria Math" panose="02040503050406030204" pitchFamily="18" charset="0"/>
                             </a:rPr>
                           </m:ctrlPr>
                         </m:dPr>
                         <m:e>
                           <m:r>
-                            <a:rPr lang="en-US" sz="2900" b="0" i="1">
+                            <a:rPr lang="en-US" sz="2320" b="0" i="1">
                               <a:latin typeface="Cambria Math" panose="02040503050406030204" pitchFamily="18" charset="0"/>
                             </a:rPr>
                             <m:t>𝑡</m:t>
@@ -4271,7 +4084,7 @@
                         </m:e>
                       </m:d>
                       <m:r>
-                        <a:rPr lang="en-US" sz="2900" b="0" i="1">
+                        <a:rPr lang="en-US" sz="2320" b="0" i="1">
                           <a:latin typeface="Cambria Math" panose="02040503050406030204" pitchFamily="18" charset="0"/>
                         </a:rPr>
                         <m:t>=</m:t>
@@ -4280,7 +4093,7 @@
                         <m:naryPr>
                           <m:limLoc m:val="undOvr"/>
                           <m:ctrlPr>
-                            <a:rPr lang="en-US" sz="2900" b="0" i="1">
+                            <a:rPr lang="en-US" sz="2320" b="0" i="1">
                               <a:latin typeface="Cambria Math" panose="02040503050406030204" pitchFamily="18" charset="0"/>
                             </a:rPr>
                           </m:ctrlPr>
@@ -4290,13 +4103,13 @@
                             <m:rPr>
                               <m:brk m:alnAt="24"/>
                             </m:rPr>
-                            <a:rPr lang="en-US" sz="2900" b="0" i="1">
+                            <a:rPr lang="en-US" sz="2320" b="0" i="1">
                               <a:latin typeface="Cambria Math" panose="02040503050406030204" pitchFamily="18" charset="0"/>
                             </a:rPr>
                             <m:t>−</m:t>
                           </m:r>
                           <m:r>
-                            <a:rPr lang="en-US" sz="2900" b="0" i="1">
+                            <a:rPr lang="en-US" sz="2320" b="0" i="1">
                               <a:latin typeface="Cambria Math" panose="02040503050406030204" pitchFamily="18" charset="0"/>
                               <a:ea typeface="Cambria Math" panose="02040503050406030204" pitchFamily="18" charset="0"/>
                             </a:rPr>
@@ -4305,13 +4118,13 @@
                         </m:sub>
                         <m:sup>
                           <m:r>
-                            <a:rPr lang="en-US" sz="2900" b="0" i="1">
+                            <a:rPr lang="en-US" sz="2320" b="0" i="1">
                               <a:latin typeface="Cambria Math" panose="02040503050406030204" pitchFamily="18" charset="0"/>
                             </a:rPr>
                             <m:t>+</m:t>
                           </m:r>
                           <m:r>
-                            <a:rPr lang="en-US" sz="2900" b="0" i="1">
+                            <a:rPr lang="en-US" sz="2320" b="0" i="1">
                               <a:latin typeface="Cambria Math" panose="02040503050406030204" pitchFamily="18" charset="0"/>
                               <a:ea typeface="Cambria Math" panose="02040503050406030204" pitchFamily="18" charset="0"/>
                             </a:rPr>
@@ -4320,25 +4133,25 @@
                         </m:sup>
                         <m:e>
                           <m:r>
-                            <a:rPr lang="en-US" sz="2900" b="0" i="1">
+                            <a:rPr lang="en-US" sz="2320" b="0" i="1">
                               <a:latin typeface="Cambria Math" panose="02040503050406030204" pitchFamily="18" charset="0"/>
                             </a:rPr>
                             <m:t>𝑋</m:t>
                           </m:r>
                           <m:r>
-                            <a:rPr lang="en-US" sz="2900" b="0" i="1">
+                            <a:rPr lang="en-US" sz="2320" b="0" i="1">
                               <a:latin typeface="Cambria Math" panose="02040503050406030204" pitchFamily="18" charset="0"/>
                             </a:rPr>
                             <m:t>(</m:t>
                           </m:r>
                           <m:r>
-                            <a:rPr lang="en-US" sz="2900" b="0" i="1">
+                            <a:rPr lang="en-US" sz="2320" b="0" i="1">
                               <a:latin typeface="Cambria Math" panose="02040503050406030204" pitchFamily="18" charset="0"/>
                             </a:rPr>
                             <m:t>𝑓</m:t>
                           </m:r>
                           <m:r>
-                            <a:rPr lang="en-US" sz="2900" b="0" i="1">
+                            <a:rPr lang="en-US" sz="2320" b="0" i="1">
                               <a:latin typeface="Cambria Math" panose="02040503050406030204" pitchFamily="18" charset="0"/>
                             </a:rPr>
                             <m:t>)</m:t>
@@ -4346,14 +4159,14 @@
                           <m:sSup>
                             <m:sSupPr>
                               <m:ctrlPr>
-                                <a:rPr lang="en-US" sz="2900" b="0" i="1">
+                                <a:rPr lang="en-US" sz="2320" b="0" i="1">
                                   <a:latin typeface="Cambria Math" panose="02040503050406030204" pitchFamily="18" charset="0"/>
                                 </a:rPr>
                               </m:ctrlPr>
                             </m:sSupPr>
                             <m:e>
                               <m:r>
-                                <a:rPr lang="en-US" sz="2900" b="0" i="1">
+                                <a:rPr lang="en-US" sz="2320" b="0" i="1">
                                   <a:latin typeface="Cambria Math" panose="02040503050406030204" pitchFamily="18" charset="0"/>
                                 </a:rPr>
                                 <m:t>𝑒</m:t>
@@ -4361,26 +4174,26 @@
                             </m:e>
                             <m:sup>
                               <m:r>
-                                <a:rPr lang="en-US" sz="2900" b="0" i="1">
+                                <a:rPr lang="en-US" sz="2320" b="0" i="1">
                                   <a:latin typeface="Cambria Math" panose="02040503050406030204" pitchFamily="18" charset="0"/>
                                 </a:rPr>
                                 <m:t>𝑗</m:t>
                               </m:r>
                               <m:r>
-                                <a:rPr lang="en-US" sz="2900" b="0" i="1">
+                                <a:rPr lang="en-US" sz="2320" b="0" i="1">
                                   <a:latin typeface="Cambria Math" panose="02040503050406030204" pitchFamily="18" charset="0"/>
                                 </a:rPr>
                                 <m:t>2</m:t>
                               </m:r>
                               <m:r>
-                                <a:rPr lang="en-US" sz="2900" b="0" i="1">
+                                <a:rPr lang="en-US" sz="2320" b="0" i="1">
                                   <a:latin typeface="Cambria Math" panose="02040503050406030204" pitchFamily="18" charset="0"/>
                                   <a:ea typeface="Cambria Math" panose="02040503050406030204" pitchFamily="18" charset="0"/>
                                 </a:rPr>
                                 <m:t>𝜋</m:t>
                               </m:r>
                               <m:r>
-                                <a:rPr lang="en-US" sz="2900" b="0" i="1">
+                                <a:rPr lang="en-US" sz="2320" b="0" i="1">
                                   <a:latin typeface="Cambria Math" panose="02040503050406030204" pitchFamily="18" charset="0"/>
                                   <a:ea typeface="Cambria Math" panose="02040503050406030204" pitchFamily="18" charset="0"/>
                                 </a:rPr>
@@ -4389,7 +4202,7 @@
                             </m:sup>
                           </m:sSup>
                           <m:r>
-                            <a:rPr lang="en-US" sz="2900" b="0" i="1">
+                            <a:rPr lang="en-US" sz="2320" b="0" i="1">
                               <a:latin typeface="Cambria Math" panose="02040503050406030204" pitchFamily="18" charset="0"/>
                             </a:rPr>
                             <m:t>𝑑𝑓</m:t>
@@ -4397,7 +4210,7 @@
                         </m:e>
                       </m:nary>
                       <m:r>
-                        <a:rPr lang="en-US" sz="2900" b="0" i="1">
+                        <a:rPr lang="en-US" sz="2320" b="0" i="1">
                           <a:latin typeface="Cambria Math" panose="02040503050406030204" pitchFamily="18" charset="0"/>
                         </a:rPr>
                         <m:t>  </m:t>
@@ -4405,7 +4218,7 @@
                     </m:oMath>
                   </m:oMathPara>
                 </a14:m>
-                <a:endParaRPr lang="en-US" sz="2900" b="0" i="1" dirty="0">
+                <a:endParaRPr lang="en-US" sz="2320" b="0" i="1" dirty="0">
                   <a:latin typeface="Cambria Math" panose="02040503050406030204" pitchFamily="18" charset="0"/>
                 </a:endParaRPr>
               </a:p>
@@ -4413,7 +4226,7 @@
                 <a:pPr marL="0" indent="0">
                   <a:buNone/>
                 </a:pPr>
-                <a:endParaRPr lang="en-US" sz="2900" b="0" i="1" dirty="0">
+                <a:endParaRPr lang="en-US" sz="2320" b="0" i="1" dirty="0">
                   <a:latin typeface="Cambria Math" panose="02040503050406030204" pitchFamily="18" charset="0"/>
                 </a:endParaRPr>
               </a:p>
@@ -4428,7 +4241,7 @@
                     </m:oMathParaPr>
                     <m:oMath xmlns:m="http://schemas.openxmlformats.org/officeDocument/2006/math">
                       <m:r>
-                        <a:rPr lang="en-US" sz="2900" b="0" i="1">
+                        <a:rPr lang="en-US" sz="2320" b="0" i="1">
                           <a:latin typeface="Cambria Math" panose="02040503050406030204" pitchFamily="18" charset="0"/>
                         </a:rPr>
                         <m:t>𝑋</m:t>
@@ -4436,14 +4249,14 @@
                       <m:d>
                         <m:dPr>
                           <m:ctrlPr>
-                            <a:rPr lang="en-US" sz="2900" b="0" i="1">
+                            <a:rPr lang="en-US" sz="2320" b="0" i="1">
                               <a:latin typeface="Cambria Math" panose="02040503050406030204" pitchFamily="18" charset="0"/>
                             </a:rPr>
                           </m:ctrlPr>
                         </m:dPr>
                         <m:e>
                           <m:r>
-                            <a:rPr lang="en-US" sz="2900" b="0" i="1" smtClean="0">
+                            <a:rPr lang="en-US" sz="2320" b="0" i="1" smtClean="0">
                               <a:latin typeface="Cambria Math" panose="02040503050406030204" pitchFamily="18" charset="0"/>
                             </a:rPr>
                             <m:t>𝑓</m:t>
@@ -4451,7 +4264,7 @@
                         </m:e>
                       </m:d>
                       <m:r>
-                        <a:rPr lang="en-US" sz="2900" b="0" i="1">
+                        <a:rPr lang="en-US" sz="2320" b="0" i="1">
                           <a:latin typeface="Cambria Math" panose="02040503050406030204" pitchFamily="18" charset="0"/>
                         </a:rPr>
                         <m:t>=</m:t>
@@ -4460,7 +4273,7 @@
                         <m:naryPr>
                           <m:limLoc m:val="undOvr"/>
                           <m:ctrlPr>
-                            <a:rPr lang="en-US" sz="2900" b="0" i="1">
+                            <a:rPr lang="en-US" sz="2320" b="0" i="1">
                               <a:latin typeface="Cambria Math" panose="02040503050406030204" pitchFamily="18" charset="0"/>
                             </a:rPr>
                           </m:ctrlPr>
@@ -4470,13 +4283,13 @@
                             <m:rPr>
                               <m:brk m:alnAt="24"/>
                             </m:rPr>
-                            <a:rPr lang="en-US" sz="2900" b="0" i="1">
+                            <a:rPr lang="en-US" sz="2320" b="0" i="1">
                               <a:latin typeface="Cambria Math" panose="02040503050406030204" pitchFamily="18" charset="0"/>
                             </a:rPr>
                             <m:t>−</m:t>
                           </m:r>
                           <m:r>
-                            <a:rPr lang="en-US" sz="2900" b="0" i="1">
+                            <a:rPr lang="en-US" sz="2320" b="0" i="1">
                               <a:latin typeface="Cambria Math" panose="02040503050406030204" pitchFamily="18" charset="0"/>
                               <a:ea typeface="Cambria Math" panose="02040503050406030204" pitchFamily="18" charset="0"/>
                             </a:rPr>
@@ -4485,13 +4298,13 @@
                         </m:sub>
                         <m:sup>
                           <m:r>
-                            <a:rPr lang="en-US" sz="2900" b="0" i="1">
+                            <a:rPr lang="en-US" sz="2320" b="0" i="1">
                               <a:latin typeface="Cambria Math" panose="02040503050406030204" pitchFamily="18" charset="0"/>
                             </a:rPr>
                             <m:t>+</m:t>
                           </m:r>
                           <m:r>
-                            <a:rPr lang="en-US" sz="2900" b="0" i="1">
+                            <a:rPr lang="en-US" sz="2320" b="0" i="1">
                               <a:latin typeface="Cambria Math" panose="02040503050406030204" pitchFamily="18" charset="0"/>
                               <a:ea typeface="Cambria Math" panose="02040503050406030204" pitchFamily="18" charset="0"/>
                             </a:rPr>
@@ -4500,26 +4313,26 @@
                         </m:sup>
                         <m:e>
                           <m:r>
-                            <a:rPr lang="en-US" sz="2900" b="0" i="1">
+                            <a:rPr lang="en-US" sz="2320" b="0" i="1">
                               <a:latin typeface="Cambria Math" panose="02040503050406030204" pitchFamily="18" charset="0"/>
                               <a:ea typeface="Cambria Math" panose="02040503050406030204" pitchFamily="18" charset="0"/>
                             </a:rPr>
                             <m:t>𝑥</m:t>
                           </m:r>
                           <m:r>
-                            <a:rPr lang="en-US" sz="2900" b="0" i="1">
+                            <a:rPr lang="en-US" sz="2320" b="0" i="1">
                               <a:latin typeface="Cambria Math" panose="02040503050406030204" pitchFamily="18" charset="0"/>
                             </a:rPr>
                             <m:t>(</m:t>
                           </m:r>
                           <m:r>
-                            <a:rPr lang="en-US" sz="2900" b="0" i="1">
+                            <a:rPr lang="en-US" sz="2320" b="0" i="1">
                               <a:latin typeface="Cambria Math" panose="02040503050406030204" pitchFamily="18" charset="0"/>
                             </a:rPr>
                             <m:t>𝑡</m:t>
                           </m:r>
                           <m:r>
-                            <a:rPr lang="en-US" sz="2900" b="0" i="1">
+                            <a:rPr lang="en-US" sz="2320" b="0" i="1">
                               <a:latin typeface="Cambria Math" panose="02040503050406030204" pitchFamily="18" charset="0"/>
                             </a:rPr>
                             <m:t>)</m:t>
@@ -4527,14 +4340,14 @@
                           <m:sSup>
                             <m:sSupPr>
                               <m:ctrlPr>
-                                <a:rPr lang="en-US" sz="2900" b="0" i="1">
+                                <a:rPr lang="en-US" sz="2320" b="0" i="1">
                                   <a:latin typeface="Cambria Math" panose="02040503050406030204" pitchFamily="18" charset="0"/>
                                 </a:rPr>
                               </m:ctrlPr>
                             </m:sSupPr>
                             <m:e>
                               <m:r>
-                                <a:rPr lang="en-US" sz="2900" b="0" i="1">
+                                <a:rPr lang="en-US" sz="2320" b="0" i="1">
                                   <a:latin typeface="Cambria Math" panose="02040503050406030204" pitchFamily="18" charset="0"/>
                                 </a:rPr>
                                 <m:t>𝑒</m:t>
@@ -4542,32 +4355,32 @@
                             </m:e>
                             <m:sup>
                               <m:r>
-                                <a:rPr lang="en-US" sz="2900" b="0" i="1">
+                                <a:rPr lang="en-US" sz="2320" b="0" i="1">
                                   <a:latin typeface="Cambria Math" panose="02040503050406030204" pitchFamily="18" charset="0"/>
                                 </a:rPr>
                                 <m:t>−</m:t>
                               </m:r>
                               <m:r>
-                                <a:rPr lang="en-US" sz="2900" b="0" i="1">
+                                <a:rPr lang="en-US" sz="2320" b="0" i="1">
                                   <a:latin typeface="Cambria Math" panose="02040503050406030204" pitchFamily="18" charset="0"/>
                                 </a:rPr>
                                 <m:t>𝑗</m:t>
                               </m:r>
                               <m:r>
-                                <a:rPr lang="en-US" sz="2900" b="0" i="1">
+                                <a:rPr lang="en-US" sz="2320" b="0" i="1">
                                   <a:latin typeface="Cambria Math" panose="02040503050406030204" pitchFamily="18" charset="0"/>
                                 </a:rPr>
                                 <m:t>2</m:t>
                               </m:r>
                               <m:r>
-                                <a:rPr lang="en-US" sz="2900" b="0" i="1">
+                                <a:rPr lang="en-US" sz="2320" b="0" i="1">
                                   <a:latin typeface="Cambria Math" panose="02040503050406030204" pitchFamily="18" charset="0"/>
                                   <a:ea typeface="Cambria Math" panose="02040503050406030204" pitchFamily="18" charset="0"/>
                                 </a:rPr>
                                 <m:t>𝜋</m:t>
                               </m:r>
                               <m:r>
-                                <a:rPr lang="en-US" sz="2900" b="0" i="1">
+                                <a:rPr lang="en-US" sz="2320" b="0" i="1">
                                   <a:latin typeface="Cambria Math" panose="02040503050406030204" pitchFamily="18" charset="0"/>
                                   <a:ea typeface="Cambria Math" panose="02040503050406030204" pitchFamily="18" charset="0"/>
                                 </a:rPr>
@@ -4576,7 +4389,7 @@
                             </m:sup>
                           </m:sSup>
                           <m:r>
-                            <a:rPr lang="en-US" sz="2900" b="0" i="1">
+                            <a:rPr lang="en-US" sz="2320" b="0" i="1">
                               <a:latin typeface="Cambria Math" panose="02040503050406030204" pitchFamily="18" charset="0"/>
                             </a:rPr>
                             <m:t>𝑑𝑡</m:t>
@@ -4586,7 +4399,7 @@
                     </m:oMath>
                   </m:oMathPara>
                 </a14:m>
-                <a:endParaRPr lang="en-US" sz="2900" b="0" i="1" dirty="0">
+                <a:endParaRPr lang="en-US" sz="2320" b="0" i="1" dirty="0">
                   <a:latin typeface="Cambria Math" panose="02040503050406030204" pitchFamily="18" charset="0"/>
                 </a:endParaRPr>
               </a:p>
@@ -4595,7 +4408,7 @@
                   <a:buNone/>
                 </a:pPr>
                 <a:r>
-                  <a:rPr lang="en-US" sz="2900" dirty="0"/>
+                  <a:rPr lang="en-US" sz="2320" dirty="0"/>
                   <a:t>  </a:t>
                 </a:r>
               </a:p>
@@ -4603,13 +4416,13 @@
                 <a:pPr marL="0" indent="0">
                   <a:buNone/>
                 </a:pPr>
-                <a:endParaRPr lang="en-US" sz="2000" dirty="0"/>
+                <a:endParaRPr lang="en-US" sz="1600" dirty="0"/>
               </a:p>
               <a:p>
                 <a:pPr marL="0" indent="0">
                   <a:buNone/>
                 </a:pPr>
-                <a:endParaRPr lang="en-US" sz="1400" dirty="0"/>
+                <a:endParaRPr lang="en-US" sz="1120" dirty="0"/>
               </a:p>
             </p:txBody>
           </p:sp>
@@ -4694,7 +4507,7 @@
                   </a:lnSpc>
                 </a:pPr>
                 <a:r>
-                  <a:rPr lang="en-US" sz="2900" dirty="0"/>
+                  <a:rPr lang="en-US" sz="2320" dirty="0"/>
                   <a:t>Fourier Transform</a:t>
                 </a:r>
               </a:p>
@@ -4705,7 +4518,7 @@
                   </a:lnSpc>
                 </a:pPr>
                 <a:r>
-                  <a:rPr lang="en-US" sz="2900" dirty="0"/>
+                  <a:rPr lang="en-US" sz="2320" dirty="0"/>
                   <a:t>Discrete time Fourier Transform</a:t>
                 </a:r>
               </a:p>
@@ -4716,7 +4529,7 @@
                   </a:lnSpc>
                 </a:pPr>
                 <a:r>
-                  <a:rPr lang="en-US" sz="2900" dirty="0"/>
+                  <a:rPr lang="en-US" sz="2320" dirty="0"/>
                   <a:t>Fast Fourier Transform (for a non-periodic digital signal)</a:t>
                 </a:r>
               </a:p>
@@ -4727,7 +4540,7 @@
                   </a:lnSpc>
                 </a:pPr>
                 <a:r>
-                  <a:rPr lang="en-US" sz="2900" dirty="0"/>
+                  <a:rPr lang="en-US" sz="2320" dirty="0"/>
                   <a:t>Time is measured in integers (bins) </a:t>
                 </a:r>
               </a:p>
@@ -4738,12 +4551,12 @@
                   </a:lnSpc>
                 </a:pPr>
                 <a:r>
-                  <a:rPr lang="en-US" sz="2900" dirty="0"/>
+                  <a:rPr lang="en-US" sz="2320" dirty="0"/>
                   <a:t>Frequency is measure in bins too.</a:t>
                 </a:r>
               </a:p>
               <a:p>
-                <a:endParaRPr lang="en-US" sz="2900" dirty="0"/>
+                <a:endParaRPr lang="en-US" sz="2320" dirty="0"/>
               </a:p>
               <a:p>
                 <a:pPr marL="0" indent="0">
@@ -4756,7 +4569,7 @@
                     </m:oMathParaPr>
                     <m:oMath xmlns:m="http://schemas.openxmlformats.org/officeDocument/2006/math">
                       <m:r>
-                        <a:rPr lang="en-US" sz="2900" b="0" i="1">
+                        <a:rPr lang="en-US" sz="2320" b="0" i="1">
                           <a:latin typeface="Cambria Math" panose="02040503050406030204" pitchFamily="18" charset="0"/>
                         </a:rPr>
                         <m:t>𝑥</m:t>
@@ -4766,14 +4579,14 @@
                           <m:begChr m:val="["/>
                           <m:endChr m:val="]"/>
                           <m:ctrlPr>
-                            <a:rPr lang="en-US" sz="2900" b="0" i="1">
+                            <a:rPr lang="en-US" sz="2320" b="0" i="1">
                               <a:latin typeface="Cambria Math" panose="02040503050406030204" pitchFamily="18" charset="0"/>
                             </a:rPr>
                           </m:ctrlPr>
                         </m:dPr>
                         <m:e>
                           <m:r>
-                            <a:rPr lang="en-US" sz="2900" b="0" i="1">
+                            <a:rPr lang="en-US" sz="2320" b="0" i="1">
                               <a:latin typeface="Cambria Math" panose="02040503050406030204" pitchFamily="18" charset="0"/>
                             </a:rPr>
                             <m:t>𝑛</m:t>
@@ -4781,7 +4594,7 @@
                         </m:e>
                       </m:d>
                       <m:r>
-                        <a:rPr lang="en-US" sz="2900" b="0" i="1">
+                        <a:rPr lang="en-US" sz="2320" b="0" i="1">
                           <a:latin typeface="Cambria Math" panose="02040503050406030204" pitchFamily="18" charset="0"/>
                         </a:rPr>
                         <m:t>=</m:t>
@@ -4790,7 +4603,7 @@
                         <m:naryPr>
                           <m:chr m:val="∑"/>
                           <m:ctrlPr>
-                            <a:rPr lang="en-US" sz="2900" b="0" i="1">
+                            <a:rPr lang="en-US" sz="2320" b="0" i="1">
                               <a:latin typeface="Cambria Math" panose="02040503050406030204" pitchFamily="18" charset="0"/>
                             </a:rPr>
                           </m:ctrlPr>
@@ -4800,13 +4613,13 @@
                             <m:rPr>
                               <m:brk m:alnAt="23"/>
                             </m:rPr>
-                            <a:rPr lang="en-US" sz="2900" b="0" i="1">
+                            <a:rPr lang="en-US" sz="2320" b="0" i="1">
                               <a:latin typeface="Cambria Math" panose="02040503050406030204" pitchFamily="18" charset="0"/>
                             </a:rPr>
                             <m:t>𝑘</m:t>
                           </m:r>
                           <m:r>
-                            <a:rPr lang="en-US" sz="2900" b="0" i="1">
+                            <a:rPr lang="en-US" sz="2320" b="0" i="1">
                               <a:latin typeface="Cambria Math" panose="02040503050406030204" pitchFamily="18" charset="0"/>
                             </a:rPr>
                             <m:t>=1</m:t>
@@ -4814,7 +4627,7 @@
                         </m:sub>
                         <m:sup>
                           <m:r>
-                            <a:rPr lang="en-US" sz="2900" b="0" i="1">
+                            <a:rPr lang="en-US" sz="2320" b="0" i="1">
                               <a:latin typeface="Cambria Math" panose="02040503050406030204" pitchFamily="18" charset="0"/>
                             </a:rPr>
                             <m:t>𝑁</m:t>
@@ -4822,7 +4635,7 @@
                         </m:sup>
                         <m:e>
                           <m:r>
-                            <a:rPr lang="en-US" sz="2900" b="0" i="1">
+                            <a:rPr lang="en-US" sz="2320" b="0" i="1">
                               <a:latin typeface="Cambria Math" panose="02040503050406030204" pitchFamily="18" charset="0"/>
                             </a:rPr>
                             <m:t>𝑋</m:t>
@@ -4832,14 +4645,14 @@
                               <m:begChr m:val="["/>
                               <m:endChr m:val="]"/>
                               <m:ctrlPr>
-                                <a:rPr lang="en-US" sz="2900" b="0" i="1">
+                                <a:rPr lang="en-US" sz="2320" b="0" i="1">
                                   <a:latin typeface="Cambria Math" panose="02040503050406030204" pitchFamily="18" charset="0"/>
                                 </a:rPr>
                               </m:ctrlPr>
                             </m:dPr>
                             <m:e>
                               <m:r>
-                                <a:rPr lang="en-US" sz="2900" b="0" i="1">
+                                <a:rPr lang="en-US" sz="2320" b="0" i="1">
                                   <a:latin typeface="Cambria Math" panose="02040503050406030204" pitchFamily="18" charset="0"/>
                                 </a:rPr>
                                 <m:t>𝑘</m:t>
@@ -4849,14 +4662,14 @@
                           <m:sSup>
                             <m:sSupPr>
                               <m:ctrlPr>
-                                <a:rPr lang="en-US" sz="2900" b="0" i="1">
+                                <a:rPr lang="en-US" sz="2320" b="0" i="1">
                                   <a:latin typeface="Cambria Math" panose="02040503050406030204" pitchFamily="18" charset="0"/>
                                 </a:rPr>
                               </m:ctrlPr>
                             </m:sSupPr>
                             <m:e>
                               <m:r>
-                                <a:rPr lang="en-US" sz="2900" b="0" i="1">
+                                <a:rPr lang="en-US" sz="2320" b="0" i="1">
                                   <a:latin typeface="Cambria Math" panose="02040503050406030204" pitchFamily="18" charset="0"/>
                                 </a:rPr>
                                 <m:t>𝑒</m:t>
@@ -4864,19 +4677,19 @@
                             </m:e>
                             <m:sup>
                               <m:r>
-                                <a:rPr lang="en-US" sz="2900" b="0" i="1">
+                                <a:rPr lang="en-US" sz="2320" b="0" i="1">
                                   <a:latin typeface="Cambria Math" panose="02040503050406030204" pitchFamily="18" charset="0"/>
                                 </a:rPr>
                                 <m:t>𝑗</m:t>
                               </m:r>
                               <m:r>
-                                <a:rPr lang="en-US" sz="2900" b="0" i="1">
+                                <a:rPr lang="en-US" sz="2320" b="0" i="1">
                                   <a:latin typeface="Cambria Math" panose="02040503050406030204" pitchFamily="18" charset="0"/>
                                 </a:rPr>
                                 <m:t>2</m:t>
                               </m:r>
                               <m:r>
-                                <a:rPr lang="en-US" sz="2900" b="0" i="1">
+                                <a:rPr lang="en-US" sz="2320" b="0" i="1">
                                   <a:latin typeface="Cambria Math" panose="02040503050406030204" pitchFamily="18" charset="0"/>
                                   <a:ea typeface="Cambria Math" panose="02040503050406030204" pitchFamily="18" charset="0"/>
                                 </a:rPr>
@@ -4885,7 +4698,7 @@
                               <m:f>
                                 <m:fPr>
                                   <m:ctrlPr>
-                                    <a:rPr lang="en-US" sz="2900" b="0" i="1">
+                                    <a:rPr lang="en-US" sz="2320" b="0" i="1">
                                       <a:latin typeface="Cambria Math" panose="02040503050406030204" pitchFamily="18" charset="0"/>
                                       <a:ea typeface="Cambria Math" panose="02040503050406030204" pitchFamily="18" charset="0"/>
                                     </a:rPr>
@@ -4893,7 +4706,7 @@
                                 </m:fPr>
                                 <m:num>
                                   <m:r>
-                                    <a:rPr lang="en-US" sz="2900" b="0" i="1">
+                                    <a:rPr lang="en-US" sz="2320" b="0" i="1">
                                       <a:latin typeface="Cambria Math" panose="02040503050406030204" pitchFamily="18" charset="0"/>
                                       <a:ea typeface="Cambria Math" panose="02040503050406030204" pitchFamily="18" charset="0"/>
                                     </a:rPr>
@@ -4902,7 +4715,7 @@
                                 </m:num>
                                 <m:den>
                                   <m:r>
-                                    <a:rPr lang="en-US" sz="2900" b="0" i="1">
+                                    <a:rPr lang="en-US" sz="2320" b="0" i="1">
                                       <a:latin typeface="Cambria Math" panose="02040503050406030204" pitchFamily="18" charset="0"/>
                                       <a:ea typeface="Cambria Math" panose="02040503050406030204" pitchFamily="18" charset="0"/>
                                     </a:rPr>
@@ -4917,13 +4730,13 @@
                     </m:oMath>
                   </m:oMathPara>
                 </a14:m>
-                <a:endParaRPr lang="en-US" sz="2900" dirty="0"/>
+                <a:endParaRPr lang="en-US" sz="2320" dirty="0"/>
               </a:p>
               <a:p>
                 <a:pPr marL="0" indent="0">
                   <a:buNone/>
                 </a:pPr>
-                <a:endParaRPr lang="en-US" sz="2900" dirty="0"/>
+                <a:endParaRPr lang="en-US" sz="2320" dirty="0"/>
               </a:p>
               <a:p>
                 <a:pPr marL="0" indent="0">
@@ -4936,7 +4749,7 @@
                     </m:oMathParaPr>
                     <m:oMath xmlns:m="http://schemas.openxmlformats.org/officeDocument/2006/math">
                       <m:r>
-                        <a:rPr lang="en-US" sz="2900" b="0" i="1">
+                        <a:rPr lang="en-US" sz="2320" b="0" i="1">
                           <a:latin typeface="Cambria Math" panose="02040503050406030204" pitchFamily="18" charset="0"/>
                         </a:rPr>
                         <m:t>𝑋</m:t>
@@ -4946,14 +4759,14 @@
                           <m:begChr m:val="["/>
                           <m:endChr m:val="]"/>
                           <m:ctrlPr>
-                            <a:rPr lang="en-US" sz="2900" b="0" i="1">
+                            <a:rPr lang="en-US" sz="2320" b="0" i="1">
                               <a:latin typeface="Cambria Math" panose="02040503050406030204" pitchFamily="18" charset="0"/>
                             </a:rPr>
                           </m:ctrlPr>
                         </m:dPr>
                         <m:e>
                           <m:r>
-                            <a:rPr lang="en-US" sz="2900" b="0" i="1">
+                            <a:rPr lang="en-US" sz="2320" b="0" i="1">
                               <a:latin typeface="Cambria Math" panose="02040503050406030204" pitchFamily="18" charset="0"/>
                             </a:rPr>
                             <m:t>𝑘</m:t>
@@ -4961,7 +4774,7 @@
                         </m:e>
                       </m:d>
                       <m:r>
-                        <a:rPr lang="en-US" sz="2900" b="0" i="1">
+                        <a:rPr lang="en-US" sz="2320" b="0" i="1">
                           <a:latin typeface="Cambria Math" panose="02040503050406030204" pitchFamily="18" charset="0"/>
                         </a:rPr>
                         <m:t>=</m:t>
@@ -4969,14 +4782,14 @@
                       <m:f>
                         <m:fPr>
                           <m:ctrlPr>
-                            <a:rPr lang="en-US" sz="2900" b="0" i="1">
+                            <a:rPr lang="en-US" sz="2320" b="0" i="1">
                               <a:latin typeface="Cambria Math" panose="02040503050406030204" pitchFamily="18" charset="0"/>
                             </a:rPr>
                           </m:ctrlPr>
                         </m:fPr>
                         <m:num>
                           <m:r>
-                            <a:rPr lang="en-US" sz="2900" b="0" i="1">
+                            <a:rPr lang="en-US" sz="2320" b="0" i="1">
                               <a:latin typeface="Cambria Math" panose="02040503050406030204" pitchFamily="18" charset="0"/>
                             </a:rPr>
                             <m:t>1</m:t>
@@ -4984,7 +4797,7 @@
                         </m:num>
                         <m:den>
                           <m:r>
-                            <a:rPr lang="en-US" sz="2900" b="0" i="1">
+                            <a:rPr lang="en-US" sz="2320" b="0" i="1">
                               <a:latin typeface="Cambria Math" panose="02040503050406030204" pitchFamily="18" charset="0"/>
                             </a:rPr>
                             <m:t>𝑁</m:t>
@@ -4995,7 +4808,7 @@
                         <m:naryPr>
                           <m:chr m:val="∑"/>
                           <m:ctrlPr>
-                            <a:rPr lang="en-US" sz="2900" b="0" i="1">
+                            <a:rPr lang="en-US" sz="2320" b="0" i="1">
                               <a:latin typeface="Cambria Math" panose="02040503050406030204" pitchFamily="18" charset="0"/>
                             </a:rPr>
                           </m:ctrlPr>
@@ -5005,13 +4818,13 @@
                             <m:rPr>
                               <m:brk m:alnAt="23"/>
                             </m:rPr>
-                            <a:rPr lang="en-US" sz="2900" b="0" i="1">
+                            <a:rPr lang="en-US" sz="2320" b="0" i="1">
                               <a:latin typeface="Cambria Math" panose="02040503050406030204" pitchFamily="18" charset="0"/>
                             </a:rPr>
                             <m:t>𝑛</m:t>
                           </m:r>
                           <m:r>
-                            <a:rPr lang="en-US" sz="2900" b="0" i="1">
+                            <a:rPr lang="en-US" sz="2320" b="0" i="1">
                               <a:latin typeface="Cambria Math" panose="02040503050406030204" pitchFamily="18" charset="0"/>
                             </a:rPr>
                             <m:t>=1</m:t>
@@ -5019,7 +4832,7 @@
                         </m:sub>
                         <m:sup>
                           <m:r>
-                            <a:rPr lang="en-US" sz="2900" b="0" i="1">
+                            <a:rPr lang="en-US" sz="2320" b="0" i="1">
                               <a:latin typeface="Cambria Math" panose="02040503050406030204" pitchFamily="18" charset="0"/>
                             </a:rPr>
                             <m:t>𝑁</m:t>
@@ -5027,25 +4840,25 @@
                         </m:sup>
                         <m:e>
                           <m:r>
-                            <a:rPr lang="en-US" sz="2900" b="0" i="1">
+                            <a:rPr lang="en-US" sz="2320" b="0" i="1">
                               <a:latin typeface="Cambria Math" panose="02040503050406030204" pitchFamily="18" charset="0"/>
                             </a:rPr>
                             <m:t>𝑥</m:t>
                           </m:r>
                           <m:r>
-                            <a:rPr lang="en-US" sz="2900" b="0" i="1">
+                            <a:rPr lang="en-US" sz="2320" b="0" i="1">
                               <a:latin typeface="Cambria Math" panose="02040503050406030204" pitchFamily="18" charset="0"/>
                             </a:rPr>
                             <m:t>[</m:t>
                           </m:r>
                           <m:r>
-                            <a:rPr lang="en-US" sz="2900" b="0" i="1">
+                            <a:rPr lang="en-US" sz="2320" b="0" i="1">
                               <a:latin typeface="Cambria Math" panose="02040503050406030204" pitchFamily="18" charset="0"/>
                             </a:rPr>
                             <m:t>𝑛</m:t>
                           </m:r>
                           <m:r>
-                            <a:rPr lang="en-US" sz="2900" b="0" i="1">
+                            <a:rPr lang="en-US" sz="2320" b="0" i="1">
                               <a:latin typeface="Cambria Math" panose="02040503050406030204" pitchFamily="18" charset="0"/>
                             </a:rPr>
                             <m:t>]</m:t>
@@ -5053,14 +4866,14 @@
                           <m:sSup>
                             <m:sSupPr>
                               <m:ctrlPr>
-                                <a:rPr lang="en-US" sz="2900" b="0" i="1">
+                                <a:rPr lang="en-US" sz="2320" b="0" i="1">
                                   <a:latin typeface="Cambria Math" panose="02040503050406030204" pitchFamily="18" charset="0"/>
                                 </a:rPr>
                               </m:ctrlPr>
                             </m:sSupPr>
                             <m:e>
                               <m:r>
-                                <a:rPr lang="en-US" sz="2900" b="0" i="1">
+                                <a:rPr lang="en-US" sz="2320" b="0" i="1">
                                   <a:latin typeface="Cambria Math" panose="02040503050406030204" pitchFamily="18" charset="0"/>
                                 </a:rPr>
                                 <m:t>𝑒</m:t>
@@ -5068,25 +4881,25 @@
                             </m:e>
                             <m:sup>
                               <m:r>
-                                <a:rPr lang="en-US" sz="2900" b="0" i="1">
+                                <a:rPr lang="en-US" sz="2320" b="0" i="1">
                                   <a:latin typeface="Cambria Math" panose="02040503050406030204" pitchFamily="18" charset="0"/>
                                 </a:rPr>
                                 <m:t>−</m:t>
                               </m:r>
                               <m:r>
-                                <a:rPr lang="en-US" sz="2900" b="0" i="1">
+                                <a:rPr lang="en-US" sz="2320" b="0" i="1">
                                   <a:latin typeface="Cambria Math" panose="02040503050406030204" pitchFamily="18" charset="0"/>
                                 </a:rPr>
                                 <m:t>𝑗</m:t>
                               </m:r>
                               <m:r>
-                                <a:rPr lang="en-US" sz="2900" b="0" i="1">
+                                <a:rPr lang="en-US" sz="2320" b="0" i="1">
                                   <a:latin typeface="Cambria Math" panose="02040503050406030204" pitchFamily="18" charset="0"/>
                                 </a:rPr>
                                 <m:t>2</m:t>
                               </m:r>
                               <m:r>
-                                <a:rPr lang="en-US" sz="2900" b="0" i="1">
+                                <a:rPr lang="en-US" sz="2320" b="0" i="1">
                                   <a:latin typeface="Cambria Math" panose="02040503050406030204" pitchFamily="18" charset="0"/>
                                   <a:ea typeface="Cambria Math" panose="02040503050406030204" pitchFamily="18" charset="0"/>
                                 </a:rPr>
@@ -5095,7 +4908,7 @@
                               <m:f>
                                 <m:fPr>
                                   <m:ctrlPr>
-                                    <a:rPr lang="en-US" sz="2900" b="0" i="1">
+                                    <a:rPr lang="en-US" sz="2320" b="0" i="1">
                                       <a:latin typeface="Cambria Math" panose="02040503050406030204" pitchFamily="18" charset="0"/>
                                       <a:ea typeface="Cambria Math" panose="02040503050406030204" pitchFamily="18" charset="0"/>
                                     </a:rPr>
@@ -5103,7 +4916,7 @@
                                 </m:fPr>
                                 <m:num>
                                   <m:r>
-                                    <a:rPr lang="en-US" sz="2900" b="0" i="1">
+                                    <a:rPr lang="en-US" sz="2320" b="0" i="1">
                                       <a:latin typeface="Cambria Math" panose="02040503050406030204" pitchFamily="18" charset="0"/>
                                       <a:ea typeface="Cambria Math" panose="02040503050406030204" pitchFamily="18" charset="0"/>
                                     </a:rPr>
@@ -5112,7 +4925,7 @@
                                 </m:num>
                                 <m:den>
                                   <m:r>
-                                    <a:rPr lang="en-US" sz="2900" b="0" i="1">
+                                    <a:rPr lang="en-US" sz="2320" b="0" i="1">
                                       <a:latin typeface="Cambria Math" panose="02040503050406030204" pitchFamily="18" charset="0"/>
                                       <a:ea typeface="Cambria Math" panose="02040503050406030204" pitchFamily="18" charset="0"/>
                                     </a:rPr>
@@ -5127,13 +4940,13 @@
                     </m:oMath>
                   </m:oMathPara>
                 </a14:m>
-                <a:endParaRPr lang="en-US" sz="2900" dirty="0"/>
+                <a:endParaRPr lang="en-US" sz="2320" dirty="0"/>
               </a:p>
               <a:p>
-                <a:endParaRPr lang="en-US" sz="2900" dirty="0"/>
+                <a:endParaRPr lang="en-US" sz="2320" dirty="0"/>
               </a:p>
               <a:p>
-                <a:endParaRPr lang="en-US" sz="1400" dirty="0"/>
+                <a:endParaRPr lang="en-US" sz="1120" dirty="0"/>
               </a:p>
             </p:txBody>
           </p:sp>
@@ -5184,30 +4997,202 @@
       </mc:AlternateContent>
       <p:sp>
         <p:nvSpPr>
-          <p:cNvPr id="5" name="Slide Number Placeholder 4">
-            <a:extLst>
-              <a:ext uri="{FF2B5EF4-FFF2-40B4-BE49-F238E27FC236}">
-                <a16:creationId xmlns:a16="http://schemas.microsoft.com/office/drawing/2014/main" id="{FB09D56F-AB4B-4D70-80EA-E70213107156}"/>
-              </a:ext>
-            </a:extLst>
-          </p:cNvPr>
+          <p:cNvPr id="14" name="DSPIRA 1"/>
           <p:cNvSpPr>
             <a:spLocks noGrp="1"/>
           </p:cNvSpPr>
-          <p:nvPr>
-            <p:ph type="sldNum" sz="quarter" idx="12"/>
-          </p:nvPr>
-        </p:nvSpPr>
-        <p:spPr/>
+          <p:nvPr/>
+        </p:nvSpPr>
+        <p:spPr>
+          <a:xfrm>
+            <a:off x="0" y="0"/>
+            <a:ext cx="12192000" cy="342900"/>
+          </a:xfrm>
+          <a:prstGeom prst="rect">
+            <a:avLst/>
+          </a:prstGeom>
+          <a:solidFill>
+            <a:srgbClr val="FFFFFF"/>
+          </a:solidFill>
+          <a:ln w="0">
+            <a:noFill/>
+          </a:ln>
+        </p:spPr>
+      </p:sp>
+      <p:sp>
+        <p:nvSpPr>
+          <p:cNvPr id="15" name="DSPIRA 2"/>
+          <p:cNvSpPr>
+            <a:spLocks noGrp="1"/>
+          </p:cNvSpPr>
+          <p:nvPr/>
+        </p:nvSpPr>
+        <p:spPr>
+          <a:xfrm>
+            <a:off x="0" y="7200900"/>
+            <a:ext cx="12192000" cy="342900"/>
+          </a:xfrm>
+          <a:prstGeom prst="rect">
+            <a:avLst/>
+          </a:prstGeom>
+          <a:solidFill>
+            <a:srgbClr val="FFFFFF"/>
+          </a:solidFill>
+          <a:ln w="0">
+            <a:noFill/>
+          </a:ln>
+        </p:spPr>
+      </p:sp>
+      <p:sp>
+        <p:nvSpPr>
+          <p:cNvPr id="16" name="DSPIRA 3"/>
+          <p:cNvSpPr>
+            <a:spLocks noGrp="1"/>
+          </p:cNvSpPr>
+          <p:nvPr/>
+        </p:nvSpPr>
+        <p:spPr>
+          <a:xfrm>
+            <a:off x="228600" y="76200"/>
+            <a:ext cx="4762500" cy="228600"/>
+          </a:xfrm>
+          <a:prstGeom prst="rect">
+            <a:avLst/>
+          </a:prstGeom>
+          <a:noFill/>
+          <a:ln w="0">
+            <a:noFill/>
+          </a:ln>
+        </p:spPr>
         <p:txBody>
-          <a:bodyPr/>
+          <a:bodyPr>
+            <a:noAutofit/>
+          </a:bodyPr>
           <a:lstStyle/>
           <a:p>
-            <a:fld id="{A7A2ED00-DBE6-4EB1-9131-CB7486CD5D1F}" type="slidenum">
-              <a:rPr lang="en-US" smtClean="0"/>
-              <a:t>1</a:t>
-            </a:fld>
-            <a:endParaRPr lang="en-US"/>
+            <a:pPr>
+              <a:defRPr sz="1200" b="1">
+                <a:solidFill>
+                  <a:srgbClr val="002855"/>
+                </a:solidFill>
+                <a:latin typeface="Arial"/>
+                <a:ea typeface="Arial"/>
+                <a:cs typeface="Arial"/>
+              </a:defRPr>
+            </a:pPr>
+            <a:r>
+              <a:rPr sz="1200" b="1">
+                <a:solidFill>
+                  <a:srgbClr val="002855"/>
+                </a:solidFill>
+                <a:latin typeface="Arial"/>
+                <a:ea typeface="Arial"/>
+                <a:cs typeface="Arial"/>
+              </a:rPr>
+              <a:t>WVU DSPIRA</a:t>
+            </a:r>
+          </a:p>
+        </p:txBody>
+      </p:sp>
+      <p:sp>
+        <p:nvSpPr>
+          <p:cNvPr id="17" name="DSPIRA 4"/>
+          <p:cNvSpPr>
+            <a:spLocks noGrp="1"/>
+          </p:cNvSpPr>
+          <p:nvPr/>
+        </p:nvSpPr>
+        <p:spPr>
+          <a:xfrm>
+            <a:off x="228600" y="7277100"/>
+            <a:ext cx="6667500" cy="228600"/>
+          </a:xfrm>
+          <a:prstGeom prst="rect">
+            <a:avLst/>
+          </a:prstGeom>
+          <a:noFill/>
+          <a:ln w="0">
+            <a:noFill/>
+          </a:ln>
+        </p:spPr>
+        <p:txBody>
+          <a:bodyPr>
+            <a:noAutofit/>
+          </a:bodyPr>
+          <a:lstStyle/>
+          <a:p>
+            <a:pPr>
+              <a:defRPr sz="900" b="0">
+                <a:solidFill>
+                  <a:srgbClr val="002855"/>
+                </a:solidFill>
+                <a:latin typeface="Arial"/>
+                <a:ea typeface="Arial"/>
+                <a:cs typeface="Arial"/>
+              </a:defRPr>
+            </a:pPr>
+            <a:r>
+              <a:rPr sz="900" b="0">
+                <a:solidFill>
+                  <a:srgbClr val="002855"/>
+                </a:solidFill>
+                <a:latin typeface="Arial"/>
+                <a:ea typeface="Arial"/>
+                <a:cs typeface="Arial"/>
+              </a:rPr>
+              <a:t>wvurail.org/dspira</a:t>
+            </a:r>
+          </a:p>
+        </p:txBody>
+      </p:sp>
+      <p:sp>
+        <p:nvSpPr>
+          <p:cNvPr id="18" name="DSPIRA 5"/>
+          <p:cNvSpPr>
+            <a:spLocks noGrp="1"/>
+          </p:cNvSpPr>
+          <p:nvPr/>
+        </p:nvSpPr>
+        <p:spPr>
+          <a:xfrm>
+            <a:off x="11191875" y="7277100"/>
+            <a:ext cx="762000" cy="228600"/>
+          </a:xfrm>
+          <a:prstGeom prst="rect">
+            <a:avLst/>
+          </a:prstGeom>
+          <a:noFill/>
+          <a:ln w="0">
+            <a:noFill/>
+          </a:ln>
+        </p:spPr>
+        <p:txBody>
+          <a:bodyPr>
+            <a:noAutofit/>
+          </a:bodyPr>
+          <a:lstStyle/>
+          <a:p>
+            <a:pPr>
+              <a:defRPr sz="900" b="0">
+                <a:solidFill>
+                  <a:srgbClr val="002855"/>
+                </a:solidFill>
+                <a:latin typeface="Arial"/>
+                <a:ea typeface="Arial"/>
+                <a:cs typeface="Arial"/>
+              </a:defRPr>
+            </a:pPr>
+            <a:r>
+              <a:rPr sz="900" b="0">
+                <a:solidFill>
+                  <a:srgbClr val="002855"/>
+                </a:solidFill>
+                <a:latin typeface="Arial"/>
+                <a:ea typeface="Arial"/>
+                <a:cs typeface="Arial"/>
+              </a:rPr>
+              <a:t>1 of 10</a:t>
+            </a:r>
           </a:p>
         </p:txBody>
       </p:sp>
@@ -5253,7 +5238,7 @@
         </p:nvSpPr>
         <p:spPr>
           <a:xfrm>
-            <a:off x="838200" y="365126"/>
+            <a:off x="838200" y="708026"/>
             <a:ext cx="10515600" cy="978766"/>
           </a:xfrm>
         </p:spPr>
@@ -5280,7 +5265,7 @@
         </p:nvSpPr>
         <p:spPr>
           <a:xfrm>
-            <a:off x="457200" y="1501852"/>
+            <a:off x="457200" y="1844752"/>
             <a:ext cx="10896600" cy="589237"/>
           </a:xfrm>
         </p:spPr>
@@ -5297,36 +5282,13 @@
       </p:sp>
       <p:sp>
         <p:nvSpPr>
-          <p:cNvPr id="6" name="Slide Number Placeholder 5"/>
-          <p:cNvSpPr>
-            <a:spLocks noGrp="1"/>
-          </p:cNvSpPr>
-          <p:nvPr>
-            <p:ph type="sldNum" sz="quarter" idx="12"/>
-          </p:nvPr>
-        </p:nvSpPr>
-        <p:spPr/>
-        <p:txBody>
-          <a:bodyPr/>
-          <a:lstStyle/>
-          <a:p>
-            <a:fld id="{EC5CD700-21AC-4AB9-ADAF-7B355889A718}" type="slidenum">
-              <a:rPr lang="en-US" smtClean="0"/>
-              <a:t>10</a:t>
-            </a:fld>
-            <a:endParaRPr lang="en-US" dirty="0"/>
-          </a:p>
-        </p:txBody>
-      </p:sp>
-      <p:sp>
-        <p:nvSpPr>
           <p:cNvPr id="15" name="TextBox 14"/>
           <p:cNvSpPr txBox="1"/>
           <p:nvPr/>
         </p:nvSpPr>
         <p:spPr>
           <a:xfrm>
-            <a:off x="7093538" y="4114816"/>
+            <a:off x="7093538" y="4457716"/>
             <a:ext cx="439544" cy="707886"/>
           </a:xfrm>
           <a:prstGeom prst="rect">
@@ -5341,7 +5303,7 @@
           <a:lstStyle/>
           <a:p>
             <a:r>
-              <a:rPr lang="en-US" sz="4000" dirty="0"/>
+              <a:rPr lang="en-US" sz="3200" dirty="0"/>
               <a:t>=</a:t>
             </a:r>
           </a:p>
@@ -5379,7 +5341,7 @@
                     </m:oMathParaPr>
                     <m:oMath xmlns:m="http://schemas.openxmlformats.org/officeDocument/2006/math">
                       <m:r>
-                        <a:rPr lang="en-US" sz="4000" i="1" smtClean="0">
+                        <a:rPr lang="en-US" sz="3200" i="1" smtClean="0">
                           <a:latin typeface="Cambria Math" panose="02040503050406030204" pitchFamily="18" charset="0"/>
                           <a:ea typeface="Cambria Math" panose="02040503050406030204" pitchFamily="18" charset="0"/>
                         </a:rPr>
@@ -5388,7 +5350,7 @@
                     </m:oMath>
                   </m:oMathPara>
                 </a14:m>
-                <a:endParaRPr lang="en-US" sz="4000" dirty="0"/>
+                <a:endParaRPr lang="en-US" sz="3200" dirty="0"/>
               </a:p>
             </p:txBody>
           </p:sp>
@@ -5440,7 +5402,7 @@
         </p:nvSpPr>
         <p:spPr>
           <a:xfrm>
-            <a:off x="971708" y="5734944"/>
+            <a:off x="971708" y="6077844"/>
             <a:ext cx="979755" cy="369332"/>
           </a:xfrm>
           <a:prstGeom prst="rect">
@@ -5469,7 +5431,7 @@
         </p:nvSpPr>
         <p:spPr>
           <a:xfrm>
-            <a:off x="4378034" y="5741373"/>
+            <a:off x="4378034" y="6084273"/>
             <a:ext cx="2130711" cy="369332"/>
           </a:xfrm>
           <a:prstGeom prst="rect">
@@ -5498,7 +5460,7 @@
         </p:nvSpPr>
         <p:spPr>
           <a:xfrm>
-            <a:off x="542211" y="6065100"/>
+            <a:off x="542211" y="6408000"/>
             <a:ext cx="2143536" cy="369332"/>
           </a:xfrm>
           <a:prstGeom prst="rect">
@@ -5527,7 +5489,7 @@
         </p:nvSpPr>
         <p:spPr>
           <a:xfrm>
-            <a:off x="4463065" y="6092808"/>
+            <a:off x="4463065" y="6435708"/>
             <a:ext cx="2143536" cy="369332"/>
           </a:xfrm>
           <a:prstGeom prst="rect">
@@ -5570,7 +5532,7 @@
         </p:blipFill>
         <p:spPr>
           <a:xfrm>
-            <a:off x="457200" y="3179197"/>
+            <a:off x="457200" y="3522097"/>
             <a:ext cx="2593755" cy="2355273"/>
           </a:xfrm>
           <a:prstGeom prst="rect">
@@ -5600,7 +5562,7 @@
         </p:blipFill>
         <p:spPr>
           <a:xfrm>
-            <a:off x="3964551" y="3123969"/>
+            <a:off x="3964551" y="3466869"/>
             <a:ext cx="2677436" cy="2472158"/>
           </a:xfrm>
           <a:prstGeom prst="rect">
@@ -5630,7 +5592,7 @@
         </p:blipFill>
         <p:spPr>
           <a:xfrm>
-            <a:off x="8036765" y="3118705"/>
+            <a:off x="8036765" y="3461605"/>
             <a:ext cx="3194758" cy="2537615"/>
           </a:xfrm>
           <a:prstGeom prst="rect">
@@ -5660,7 +5622,7 @@
         </p:blipFill>
         <p:spPr>
           <a:xfrm>
-            <a:off x="3959266" y="3128376"/>
+            <a:off x="3959266" y="3471276"/>
             <a:ext cx="2729214" cy="2478277"/>
           </a:xfrm>
           <a:prstGeom prst="rect">
@@ -5690,7 +5652,7 @@
         </p:blipFill>
         <p:spPr>
           <a:xfrm>
-            <a:off x="8033526" y="3118705"/>
+            <a:off x="8033526" y="3461605"/>
             <a:ext cx="3308823" cy="2593339"/>
           </a:xfrm>
           <a:prstGeom prst="rect">
@@ -5720,7 +5682,7 @@
         </p:blipFill>
         <p:spPr>
           <a:xfrm>
-            <a:off x="3897986" y="3120366"/>
+            <a:off x="3897986" y="3463266"/>
             <a:ext cx="2790494" cy="2494296"/>
           </a:xfrm>
           <a:prstGeom prst="rect">
@@ -5750,7 +5712,7 @@
         </p:blipFill>
         <p:spPr>
           <a:xfrm>
-            <a:off x="8034684" y="3115452"/>
+            <a:off x="8034684" y="3458352"/>
             <a:ext cx="3280740" cy="2583843"/>
           </a:xfrm>
           <a:prstGeom prst="rect">
@@ -5780,7 +5742,7 @@
         </p:blipFill>
         <p:spPr>
           <a:xfrm>
-            <a:off x="3959266" y="3148625"/>
+            <a:off x="3959266" y="3491525"/>
             <a:ext cx="2704110" cy="2455481"/>
           </a:xfrm>
           <a:prstGeom prst="rect">
@@ -5810,7 +5772,7 @@
         </p:blipFill>
         <p:spPr>
           <a:xfrm>
-            <a:off x="8031017" y="3111526"/>
+            <a:off x="8031017" y="3454426"/>
             <a:ext cx="3227110" cy="2585395"/>
           </a:xfrm>
           <a:prstGeom prst="rect">
@@ -5826,7 +5788,7 @@
         </p:nvSpPr>
         <p:spPr>
           <a:xfrm>
-            <a:off x="1027128" y="2843815"/>
+            <a:off x="1027128" y="3186715"/>
             <a:ext cx="1447832" cy="461665"/>
           </a:xfrm>
           <a:prstGeom prst="rect">
@@ -5841,7 +5803,7 @@
           <a:lstStyle/>
           <a:p>
             <a:r>
-              <a:rPr lang="en-US" sz="2400" dirty="0"/>
+              <a:rPr lang="en-US" sz="1920" dirty="0"/>
               <a:t>true pulse</a:t>
             </a:r>
           </a:p>
@@ -5855,7 +5817,7 @@
         </p:nvSpPr>
         <p:spPr>
           <a:xfrm>
-            <a:off x="3976245" y="2802250"/>
+            <a:off x="3976245" y="3145150"/>
             <a:ext cx="2649187" cy="461665"/>
           </a:xfrm>
           <a:prstGeom prst="rect">
@@ -5870,7 +5832,7 @@
           <a:lstStyle/>
           <a:p>
             <a:r>
-              <a:rPr lang="en-US" sz="2400" dirty="0"/>
+              <a:rPr lang="en-US" sz="1920" dirty="0"/>
               <a:t>four matched filters</a:t>
             </a:r>
           </a:p>
@@ -5884,7 +5846,7 @@
         </p:nvSpPr>
         <p:spPr>
           <a:xfrm>
-            <a:off x="7827816" y="2564072"/>
+            <a:off x="7827816" y="2906972"/>
             <a:ext cx="3386889" cy="461665"/>
           </a:xfrm>
           <a:prstGeom prst="rect">
@@ -5899,8 +5861,209 @@
           <a:lstStyle/>
           <a:p>
             <a:r>
-              <a:rPr lang="en-US" sz="2400" dirty="0"/>
+              <a:rPr lang="en-US" sz="1920" dirty="0"/>
               <a:t>the result of “correlation”</a:t>
+            </a:r>
+          </a:p>
+        </p:txBody>
+      </p:sp>
+      <p:sp>
+        <p:nvSpPr>
+          <p:cNvPr id="35" name="DSPIRA 1"/>
+          <p:cNvSpPr>
+            <a:spLocks noGrp="1"/>
+          </p:cNvSpPr>
+          <p:nvPr/>
+        </p:nvSpPr>
+        <p:spPr>
+          <a:xfrm>
+            <a:off x="0" y="0"/>
+            <a:ext cx="12192000" cy="342900"/>
+          </a:xfrm>
+          <a:prstGeom prst="rect">
+            <a:avLst/>
+          </a:prstGeom>
+          <a:solidFill>
+            <a:srgbClr val="FFFFFF"/>
+          </a:solidFill>
+          <a:ln w="0">
+            <a:noFill/>
+          </a:ln>
+        </p:spPr>
+      </p:sp>
+      <p:sp>
+        <p:nvSpPr>
+          <p:cNvPr id="36" name="DSPIRA 2"/>
+          <p:cNvSpPr>
+            <a:spLocks noGrp="1"/>
+          </p:cNvSpPr>
+          <p:nvPr/>
+        </p:nvSpPr>
+        <p:spPr>
+          <a:xfrm>
+            <a:off x="0" y="7200900"/>
+            <a:ext cx="12192000" cy="342900"/>
+          </a:xfrm>
+          <a:prstGeom prst="rect">
+            <a:avLst/>
+          </a:prstGeom>
+          <a:solidFill>
+            <a:srgbClr val="FFFFFF"/>
+          </a:solidFill>
+          <a:ln w="0">
+            <a:noFill/>
+          </a:ln>
+        </p:spPr>
+      </p:sp>
+      <p:sp>
+        <p:nvSpPr>
+          <p:cNvPr id="37" name="DSPIRA 3"/>
+          <p:cNvSpPr>
+            <a:spLocks noGrp="1"/>
+          </p:cNvSpPr>
+          <p:nvPr/>
+        </p:nvSpPr>
+        <p:spPr>
+          <a:xfrm>
+            <a:off x="228600" y="76200"/>
+            <a:ext cx="4762500" cy="228600"/>
+          </a:xfrm>
+          <a:prstGeom prst="rect">
+            <a:avLst/>
+          </a:prstGeom>
+          <a:noFill/>
+          <a:ln w="0">
+            <a:noFill/>
+          </a:ln>
+        </p:spPr>
+        <p:txBody>
+          <a:bodyPr>
+            <a:noAutofit/>
+          </a:bodyPr>
+          <a:lstStyle/>
+          <a:p>
+            <a:pPr>
+              <a:defRPr sz="1200" b="1">
+                <a:solidFill>
+                  <a:srgbClr val="002855"/>
+                </a:solidFill>
+                <a:latin typeface="Arial"/>
+                <a:ea typeface="Arial"/>
+                <a:cs typeface="Arial"/>
+              </a:defRPr>
+            </a:pPr>
+            <a:r>
+              <a:rPr sz="1200" b="1">
+                <a:solidFill>
+                  <a:srgbClr val="002855"/>
+                </a:solidFill>
+                <a:latin typeface="Arial"/>
+                <a:ea typeface="Arial"/>
+                <a:cs typeface="Arial"/>
+              </a:rPr>
+              <a:t>WVU DSPIRA</a:t>
+            </a:r>
+          </a:p>
+        </p:txBody>
+      </p:sp>
+      <p:sp>
+        <p:nvSpPr>
+          <p:cNvPr id="38" name="DSPIRA 4"/>
+          <p:cNvSpPr>
+            <a:spLocks noGrp="1"/>
+          </p:cNvSpPr>
+          <p:nvPr/>
+        </p:nvSpPr>
+        <p:spPr>
+          <a:xfrm>
+            <a:off x="228600" y="7277100"/>
+            <a:ext cx="6667500" cy="228600"/>
+          </a:xfrm>
+          <a:prstGeom prst="rect">
+            <a:avLst/>
+          </a:prstGeom>
+          <a:noFill/>
+          <a:ln w="0">
+            <a:noFill/>
+          </a:ln>
+        </p:spPr>
+        <p:txBody>
+          <a:bodyPr>
+            <a:noAutofit/>
+          </a:bodyPr>
+          <a:lstStyle/>
+          <a:p>
+            <a:pPr>
+              <a:defRPr sz="900" b="0">
+                <a:solidFill>
+                  <a:srgbClr val="002855"/>
+                </a:solidFill>
+                <a:latin typeface="Arial"/>
+                <a:ea typeface="Arial"/>
+                <a:cs typeface="Arial"/>
+              </a:defRPr>
+            </a:pPr>
+            <a:r>
+              <a:rPr sz="900" b="0">
+                <a:solidFill>
+                  <a:srgbClr val="002855"/>
+                </a:solidFill>
+                <a:latin typeface="Arial"/>
+                <a:ea typeface="Arial"/>
+                <a:cs typeface="Arial"/>
+              </a:rPr>
+              <a:t>wvurail.org/dspira</a:t>
+            </a:r>
+          </a:p>
+        </p:txBody>
+      </p:sp>
+      <p:sp>
+        <p:nvSpPr>
+          <p:cNvPr id="39" name="DSPIRA 5"/>
+          <p:cNvSpPr>
+            <a:spLocks noGrp="1"/>
+          </p:cNvSpPr>
+          <p:nvPr/>
+        </p:nvSpPr>
+        <p:spPr>
+          <a:xfrm>
+            <a:off x="11191875" y="7277100"/>
+            <a:ext cx="762000" cy="228600"/>
+          </a:xfrm>
+          <a:prstGeom prst="rect">
+            <a:avLst/>
+          </a:prstGeom>
+          <a:noFill/>
+          <a:ln w="0">
+            <a:noFill/>
+          </a:ln>
+        </p:spPr>
+        <p:txBody>
+          <a:bodyPr>
+            <a:noAutofit/>
+          </a:bodyPr>
+          <a:lstStyle/>
+          <a:p>
+            <a:pPr>
+              <a:defRPr sz="900" b="0">
+                <a:solidFill>
+                  <a:srgbClr val="002855"/>
+                </a:solidFill>
+                <a:latin typeface="Arial"/>
+                <a:ea typeface="Arial"/>
+                <a:cs typeface="Arial"/>
+              </a:defRPr>
+            </a:pPr>
+            <a:r>
+              <a:rPr sz="900" b="0">
+                <a:solidFill>
+                  <a:srgbClr val="002855"/>
+                </a:solidFill>
+                <a:latin typeface="Arial"/>
+                <a:ea typeface="Arial"/>
+                <a:cs typeface="Arial"/>
+              </a:rPr>
+              <a:t>10 of 10</a:t>
             </a:r>
           </a:p>
         </p:txBody>
@@ -6362,7 +6525,7 @@
         </p:nvSpPr>
         <p:spPr>
           <a:xfrm>
-            <a:off x="0" y="0"/>
+            <a:off x="0" y="342900"/>
             <a:ext cx="4654296" cy="6858000"/>
           </a:xfrm>
           <a:prstGeom prst="rect">
@@ -6419,7 +6582,7 @@
         </p:nvSpPr>
         <p:spPr>
           <a:xfrm>
-            <a:off x="643467" y="643467"/>
+            <a:off x="643467" y="986367"/>
             <a:ext cx="3363974" cy="1597315"/>
           </a:xfrm>
           <a:noFill/>
@@ -6437,11 +6600,11 @@
           <a:p>
             <a:pPr algn="ctr"/>
             <a:r>
-              <a:rPr lang="en-US" sz="2800" kern="1200" dirty="0">
+              <a:rPr lang="en-US" sz="2240" kern="1200" dirty="0">
                 <a:solidFill>
                   <a:schemeClr val="bg1"/>
                 </a:solidFill>
-                <a:latin typeface="+mj-lt"/>
+                <a:latin typeface="Arial"/>
                 <a:ea typeface="+mj-ea"/>
                 <a:cs typeface="+mj-cs"/>
               </a:rPr>
@@ -6493,7 +6656,7 @@
                         <m:rPr>
                           <m:sty m:val="p"/>
                         </m:rPr>
-                        <a:rPr lang="en-US" sz="2000" i="1">
+                        <a:rPr lang="en-US" sz="1600" i="1">
                           <a:solidFill>
                             <a:schemeClr val="bg1"/>
                           </a:solidFill>
@@ -6504,7 +6667,7 @@
                       <m:d>
                         <m:dPr>
                           <m:ctrlPr>
-                            <a:rPr lang="en-US" sz="2000" b="0" i="1">
+                            <a:rPr lang="en-US" sz="1600" b="0" i="1">
                               <a:solidFill>
                                 <a:schemeClr val="bg1"/>
                               </a:solidFill>
@@ -6514,7 +6677,7 @@
                         </m:dPr>
                         <m:e>
                           <m:r>
-                            <a:rPr lang="en-US" sz="2000" b="0" i="1">
+                            <a:rPr lang="en-US" sz="1600" b="0" i="1">
                               <a:solidFill>
                                 <a:schemeClr val="bg1"/>
                               </a:solidFill>
@@ -6525,7 +6688,7 @@
                         </m:e>
                       </m:d>
                       <m:r>
-                        <a:rPr lang="en-US" sz="2000" b="0" i="1">
+                        <a:rPr lang="en-US" sz="1600" b="0" i="1">
                           <a:solidFill>
                             <a:schemeClr val="bg1"/>
                           </a:solidFill>
@@ -6538,7 +6701,7 @@
                           <m:begChr m:val="{"/>
                           <m:endChr m:val=""/>
                           <m:ctrlPr>
-                            <a:rPr lang="en-US" sz="2000" b="0" i="1">
+                            <a:rPr lang="en-US" sz="1600" b="0" i="1">
                               <a:solidFill>
                                 <a:schemeClr val="bg1"/>
                               </a:solidFill>
@@ -6558,7 +6721,7 @@
                                 </m:mc>
                               </m:mcs>
                               <m:ctrlPr>
-                                <a:rPr lang="en-US" sz="2000" b="0" i="1">
+                                <a:rPr lang="en-US" sz="1600" b="0" i="1">
                                   <a:solidFill>
                                     <a:schemeClr val="bg1"/>
                                   </a:solidFill>
@@ -6572,7 +6735,7 @@
                                   <m:rPr>
                                     <m:brk m:alnAt="7"/>
                                   </m:rPr>
-                                  <a:rPr lang="en-US" sz="2000" b="0" i="1">
+                                  <a:rPr lang="en-US" sz="1600" b="0" i="1">
                                     <a:solidFill>
                                       <a:schemeClr val="bg1"/>
                                     </a:solidFill>
@@ -6581,7 +6744,7 @@
                                   <m:t>1</m:t>
                                 </m:r>
                                 <m:r>
-                                  <a:rPr lang="en-US" sz="2000" b="0" i="1">
+                                  <a:rPr lang="en-US" sz="1600" b="0" i="1">
                                     <a:solidFill>
                                       <a:schemeClr val="bg1"/>
                                     </a:solidFill>
@@ -6590,7 +6753,7 @@
                                   <m:t>,  −0.5&lt;</m:t>
                                 </m:r>
                                 <m:r>
-                                  <a:rPr lang="en-US" sz="2000" b="0" i="1">
+                                  <a:rPr lang="en-US" sz="1600" b="0" i="1">
                                     <a:solidFill>
                                       <a:schemeClr val="bg1"/>
                                     </a:solidFill>
@@ -6599,7 +6762,7 @@
                                   <m:t>𝑡</m:t>
                                 </m:r>
                                 <m:r>
-                                  <a:rPr lang="en-US" sz="2000" b="0" i="1">
+                                  <a:rPr lang="en-US" sz="1600" b="0" i="1">
                                     <a:solidFill>
                                       <a:schemeClr val="bg1"/>
                                     </a:solidFill>
@@ -6612,7 +6775,7 @@
                             <m:mr>
                               <m:e>
                                 <m:r>
-                                  <a:rPr lang="en-US" sz="2000" b="0" i="1">
+                                  <a:rPr lang="en-US" sz="1600" b="0" i="1">
                                     <a:solidFill>
                                       <a:schemeClr val="bg1"/>
                                     </a:solidFill>
@@ -6621,7 +6784,7 @@
                                   <m:t>0,           </m:t>
                                 </m:r>
                                 <m:r>
-                                  <a:rPr lang="en-US" sz="2000" b="0" i="1">
+                                  <a:rPr lang="en-US" sz="1600" b="0" i="1">
                                     <a:solidFill>
                                       <a:schemeClr val="bg1"/>
                                     </a:solidFill>
@@ -6637,7 +6800,7 @@
                     </m:oMath>
                   </m:oMathPara>
                 </a14:m>
-                <a:endParaRPr lang="en-US" sz="2000" dirty="0">
+                <a:endParaRPr lang="en-US" sz="1600" dirty="0">
                   <a:solidFill>
                     <a:schemeClr val="bg1"/>
                   </a:solidFill>
@@ -6645,7 +6808,7 @@
               </a:p>
               <a:p>
                 <a:pPr marL="0"/>
-                <a:endParaRPr lang="en-US" sz="2000" dirty="0">
+                <a:endParaRPr lang="en-US" sz="1600" dirty="0">
                   <a:solidFill>
                     <a:schemeClr val="bg1"/>
                   </a:solidFill>
@@ -6656,7 +6819,7 @@
                   <a:buNone/>
                 </a:pPr>
                 <a:r>
-                  <a:rPr lang="en-US" sz="2000" dirty="0">
+                  <a:rPr lang="en-US" sz="1600" dirty="0">
                     <a:solidFill>
                       <a:schemeClr val="bg1"/>
                     </a:solidFill>
@@ -6675,7 +6838,7 @@
                     </m:oMathParaPr>
                     <m:oMath xmlns:m="http://schemas.openxmlformats.org/officeDocument/2006/math">
                       <m:r>
-                        <a:rPr lang="en-US" sz="2000" b="0" i="1">
+                        <a:rPr lang="en-US" sz="1600" b="0" i="1">
                           <a:solidFill>
                             <a:schemeClr val="bg1"/>
                           </a:solidFill>
@@ -6686,7 +6849,7 @@
                       <m:d>
                         <m:dPr>
                           <m:ctrlPr>
-                            <a:rPr lang="en-US" sz="2000" b="0" i="1">
+                            <a:rPr lang="en-US" sz="1600" b="0" i="1">
                               <a:solidFill>
                                 <a:schemeClr val="bg1"/>
                               </a:solidFill>
@@ -6696,7 +6859,7 @@
                         </m:dPr>
                         <m:e>
                           <m:r>
-                            <a:rPr lang="en-US" sz="2000" b="0" i="1">
+                            <a:rPr lang="en-US" sz="1600" b="0" i="1">
                               <a:solidFill>
                                 <a:schemeClr val="bg1"/>
                               </a:solidFill>
@@ -6707,7 +6870,7 @@
                         </m:e>
                       </m:d>
                       <m:r>
-                        <a:rPr lang="en-US" sz="2000" b="0" i="1">
+                        <a:rPr lang="en-US" sz="1600" b="0" i="1">
                           <a:solidFill>
                             <a:schemeClr val="bg1"/>
                           </a:solidFill>
@@ -6716,7 +6879,7 @@
                         <m:t>=</m:t>
                       </m:r>
                       <m:r>
-                        <a:rPr lang="en-US" sz="2000" b="0" i="1">
+                        <a:rPr lang="en-US" sz="1600" b="0" i="1">
                           <a:solidFill>
                             <a:schemeClr val="bg1"/>
                           </a:solidFill>
@@ -6727,7 +6890,7 @@
                       <m:d>
                         <m:dPr>
                           <m:ctrlPr>
-                            <a:rPr lang="en-US" sz="2000" b="0" i="1">
+                            <a:rPr lang="en-US" sz="1600" b="0" i="1">
                               <a:solidFill>
                                 <a:schemeClr val="bg1"/>
                               </a:solidFill>
@@ -6737,7 +6900,7 @@
                         </m:dPr>
                         <m:e>
                           <m:r>
-                            <a:rPr lang="en-US" sz="2000" b="0" i="1">
+                            <a:rPr lang="en-US" sz="1600" b="0" i="1">
                               <a:solidFill>
                                 <a:schemeClr val="bg1"/>
                               </a:solidFill>
@@ -6748,7 +6911,7 @@
                         </m:e>
                       </m:d>
                       <m:r>
-                        <a:rPr lang="en-US" sz="2000" b="0" i="1">
+                        <a:rPr lang="en-US" sz="1600" b="0" i="1">
                           <a:solidFill>
                             <a:schemeClr val="bg1"/>
                           </a:solidFill>
@@ -6759,7 +6922,7 @@
                       <m:f>
                         <m:fPr>
                           <m:ctrlPr>
-                            <a:rPr lang="en-US" sz="2000" b="0" i="1">
+                            <a:rPr lang="en-US" sz="1600" b="0" i="1">
                               <a:solidFill>
                                 <a:schemeClr val="bg1"/>
                               </a:solidFill>
@@ -6772,7 +6935,7 @@
                             <m:rPr>
                               <m:sty m:val="p"/>
                             </m:rPr>
-                            <a:rPr lang="en-US" sz="2000" b="0" i="0">
+                            <a:rPr lang="en-US" sz="1600" b="0" i="0">
                               <a:solidFill>
                                 <a:schemeClr val="bg1"/>
                               </a:solidFill>
@@ -6781,7 +6944,7 @@
                             <m:t>sin</m:t>
                           </m:r>
                           <m:r>
-                            <a:rPr lang="en-US" sz="2000" b="0" i="1">
+                            <a:rPr lang="en-US" sz="1600" b="0" i="1">
                               <a:solidFill>
                                 <a:schemeClr val="bg1"/>
                               </a:solidFill>
@@ -6790,7 +6953,7 @@
                             <m:t>⁡(</m:t>
                           </m:r>
                           <m:r>
-                            <a:rPr lang="en-US" sz="2000" b="0" i="1">
+                            <a:rPr lang="en-US" sz="1600" b="0" i="1">
                               <a:solidFill>
                                 <a:schemeClr val="bg1"/>
                               </a:solidFill>
@@ -6799,7 +6962,7 @@
                             <m:t>𝜋</m:t>
                           </m:r>
                           <m:r>
-                            <a:rPr lang="en-US" sz="2000" b="0" i="1">
+                            <a:rPr lang="en-US" sz="1600" b="0" i="1">
                               <a:solidFill>
                                 <a:schemeClr val="bg1"/>
                               </a:solidFill>
@@ -6808,7 +6971,7 @@
                             <m:t>𝑓</m:t>
                           </m:r>
                           <m:r>
-                            <a:rPr lang="en-US" sz="2000" b="0" i="1">
+                            <a:rPr lang="en-US" sz="1600" b="0" i="1">
                               <a:solidFill>
                                 <a:schemeClr val="bg1"/>
                               </a:solidFill>
@@ -6819,7 +6982,7 @@
                         </m:num>
                         <m:den>
                           <m:r>
-                            <a:rPr lang="en-US" sz="2000" b="0" i="1">
+                            <a:rPr lang="en-US" sz="1600" b="0" i="1">
                               <a:solidFill>
                                 <a:schemeClr val="bg1"/>
                               </a:solidFill>
@@ -6828,7 +6991,7 @@
                             <m:t>𝜋</m:t>
                           </m:r>
                           <m:r>
-                            <a:rPr lang="en-US" sz="2000" b="0" i="1">
+                            <a:rPr lang="en-US" sz="1600" b="0" i="1">
                               <a:solidFill>
                                 <a:schemeClr val="bg1"/>
                               </a:solidFill>
@@ -6841,7 +7004,7 @@
                     </m:oMath>
                   </m:oMathPara>
                 </a14:m>
-                <a:endParaRPr lang="en-US" sz="2000" dirty="0">
+                <a:endParaRPr lang="en-US" sz="1600" dirty="0">
                   <a:solidFill>
                     <a:schemeClr val="bg1"/>
                   </a:solidFill>
@@ -6849,7 +7012,7 @@
               </a:p>
               <a:p>
                 <a:pPr marL="0"/>
-                <a:endParaRPr lang="en-US" sz="2000" dirty="0">
+                <a:endParaRPr lang="en-US" sz="1600" dirty="0">
                   <a:solidFill>
                     <a:schemeClr val="bg1"/>
                   </a:solidFill>
@@ -6857,7 +7020,7 @@
               </a:p>
               <a:p>
                 <a:pPr marL="0"/>
-                <a:endParaRPr lang="en-US" sz="2000" dirty="0">
+                <a:endParaRPr lang="en-US" sz="1600" dirty="0">
                   <a:solidFill>
                     <a:schemeClr val="bg1"/>
                   </a:solidFill>
@@ -6865,14 +7028,14 @@
               </a:p>
               <a:p>
                 <a:pPr marL="0"/>
-                <a:endParaRPr lang="en-US" sz="2000" dirty="0">
+                <a:endParaRPr lang="en-US" sz="1600" dirty="0">
                   <a:solidFill>
                     <a:schemeClr val="bg1"/>
                   </a:solidFill>
                 </a:endParaRPr>
               </a:p>
               <a:p>
-                <a:endParaRPr lang="en-US" sz="2000" dirty="0">
+                <a:endParaRPr lang="en-US" sz="1600" dirty="0">
                   <a:solidFill>
                     <a:schemeClr val="bg1"/>
                   </a:solidFill>
@@ -6953,7 +7116,7 @@
         </p:blipFill>
         <p:spPr>
           <a:xfrm>
-            <a:off x="5038908" y="411689"/>
+            <a:off x="5038908" y="754589"/>
             <a:ext cx="6942857" cy="5761905"/>
           </a:xfrm>
           <a:prstGeom prst="rect">
@@ -6963,30 +7126,202 @@
       </p:pic>
       <p:sp>
         <p:nvSpPr>
-          <p:cNvPr id="6" name="Slide Number Placeholder 5">
-            <a:extLst>
-              <a:ext uri="{FF2B5EF4-FFF2-40B4-BE49-F238E27FC236}">
-                <a16:creationId xmlns:a16="http://schemas.microsoft.com/office/drawing/2014/main" id="{497C5138-C59A-4E56-9C20-302535DDA45D}"/>
-              </a:ext>
-            </a:extLst>
-          </p:cNvPr>
+          <p:cNvPr id="21" name="DSPIRA 1"/>
           <p:cNvSpPr>
             <a:spLocks noGrp="1"/>
           </p:cNvSpPr>
-          <p:nvPr>
-            <p:ph type="sldNum" sz="quarter" idx="12"/>
-          </p:nvPr>
-        </p:nvSpPr>
-        <p:spPr/>
+          <p:nvPr/>
+        </p:nvSpPr>
+        <p:spPr>
+          <a:xfrm>
+            <a:off x="0" y="0"/>
+            <a:ext cx="12192000" cy="342900"/>
+          </a:xfrm>
+          <a:prstGeom prst="rect">
+            <a:avLst/>
+          </a:prstGeom>
+          <a:solidFill>
+            <a:srgbClr val="FFFFFF"/>
+          </a:solidFill>
+          <a:ln w="0">
+            <a:noFill/>
+          </a:ln>
+        </p:spPr>
+      </p:sp>
+      <p:sp>
+        <p:nvSpPr>
+          <p:cNvPr id="22" name="DSPIRA 2"/>
+          <p:cNvSpPr>
+            <a:spLocks noGrp="1"/>
+          </p:cNvSpPr>
+          <p:nvPr/>
+        </p:nvSpPr>
+        <p:spPr>
+          <a:xfrm>
+            <a:off x="0" y="7200900"/>
+            <a:ext cx="12192000" cy="342900"/>
+          </a:xfrm>
+          <a:prstGeom prst="rect">
+            <a:avLst/>
+          </a:prstGeom>
+          <a:solidFill>
+            <a:srgbClr val="FFFFFF"/>
+          </a:solidFill>
+          <a:ln w="0">
+            <a:noFill/>
+          </a:ln>
+        </p:spPr>
+      </p:sp>
+      <p:sp>
+        <p:nvSpPr>
+          <p:cNvPr id="23" name="DSPIRA 3"/>
+          <p:cNvSpPr>
+            <a:spLocks noGrp="1"/>
+          </p:cNvSpPr>
+          <p:nvPr/>
+        </p:nvSpPr>
+        <p:spPr>
+          <a:xfrm>
+            <a:off x="228600" y="76200"/>
+            <a:ext cx="4762500" cy="228600"/>
+          </a:xfrm>
+          <a:prstGeom prst="rect">
+            <a:avLst/>
+          </a:prstGeom>
+          <a:noFill/>
+          <a:ln w="0">
+            <a:noFill/>
+          </a:ln>
+        </p:spPr>
         <p:txBody>
-          <a:bodyPr/>
+          <a:bodyPr>
+            <a:noAutofit/>
+          </a:bodyPr>
           <a:lstStyle/>
           <a:p>
-            <a:fld id="{A7A2ED00-DBE6-4EB1-9131-CB7486CD5D1F}" type="slidenum">
-              <a:rPr lang="en-US" smtClean="0"/>
-              <a:t>2</a:t>
-            </a:fld>
-            <a:endParaRPr lang="en-US"/>
+            <a:pPr>
+              <a:defRPr sz="1200" b="1">
+                <a:solidFill>
+                  <a:srgbClr val="002855"/>
+                </a:solidFill>
+                <a:latin typeface="Arial"/>
+                <a:ea typeface="Arial"/>
+                <a:cs typeface="Arial"/>
+              </a:defRPr>
+            </a:pPr>
+            <a:r>
+              <a:rPr sz="1200" b="1">
+                <a:solidFill>
+                  <a:srgbClr val="002855"/>
+                </a:solidFill>
+                <a:latin typeface="Arial"/>
+                <a:ea typeface="Arial"/>
+                <a:cs typeface="Arial"/>
+              </a:rPr>
+              <a:t>WVU DSPIRA</a:t>
+            </a:r>
+          </a:p>
+        </p:txBody>
+      </p:sp>
+      <p:sp>
+        <p:nvSpPr>
+          <p:cNvPr id="24" name="DSPIRA 4"/>
+          <p:cNvSpPr>
+            <a:spLocks noGrp="1"/>
+          </p:cNvSpPr>
+          <p:nvPr/>
+        </p:nvSpPr>
+        <p:spPr>
+          <a:xfrm>
+            <a:off x="228600" y="7277100"/>
+            <a:ext cx="6667500" cy="228600"/>
+          </a:xfrm>
+          <a:prstGeom prst="rect">
+            <a:avLst/>
+          </a:prstGeom>
+          <a:noFill/>
+          <a:ln w="0">
+            <a:noFill/>
+          </a:ln>
+        </p:spPr>
+        <p:txBody>
+          <a:bodyPr>
+            <a:noAutofit/>
+          </a:bodyPr>
+          <a:lstStyle/>
+          <a:p>
+            <a:pPr>
+              <a:defRPr sz="900" b="0">
+                <a:solidFill>
+                  <a:srgbClr val="002855"/>
+                </a:solidFill>
+                <a:latin typeface="Arial"/>
+                <a:ea typeface="Arial"/>
+                <a:cs typeface="Arial"/>
+              </a:defRPr>
+            </a:pPr>
+            <a:r>
+              <a:rPr sz="900" b="0">
+                <a:solidFill>
+                  <a:srgbClr val="002855"/>
+                </a:solidFill>
+                <a:latin typeface="Arial"/>
+                <a:ea typeface="Arial"/>
+                <a:cs typeface="Arial"/>
+              </a:rPr>
+              <a:t>wvurail.org/dspira</a:t>
+            </a:r>
+          </a:p>
+        </p:txBody>
+      </p:sp>
+      <p:sp>
+        <p:nvSpPr>
+          <p:cNvPr id="25" name="DSPIRA 5"/>
+          <p:cNvSpPr>
+            <a:spLocks noGrp="1"/>
+          </p:cNvSpPr>
+          <p:nvPr/>
+        </p:nvSpPr>
+        <p:spPr>
+          <a:xfrm>
+            <a:off x="11191875" y="7277100"/>
+            <a:ext cx="762000" cy="228600"/>
+          </a:xfrm>
+          <a:prstGeom prst="rect">
+            <a:avLst/>
+          </a:prstGeom>
+          <a:noFill/>
+          <a:ln w="0">
+            <a:noFill/>
+          </a:ln>
+        </p:spPr>
+        <p:txBody>
+          <a:bodyPr>
+            <a:noAutofit/>
+          </a:bodyPr>
+          <a:lstStyle/>
+          <a:p>
+            <a:pPr>
+              <a:defRPr sz="900" b="0">
+                <a:solidFill>
+                  <a:srgbClr val="002855"/>
+                </a:solidFill>
+                <a:latin typeface="Arial"/>
+                <a:ea typeface="Arial"/>
+                <a:cs typeface="Arial"/>
+              </a:defRPr>
+            </a:pPr>
+            <a:r>
+              <a:rPr sz="900" b="0">
+                <a:solidFill>
+                  <a:srgbClr val="002855"/>
+                </a:solidFill>
+                <a:latin typeface="Arial"/>
+                <a:ea typeface="Arial"/>
+                <a:cs typeface="Arial"/>
+              </a:rPr>
+              <a:t>2 of 10</a:t>
+            </a:r>
           </a:p>
         </p:txBody>
       </p:sp>
@@ -7568,7 +7903,7 @@
         </p:blipFill>
         <p:spPr>
           <a:xfrm>
-            <a:off x="7402117" y="589132"/>
+            <a:off x="7402117" y="932032"/>
             <a:ext cx="2855933" cy="3180762"/>
           </a:xfrm>
           <a:prstGeom prst="rect">
@@ -7578,30 +7913,202 @@
       </p:pic>
       <p:sp>
         <p:nvSpPr>
-          <p:cNvPr id="5" name="Slide Number Placeholder 4">
-            <a:extLst>
-              <a:ext uri="{FF2B5EF4-FFF2-40B4-BE49-F238E27FC236}">
-                <a16:creationId xmlns:a16="http://schemas.microsoft.com/office/drawing/2014/main" id="{337C30E8-1819-4D82-885E-87C3B29D2DB7}"/>
-              </a:ext>
-            </a:extLst>
-          </p:cNvPr>
+          <p:cNvPr id="7" name="DSPIRA 1"/>
           <p:cNvSpPr>
             <a:spLocks noGrp="1"/>
           </p:cNvSpPr>
-          <p:nvPr>
-            <p:ph type="sldNum" sz="quarter" idx="12"/>
-          </p:nvPr>
-        </p:nvSpPr>
-        <p:spPr/>
+          <p:nvPr/>
+        </p:nvSpPr>
+        <p:spPr>
+          <a:xfrm>
+            <a:off x="0" y="0"/>
+            <a:ext cx="12192000" cy="342900"/>
+          </a:xfrm>
+          <a:prstGeom prst="rect">
+            <a:avLst/>
+          </a:prstGeom>
+          <a:solidFill>
+            <a:srgbClr val="FFFFFF"/>
+          </a:solidFill>
+          <a:ln w="0">
+            <a:noFill/>
+          </a:ln>
+        </p:spPr>
+      </p:sp>
+      <p:sp>
+        <p:nvSpPr>
+          <p:cNvPr id="8" name="DSPIRA 2"/>
+          <p:cNvSpPr>
+            <a:spLocks noGrp="1"/>
+          </p:cNvSpPr>
+          <p:nvPr/>
+        </p:nvSpPr>
+        <p:spPr>
+          <a:xfrm>
+            <a:off x="0" y="7200900"/>
+            <a:ext cx="12192000" cy="342900"/>
+          </a:xfrm>
+          <a:prstGeom prst="rect">
+            <a:avLst/>
+          </a:prstGeom>
+          <a:solidFill>
+            <a:srgbClr val="FFFFFF"/>
+          </a:solidFill>
+          <a:ln w="0">
+            <a:noFill/>
+          </a:ln>
+        </p:spPr>
+      </p:sp>
+      <p:sp>
+        <p:nvSpPr>
+          <p:cNvPr id="9" name="DSPIRA 3"/>
+          <p:cNvSpPr>
+            <a:spLocks noGrp="1"/>
+          </p:cNvSpPr>
+          <p:nvPr/>
+        </p:nvSpPr>
+        <p:spPr>
+          <a:xfrm>
+            <a:off x="228600" y="76200"/>
+            <a:ext cx="4762500" cy="228600"/>
+          </a:xfrm>
+          <a:prstGeom prst="rect">
+            <a:avLst/>
+          </a:prstGeom>
+          <a:noFill/>
+          <a:ln w="0">
+            <a:noFill/>
+          </a:ln>
+        </p:spPr>
         <p:txBody>
-          <a:bodyPr/>
+          <a:bodyPr>
+            <a:noAutofit/>
+          </a:bodyPr>
           <a:lstStyle/>
           <a:p>
-            <a:fld id="{A7A2ED00-DBE6-4EB1-9131-CB7486CD5D1F}" type="slidenum">
-              <a:rPr lang="en-US" smtClean="0"/>
-              <a:t>3</a:t>
-            </a:fld>
-            <a:endParaRPr lang="en-US"/>
+            <a:pPr>
+              <a:defRPr sz="1200" b="1">
+                <a:solidFill>
+                  <a:srgbClr val="002855"/>
+                </a:solidFill>
+                <a:latin typeface="Arial"/>
+                <a:ea typeface="Arial"/>
+                <a:cs typeface="Arial"/>
+              </a:defRPr>
+            </a:pPr>
+            <a:r>
+              <a:rPr sz="1200" b="1">
+                <a:solidFill>
+                  <a:srgbClr val="002855"/>
+                </a:solidFill>
+                <a:latin typeface="Arial"/>
+                <a:ea typeface="Arial"/>
+                <a:cs typeface="Arial"/>
+              </a:rPr>
+              <a:t>WVU DSPIRA</a:t>
+            </a:r>
+          </a:p>
+        </p:txBody>
+      </p:sp>
+      <p:sp>
+        <p:nvSpPr>
+          <p:cNvPr id="10" name="DSPIRA 4"/>
+          <p:cNvSpPr>
+            <a:spLocks noGrp="1"/>
+          </p:cNvSpPr>
+          <p:nvPr/>
+        </p:nvSpPr>
+        <p:spPr>
+          <a:xfrm>
+            <a:off x="228600" y="7277100"/>
+            <a:ext cx="6667500" cy="228600"/>
+          </a:xfrm>
+          <a:prstGeom prst="rect">
+            <a:avLst/>
+          </a:prstGeom>
+          <a:noFill/>
+          <a:ln w="0">
+            <a:noFill/>
+          </a:ln>
+        </p:spPr>
+        <p:txBody>
+          <a:bodyPr>
+            <a:noAutofit/>
+          </a:bodyPr>
+          <a:lstStyle/>
+          <a:p>
+            <a:pPr>
+              <a:defRPr sz="900" b="0">
+                <a:solidFill>
+                  <a:srgbClr val="002855"/>
+                </a:solidFill>
+                <a:latin typeface="Arial"/>
+                <a:ea typeface="Arial"/>
+                <a:cs typeface="Arial"/>
+              </a:defRPr>
+            </a:pPr>
+            <a:r>
+              <a:rPr sz="900" b="0">
+                <a:solidFill>
+                  <a:srgbClr val="002855"/>
+                </a:solidFill>
+                <a:latin typeface="Arial"/>
+                <a:ea typeface="Arial"/>
+                <a:cs typeface="Arial"/>
+              </a:rPr>
+              <a:t>wvurail.org/dspira</a:t>
+            </a:r>
+          </a:p>
+        </p:txBody>
+      </p:sp>
+      <p:sp>
+        <p:nvSpPr>
+          <p:cNvPr id="11" name="DSPIRA 5"/>
+          <p:cNvSpPr>
+            <a:spLocks noGrp="1"/>
+          </p:cNvSpPr>
+          <p:nvPr/>
+        </p:nvSpPr>
+        <p:spPr>
+          <a:xfrm>
+            <a:off x="11191875" y="7277100"/>
+            <a:ext cx="762000" cy="228600"/>
+          </a:xfrm>
+          <a:prstGeom prst="rect">
+            <a:avLst/>
+          </a:prstGeom>
+          <a:noFill/>
+          <a:ln w="0">
+            <a:noFill/>
+          </a:ln>
+        </p:spPr>
+        <p:txBody>
+          <a:bodyPr>
+            <a:noAutofit/>
+          </a:bodyPr>
+          <a:lstStyle/>
+          <a:p>
+            <a:pPr>
+              <a:defRPr sz="900" b="0">
+                <a:solidFill>
+                  <a:srgbClr val="002855"/>
+                </a:solidFill>
+                <a:latin typeface="Arial"/>
+                <a:ea typeface="Arial"/>
+                <a:cs typeface="Arial"/>
+              </a:defRPr>
+            </a:pPr>
+            <a:r>
+              <a:rPr sz="900" b="0">
+                <a:solidFill>
+                  <a:srgbClr val="002855"/>
+                </a:solidFill>
+                <a:latin typeface="Arial"/>
+                <a:ea typeface="Arial"/>
+                <a:cs typeface="Arial"/>
+              </a:rPr>
+              <a:t>3 of 10</a:t>
+            </a:r>
           </a:p>
         </p:txBody>
       </p:sp>
@@ -7668,7 +8175,7 @@
         </p:nvSpPr>
         <p:spPr>
           <a:xfrm>
-            <a:off x="0" y="0"/>
+            <a:off x="0" y="342900"/>
             <a:ext cx="4654296" cy="6858000"/>
           </a:xfrm>
           <a:prstGeom prst="rect">
@@ -7725,7 +8232,7 @@
         </p:nvSpPr>
         <p:spPr>
           <a:xfrm>
-            <a:off x="643467" y="643467"/>
+            <a:off x="643467" y="986367"/>
             <a:ext cx="3363974" cy="1597315"/>
           </a:xfrm>
           <a:noFill/>
@@ -7743,11 +8250,11 @@
           <a:p>
             <a:pPr algn="ctr"/>
             <a:r>
-              <a:rPr lang="en-US" sz="2800" kern="1200">
+              <a:rPr lang="en-US" sz="2240" kern="1200">
                 <a:solidFill>
                   <a:schemeClr val="bg1"/>
                 </a:solidFill>
-                <a:latin typeface="+mj-lt"/>
+                <a:latin typeface="Arial"/>
                 <a:ea typeface="+mj-ea"/>
                 <a:cs typeface="+mj-cs"/>
               </a:rPr>
@@ -7790,7 +8297,7 @@
                   <a:buNone/>
                 </a:pPr>
                 <a:r>
-                  <a:rPr lang="en-US" sz="2000" dirty="0">
+                  <a:rPr lang="en-US" sz="1600" dirty="0">
                     <a:solidFill>
                       <a:schemeClr val="bg1"/>
                     </a:solidFill>
@@ -7802,7 +8309,7 @@
                 <a:pPr marL="0" indent="0">
                   <a:buNone/>
                 </a:pPr>
-                <a:endParaRPr lang="en-US" sz="2000" dirty="0">
+                <a:endParaRPr lang="en-US" sz="1600" dirty="0">
                   <a:solidFill>
                     <a:schemeClr val="bg1"/>
                   </a:solidFill>
@@ -7825,7 +8332,7 @@
                         <m:rPr>
                           <m:sty m:val="p"/>
                         </m:rPr>
-                        <a:rPr lang="en-US" sz="2000" i="1">
+                        <a:rPr lang="en-US" sz="1600" i="1">
                           <a:solidFill>
                             <a:schemeClr val="bg1"/>
                           </a:solidFill>
@@ -7834,7 +8341,7 @@
                         <m:t>Π</m:t>
                       </m:r>
                       <m:r>
-                        <a:rPr lang="en-US" sz="2000" b="0" i="1">
+                        <a:rPr lang="en-US" sz="1600" b="0" i="1">
                           <a:solidFill>
                             <a:schemeClr val="bg1"/>
                           </a:solidFill>
@@ -7843,7 +8350,7 @@
                         <m:t>(</m:t>
                       </m:r>
                       <m:r>
-                        <a:rPr lang="en-US" sz="2000" b="0" i="1">
+                        <a:rPr lang="en-US" sz="1600" b="0" i="1">
                           <a:solidFill>
                             <a:schemeClr val="bg1"/>
                           </a:solidFill>
@@ -7852,7 +8359,7 @@
                         <m:t>𝑡</m:t>
                       </m:r>
                       <m:r>
-                        <a:rPr lang="en-US" sz="2000" b="0" i="1">
+                        <a:rPr lang="en-US" sz="1600" b="0" i="1">
                           <a:solidFill>
                             <a:schemeClr val="bg1"/>
                           </a:solidFill>
@@ -7865,7 +8372,7 @@
                           <m:chr m:val="⇔"/>
                           <m:vertJc m:val="bot"/>
                           <m:ctrlPr>
-                            <a:rPr lang="en-US" sz="2000" b="0" i="1">
+                            <a:rPr lang="en-US" sz="1600" b="0" i="1">
                               <a:solidFill>
                                 <a:schemeClr val="bg1"/>
                               </a:solidFill>
@@ -7878,7 +8385,7 @@
                             <m:rPr>
                               <m:brk m:alnAt="2"/>
                             </m:rPr>
-                            <a:rPr lang="en-US" sz="2000" b="0" i="1">
+                            <a:rPr lang="en-US" sz="1600" b="0" i="1">
                               <a:solidFill>
                                 <a:schemeClr val="bg1"/>
                               </a:solidFill>
@@ -7887,7 +8394,7 @@
                             <m:t>𝐹</m:t>
                           </m:r>
                           <m:r>
-                            <a:rPr lang="en-US" sz="2000" b="0" i="1">
+                            <a:rPr lang="en-US" sz="1600" b="0" i="1">
                               <a:solidFill>
                                 <a:schemeClr val="bg1"/>
                               </a:solidFill>
@@ -7898,7 +8405,7 @@
                         </m:e>
                       </m:groupChr>
                       <m:r>
-                        <a:rPr lang="en-US" sz="2000" b="0" i="1">
+                        <a:rPr lang="en-US" sz="1600" b="0" i="1">
                           <a:solidFill>
                             <a:schemeClr val="bg1"/>
                           </a:solidFill>
@@ -7907,7 +8414,7 @@
                         <m:t>𝑠𝑖𝑛𝑐</m:t>
                       </m:r>
                       <m:r>
-                        <a:rPr lang="en-US" sz="2000" b="0" i="1">
+                        <a:rPr lang="en-US" sz="1600" b="0" i="1">
                           <a:solidFill>
                             <a:schemeClr val="bg1"/>
                           </a:solidFill>
@@ -7916,7 +8423,7 @@
                         <m:t>(</m:t>
                       </m:r>
                       <m:r>
-                        <a:rPr lang="en-US" sz="2000" b="0" i="1">
+                        <a:rPr lang="en-US" sz="1600" b="0" i="1">
                           <a:solidFill>
                             <a:schemeClr val="bg1"/>
                           </a:solidFill>
@@ -7925,7 +8432,7 @@
                         <m:t>𝑓</m:t>
                       </m:r>
                       <m:r>
-                        <a:rPr lang="en-US" sz="2000" b="0" i="1">
+                        <a:rPr lang="en-US" sz="1600" b="0" i="1">
                           <a:solidFill>
                             <a:schemeClr val="bg1"/>
                           </a:solidFill>
@@ -7936,7 +8443,7 @@
                     </m:oMath>
                   </m:oMathPara>
                 </a14:m>
-                <a:endParaRPr lang="en-US" sz="2000" dirty="0">
+                <a:endParaRPr lang="en-US" sz="1600" dirty="0">
                   <a:solidFill>
                     <a:schemeClr val="bg1"/>
                   </a:solidFill>
@@ -7959,7 +8466,7 @@
                         <m:rPr>
                           <m:sty m:val="p"/>
                         </m:rPr>
-                        <a:rPr lang="en-US" sz="2000" i="1">
+                        <a:rPr lang="en-US" sz="1600" i="1">
                           <a:solidFill>
                             <a:schemeClr val="bg1"/>
                           </a:solidFill>
@@ -7968,7 +8475,7 @@
                         <m:t>Π</m:t>
                       </m:r>
                       <m:r>
-                        <a:rPr lang="en-US" sz="2000" b="0" i="1">
+                        <a:rPr lang="en-US" sz="1600" b="0" i="1">
                           <a:solidFill>
                             <a:schemeClr val="bg1"/>
                           </a:solidFill>
@@ -7977,7 +8484,7 @@
                         <m:t>(</m:t>
                       </m:r>
                       <m:r>
-                        <a:rPr lang="en-US" sz="2000" b="0" i="1">
+                        <a:rPr lang="en-US" sz="1600" b="0" i="1">
                           <a:solidFill>
                             <a:schemeClr val="bg1"/>
                           </a:solidFill>
@@ -7986,7 +8493,7 @@
                         <m:t>𝑡</m:t>
                       </m:r>
                       <m:r>
-                        <a:rPr lang="en-US" sz="2000" b="0" i="1">
+                        <a:rPr lang="en-US" sz="1600" b="0" i="1">
                           <a:solidFill>
                             <a:schemeClr val="bg1"/>
                           </a:solidFill>
@@ -7999,7 +8506,7 @@
                           <m:chr m:val="⇔"/>
                           <m:vertJc m:val="bot"/>
                           <m:ctrlPr>
-                            <a:rPr lang="en-US" sz="2000" b="0" i="1">
+                            <a:rPr lang="en-US" sz="1600" b="0" i="1">
                               <a:solidFill>
                                 <a:schemeClr val="bg1"/>
                               </a:solidFill>
@@ -8012,7 +8519,7 @@
                             <m:rPr>
                               <m:brk m:alnAt="2"/>
                             </m:rPr>
-                            <a:rPr lang="en-US" sz="2000" b="0" i="1">
+                            <a:rPr lang="en-US" sz="1600" b="0" i="1">
                               <a:solidFill>
                                 <a:schemeClr val="bg1"/>
                               </a:solidFill>
@@ -8021,7 +8528,7 @@
                             <m:t>𝐹</m:t>
                           </m:r>
                           <m:r>
-                            <a:rPr lang="en-US" sz="2000" b="0" i="1">
+                            <a:rPr lang="en-US" sz="1600" b="0" i="1">
                               <a:solidFill>
                                 <a:schemeClr val="bg1"/>
                               </a:solidFill>
@@ -8032,7 +8539,7 @@
                         </m:e>
                       </m:groupChr>
                       <m:r>
-                        <a:rPr lang="en-US" sz="2000" b="0" i="1">
+                        <a:rPr lang="en-US" sz="1600" b="0" i="1">
                           <a:solidFill>
                             <a:schemeClr val="bg1"/>
                           </a:solidFill>
@@ -8041,7 +8548,7 @@
                         <m:t>𝑠𝑖𝑛𝑐</m:t>
                       </m:r>
                       <m:r>
-                        <a:rPr lang="en-US" sz="2000" b="0" i="1">
+                        <a:rPr lang="en-US" sz="1600" b="0" i="1">
                           <a:solidFill>
                             <a:schemeClr val="bg1"/>
                           </a:solidFill>
@@ -8050,7 +8557,7 @@
                         <m:t>(</m:t>
                       </m:r>
                       <m:r>
-                        <a:rPr lang="en-US" sz="2000" b="0" i="1">
+                        <a:rPr lang="en-US" sz="1600" b="0" i="1">
                           <a:solidFill>
                             <a:schemeClr val="bg1"/>
                           </a:solidFill>
@@ -8059,7 +8566,7 @@
                         <m:t>𝑓</m:t>
                       </m:r>
                       <m:r>
-                        <a:rPr lang="en-US" sz="2000" b="0" i="1">
+                        <a:rPr lang="en-US" sz="1600" b="0" i="1">
                           <a:solidFill>
                             <a:schemeClr val="bg1"/>
                           </a:solidFill>
@@ -8070,7 +8577,7 @@
                       <m:sSup>
                         <m:sSupPr>
                           <m:ctrlPr>
-                            <a:rPr lang="en-US" sz="2000" b="0" i="1">
+                            <a:rPr lang="en-US" sz="1600" b="0" i="1">
                               <a:solidFill>
                                 <a:schemeClr val="bg1"/>
                               </a:solidFill>
@@ -8080,7 +8587,7 @@
                         </m:sSupPr>
                         <m:e>
                           <m:r>
-                            <a:rPr lang="en-US" sz="2000" b="0" i="1">
+                            <a:rPr lang="en-US" sz="1600" b="0" i="1">
                               <a:solidFill>
                                 <a:schemeClr val="bg1"/>
                               </a:solidFill>
@@ -8091,7 +8598,7 @@
                         </m:e>
                         <m:sup>
                           <m:r>
-                            <a:rPr lang="en-US" sz="2000" b="0" i="1">
+                            <a:rPr lang="en-US" sz="1600" b="0" i="1">
                               <a:solidFill>
                                 <a:schemeClr val="bg1"/>
                               </a:solidFill>
@@ -8100,7 +8607,7 @@
                             <m:t>−</m:t>
                           </m:r>
                           <m:r>
-                            <a:rPr lang="en-US" sz="2000" b="0" i="1">
+                            <a:rPr lang="en-US" sz="1600" b="0" i="1">
                               <a:solidFill>
                                 <a:schemeClr val="bg1"/>
                               </a:solidFill>
@@ -8109,7 +8616,7 @@
                             <m:t>𝑗</m:t>
                           </m:r>
                           <m:r>
-                            <a:rPr lang="en-US" sz="2000" b="0" i="1">
+                            <a:rPr lang="en-US" sz="1600" b="0" i="1">
                               <a:solidFill>
                                 <a:schemeClr val="bg1"/>
                               </a:solidFill>
@@ -8118,7 +8625,7 @@
                             <m:t>2</m:t>
                           </m:r>
                           <m:r>
-                            <a:rPr lang="en-US" sz="2000" b="0" i="1">
+                            <a:rPr lang="en-US" sz="1600" b="0" i="1">
                               <a:solidFill>
                                 <a:schemeClr val="bg1"/>
                               </a:solidFill>
@@ -8127,7 +8634,7 @@
                             <m:t>𝜋</m:t>
                           </m:r>
                           <m:r>
-                            <a:rPr lang="en-US" sz="2000" b="0" i="1">
+                            <a:rPr lang="en-US" sz="1600" b="0" i="1">
                               <a:solidFill>
                                 <a:schemeClr val="bg1"/>
                               </a:solidFill>
@@ -8140,7 +8647,7 @@
                     </m:oMath>
                   </m:oMathPara>
                 </a14:m>
-                <a:endParaRPr lang="en-US" sz="2000" dirty="0">
+                <a:endParaRPr lang="en-US" sz="1600" dirty="0">
                   <a:solidFill>
                     <a:schemeClr val="bg1"/>
                   </a:solidFill>
@@ -8160,7 +8667,7 @@
                     </m:oMathParaPr>
                     <m:oMath xmlns:m="http://schemas.openxmlformats.org/officeDocument/2006/math">
                       <m:r>
-                        <a:rPr lang="en-US" sz="2000" i="1">
+                        <a:rPr lang="en-US" sz="1600" i="1">
                           <a:solidFill>
                             <a:schemeClr val="bg1"/>
                           </a:solidFill>
@@ -8169,7 +8676,7 @@
                         <m:t>𝛿</m:t>
                       </m:r>
                       <m:r>
-                        <a:rPr lang="en-US" sz="2000" b="0" i="1">
+                        <a:rPr lang="en-US" sz="1600" b="0" i="1">
                           <a:solidFill>
                             <a:schemeClr val="bg1"/>
                           </a:solidFill>
@@ -8178,7 +8685,7 @@
                         <m:t>(</m:t>
                       </m:r>
                       <m:r>
-                        <a:rPr lang="en-US" sz="2000" b="0" i="1">
+                        <a:rPr lang="en-US" sz="1600" b="0" i="1">
                           <a:solidFill>
                             <a:schemeClr val="bg1"/>
                           </a:solidFill>
@@ -8187,7 +8694,7 @@
                         <m:t>𝑡</m:t>
                       </m:r>
                       <m:r>
-                        <a:rPr lang="en-US" sz="2000" b="0" i="1">
+                        <a:rPr lang="en-US" sz="1600" b="0" i="1">
                           <a:solidFill>
                             <a:schemeClr val="bg1"/>
                           </a:solidFill>
@@ -8200,7 +8707,7 @@
                           <m:chr m:val="⇔"/>
                           <m:vertJc m:val="bot"/>
                           <m:ctrlPr>
-                            <a:rPr lang="en-US" sz="2000" b="0" i="1">
+                            <a:rPr lang="en-US" sz="1600" b="0" i="1">
                               <a:solidFill>
                                 <a:schemeClr val="bg1"/>
                               </a:solidFill>
@@ -8213,7 +8720,7 @@
                             <m:rPr>
                               <m:brk m:alnAt="2"/>
                             </m:rPr>
-                            <a:rPr lang="en-US" sz="2000" b="0" i="1">
+                            <a:rPr lang="en-US" sz="1600" b="0" i="1">
                               <a:solidFill>
                                 <a:schemeClr val="bg1"/>
                               </a:solidFill>
@@ -8222,7 +8729,7 @@
                             <m:t>𝐹</m:t>
                           </m:r>
                           <m:r>
-                            <a:rPr lang="en-US" sz="2000" b="0" i="1">
+                            <a:rPr lang="en-US" sz="1600" b="0" i="1">
                               <a:solidFill>
                                 <a:schemeClr val="bg1"/>
                               </a:solidFill>
@@ -8233,7 +8740,7 @@
                         </m:e>
                       </m:groupChr>
                       <m:r>
-                        <a:rPr lang="en-US" sz="2000" b="0" i="1">
+                        <a:rPr lang="en-US" sz="1600" b="0" i="1">
                           <a:solidFill>
                             <a:schemeClr val="bg1"/>
                           </a:solidFill>
@@ -8244,7 +8751,7 @@
                     </m:oMath>
                   </m:oMathPara>
                 </a14:m>
-                <a:endParaRPr lang="en-US" sz="2000" dirty="0">
+                <a:endParaRPr lang="en-US" sz="1600" dirty="0">
                   <a:solidFill>
                     <a:schemeClr val="bg1"/>
                   </a:solidFill>
@@ -8264,7 +8771,7 @@
                     </m:oMathParaPr>
                     <m:oMath xmlns:m="http://schemas.openxmlformats.org/officeDocument/2006/math">
                       <m:r>
-                        <a:rPr lang="en-US" sz="2000" i="1">
+                        <a:rPr lang="en-US" sz="1600" i="1">
                           <a:solidFill>
                             <a:schemeClr val="bg1"/>
                           </a:solidFill>
@@ -8273,7 +8780,7 @@
                         <m:t>𝛿</m:t>
                       </m:r>
                       <m:r>
-                        <a:rPr lang="en-US" sz="2000" b="0" i="1">
+                        <a:rPr lang="en-US" sz="1600" b="0" i="1">
                           <a:solidFill>
                             <a:schemeClr val="bg1"/>
                           </a:solidFill>
@@ -8282,7 +8789,7 @@
                         <m:t>(</m:t>
                       </m:r>
                       <m:r>
-                        <a:rPr lang="en-US" sz="2000" b="0" i="1">
+                        <a:rPr lang="en-US" sz="1600" b="0" i="1">
                           <a:solidFill>
                             <a:schemeClr val="bg1"/>
                           </a:solidFill>
@@ -8291,7 +8798,7 @@
                         <m:t>𝑡</m:t>
                       </m:r>
                       <m:r>
-                        <a:rPr lang="en-US" sz="2000" b="0" i="1">
+                        <a:rPr lang="en-US" sz="1600" b="0" i="1">
                           <a:solidFill>
                             <a:schemeClr val="bg1"/>
                           </a:solidFill>
@@ -8304,7 +8811,7 @@
                           <m:chr m:val="⇔"/>
                           <m:vertJc m:val="bot"/>
                           <m:ctrlPr>
-                            <a:rPr lang="en-US" sz="2000" b="0" i="1">
+                            <a:rPr lang="en-US" sz="1600" b="0" i="1">
                               <a:solidFill>
                                 <a:schemeClr val="bg1"/>
                               </a:solidFill>
@@ -8317,7 +8824,7 @@
                             <m:rPr>
                               <m:brk m:alnAt="2"/>
                             </m:rPr>
-                            <a:rPr lang="en-US" sz="2000" b="0" i="1">
+                            <a:rPr lang="en-US" sz="1600" b="0" i="1">
                               <a:solidFill>
                                 <a:schemeClr val="bg1"/>
                               </a:solidFill>
@@ -8326,7 +8833,7 @@
                             <m:t>𝐹</m:t>
                           </m:r>
                           <m:r>
-                            <a:rPr lang="en-US" sz="2000" b="0" i="1">
+                            <a:rPr lang="en-US" sz="1600" b="0" i="1">
                               <a:solidFill>
                                 <a:schemeClr val="bg1"/>
                               </a:solidFill>
@@ -8339,7 +8846,7 @@
                       <m:sSup>
                         <m:sSupPr>
                           <m:ctrlPr>
-                            <a:rPr lang="en-US" sz="2000" b="0" i="1">
+                            <a:rPr lang="en-US" sz="1600" b="0" i="1">
                               <a:solidFill>
                                 <a:schemeClr val="bg1"/>
                               </a:solidFill>
@@ -8349,7 +8856,7 @@
                         </m:sSupPr>
                         <m:e>
                           <m:r>
-                            <a:rPr lang="en-US" sz="2000" b="0" i="1">
+                            <a:rPr lang="en-US" sz="1600" b="0" i="1">
                               <a:solidFill>
                                 <a:schemeClr val="bg1"/>
                               </a:solidFill>
@@ -8360,7 +8867,7 @@
                         </m:e>
                         <m:sup>
                           <m:r>
-                            <a:rPr lang="en-US" sz="2000" b="0" i="1">
+                            <a:rPr lang="en-US" sz="1600" b="0" i="1">
                               <a:solidFill>
                                 <a:schemeClr val="bg1"/>
                               </a:solidFill>
@@ -8369,7 +8876,7 @@
                             <m:t>−</m:t>
                           </m:r>
                           <m:r>
-                            <a:rPr lang="en-US" sz="2000" b="0" i="1">
+                            <a:rPr lang="en-US" sz="1600" b="0" i="1">
                               <a:solidFill>
                                 <a:schemeClr val="bg1"/>
                               </a:solidFill>
@@ -8378,7 +8885,7 @@
                             <m:t>𝑗</m:t>
                           </m:r>
                           <m:r>
-                            <a:rPr lang="en-US" sz="2000" b="0" i="1">
+                            <a:rPr lang="en-US" sz="1600" b="0" i="1">
                               <a:solidFill>
                                 <a:schemeClr val="bg1"/>
                               </a:solidFill>
@@ -8387,7 +8894,7 @@
                             <m:t>2</m:t>
                           </m:r>
                           <m:r>
-                            <a:rPr lang="en-US" sz="2000" b="0" i="1">
+                            <a:rPr lang="en-US" sz="1600" b="0" i="1">
                               <a:solidFill>
                                 <a:schemeClr val="bg1"/>
                               </a:solidFill>
@@ -8396,7 +8903,7 @@
                             <m:t>𝜋</m:t>
                           </m:r>
                           <m:r>
-                            <a:rPr lang="en-US" sz="2000" b="0" i="1">
+                            <a:rPr lang="en-US" sz="1600" b="0" i="1">
                               <a:solidFill>
                                 <a:schemeClr val="bg1"/>
                               </a:solidFill>
@@ -8405,7 +8912,7 @@
                             <m:t>2</m:t>
                           </m:r>
                           <m:r>
-                            <a:rPr lang="en-US" sz="2000" b="0" i="1">
+                            <a:rPr lang="en-US" sz="1600" b="0" i="1">
                               <a:solidFill>
                                 <a:schemeClr val="bg1"/>
                               </a:solidFill>
@@ -8418,14 +8925,14 @@
                     </m:oMath>
                   </m:oMathPara>
                 </a14:m>
-                <a:endParaRPr lang="en-US" sz="2000" dirty="0">
+                <a:endParaRPr lang="en-US" sz="1600" dirty="0">
                   <a:solidFill>
                     <a:schemeClr val="bg1"/>
                   </a:solidFill>
                 </a:endParaRPr>
               </a:p>
               <a:p>
-                <a:endParaRPr lang="en-US" sz="2000" dirty="0">
+                <a:endParaRPr lang="en-US" sz="1600" dirty="0">
                   <a:solidFill>
                     <a:schemeClr val="bg1"/>
                   </a:solidFill>
@@ -8506,7 +9013,7 @@
         </p:blipFill>
         <p:spPr>
           <a:xfrm>
-            <a:off x="5041199" y="445410"/>
+            <a:off x="5041199" y="788310"/>
             <a:ext cx="6942857" cy="5761905"/>
           </a:xfrm>
           <a:prstGeom prst="rect">
@@ -8516,30 +9023,202 @@
       </p:pic>
       <p:sp>
         <p:nvSpPr>
-          <p:cNvPr id="7" name="Slide Number Placeholder 6">
-            <a:extLst>
-              <a:ext uri="{FF2B5EF4-FFF2-40B4-BE49-F238E27FC236}">
-                <a16:creationId xmlns:a16="http://schemas.microsoft.com/office/drawing/2014/main" id="{6866C455-D095-4CE8-BAA9-08300FA2E63C}"/>
-              </a:ext>
-            </a:extLst>
-          </p:cNvPr>
+          <p:cNvPr id="11" name="DSPIRA 1"/>
           <p:cNvSpPr>
             <a:spLocks noGrp="1"/>
           </p:cNvSpPr>
-          <p:nvPr>
-            <p:ph type="sldNum" sz="quarter" idx="12"/>
-          </p:nvPr>
-        </p:nvSpPr>
-        <p:spPr/>
+          <p:nvPr/>
+        </p:nvSpPr>
+        <p:spPr>
+          <a:xfrm>
+            <a:off x="0" y="0"/>
+            <a:ext cx="12192000" cy="342900"/>
+          </a:xfrm>
+          <a:prstGeom prst="rect">
+            <a:avLst/>
+          </a:prstGeom>
+          <a:solidFill>
+            <a:srgbClr val="FFFFFF"/>
+          </a:solidFill>
+          <a:ln w="0">
+            <a:noFill/>
+          </a:ln>
+        </p:spPr>
+      </p:sp>
+      <p:sp>
+        <p:nvSpPr>
+          <p:cNvPr id="12" name="DSPIRA 2"/>
+          <p:cNvSpPr>
+            <a:spLocks noGrp="1"/>
+          </p:cNvSpPr>
+          <p:nvPr/>
+        </p:nvSpPr>
+        <p:spPr>
+          <a:xfrm>
+            <a:off x="0" y="7200900"/>
+            <a:ext cx="12192000" cy="342900"/>
+          </a:xfrm>
+          <a:prstGeom prst="rect">
+            <a:avLst/>
+          </a:prstGeom>
+          <a:solidFill>
+            <a:srgbClr val="FFFFFF"/>
+          </a:solidFill>
+          <a:ln w="0">
+            <a:noFill/>
+          </a:ln>
+        </p:spPr>
+      </p:sp>
+      <p:sp>
+        <p:nvSpPr>
+          <p:cNvPr id="13" name="DSPIRA 3"/>
+          <p:cNvSpPr>
+            <a:spLocks noGrp="1"/>
+          </p:cNvSpPr>
+          <p:nvPr/>
+        </p:nvSpPr>
+        <p:spPr>
+          <a:xfrm>
+            <a:off x="228600" y="76200"/>
+            <a:ext cx="4762500" cy="228600"/>
+          </a:xfrm>
+          <a:prstGeom prst="rect">
+            <a:avLst/>
+          </a:prstGeom>
+          <a:noFill/>
+          <a:ln w="0">
+            <a:noFill/>
+          </a:ln>
+        </p:spPr>
         <p:txBody>
-          <a:bodyPr/>
+          <a:bodyPr>
+            <a:noAutofit/>
+          </a:bodyPr>
           <a:lstStyle/>
           <a:p>
-            <a:fld id="{A7A2ED00-DBE6-4EB1-9131-CB7486CD5D1F}" type="slidenum">
-              <a:rPr lang="en-US" smtClean="0"/>
-              <a:t>4</a:t>
-            </a:fld>
-            <a:endParaRPr lang="en-US"/>
+            <a:pPr>
+              <a:defRPr sz="1200" b="1">
+                <a:solidFill>
+                  <a:srgbClr val="002855"/>
+                </a:solidFill>
+                <a:latin typeface="Arial"/>
+                <a:ea typeface="Arial"/>
+                <a:cs typeface="Arial"/>
+              </a:defRPr>
+            </a:pPr>
+            <a:r>
+              <a:rPr sz="1200" b="1">
+                <a:solidFill>
+                  <a:srgbClr val="002855"/>
+                </a:solidFill>
+                <a:latin typeface="Arial"/>
+                <a:ea typeface="Arial"/>
+                <a:cs typeface="Arial"/>
+              </a:rPr>
+              <a:t>WVU DSPIRA</a:t>
+            </a:r>
+          </a:p>
+        </p:txBody>
+      </p:sp>
+      <p:sp>
+        <p:nvSpPr>
+          <p:cNvPr id="14" name="DSPIRA 4"/>
+          <p:cNvSpPr>
+            <a:spLocks noGrp="1"/>
+          </p:cNvSpPr>
+          <p:nvPr/>
+        </p:nvSpPr>
+        <p:spPr>
+          <a:xfrm>
+            <a:off x="228600" y="7277100"/>
+            <a:ext cx="6667500" cy="228600"/>
+          </a:xfrm>
+          <a:prstGeom prst="rect">
+            <a:avLst/>
+          </a:prstGeom>
+          <a:noFill/>
+          <a:ln w="0">
+            <a:noFill/>
+          </a:ln>
+        </p:spPr>
+        <p:txBody>
+          <a:bodyPr>
+            <a:noAutofit/>
+          </a:bodyPr>
+          <a:lstStyle/>
+          <a:p>
+            <a:pPr>
+              <a:defRPr sz="900" b="0">
+                <a:solidFill>
+                  <a:srgbClr val="002855"/>
+                </a:solidFill>
+                <a:latin typeface="Arial"/>
+                <a:ea typeface="Arial"/>
+                <a:cs typeface="Arial"/>
+              </a:defRPr>
+            </a:pPr>
+            <a:r>
+              <a:rPr sz="900" b="0">
+                <a:solidFill>
+                  <a:srgbClr val="002855"/>
+                </a:solidFill>
+                <a:latin typeface="Arial"/>
+                <a:ea typeface="Arial"/>
+                <a:cs typeface="Arial"/>
+              </a:rPr>
+              <a:t>wvurail.org/dspira</a:t>
+            </a:r>
+          </a:p>
+        </p:txBody>
+      </p:sp>
+      <p:sp>
+        <p:nvSpPr>
+          <p:cNvPr id="15" name="DSPIRA 5"/>
+          <p:cNvSpPr>
+            <a:spLocks noGrp="1"/>
+          </p:cNvSpPr>
+          <p:nvPr/>
+        </p:nvSpPr>
+        <p:spPr>
+          <a:xfrm>
+            <a:off x="11191875" y="7277100"/>
+            <a:ext cx="762000" cy="228600"/>
+          </a:xfrm>
+          <a:prstGeom prst="rect">
+            <a:avLst/>
+          </a:prstGeom>
+          <a:noFill/>
+          <a:ln w="0">
+            <a:noFill/>
+          </a:ln>
+        </p:spPr>
+        <p:txBody>
+          <a:bodyPr>
+            <a:noAutofit/>
+          </a:bodyPr>
+          <a:lstStyle/>
+          <a:p>
+            <a:pPr>
+              <a:defRPr sz="900" b="0">
+                <a:solidFill>
+                  <a:srgbClr val="002855"/>
+                </a:solidFill>
+                <a:latin typeface="Arial"/>
+                <a:ea typeface="Arial"/>
+                <a:cs typeface="Arial"/>
+              </a:defRPr>
+            </a:pPr>
+            <a:r>
+              <a:rPr sz="900" b="0">
+                <a:solidFill>
+                  <a:srgbClr val="002855"/>
+                </a:solidFill>
+                <a:latin typeface="Arial"/>
+                <a:ea typeface="Arial"/>
+                <a:cs typeface="Arial"/>
+              </a:rPr>
+              <a:t>4 of 10</a:t>
+            </a:r>
           </a:p>
         </p:txBody>
       </p:sp>
@@ -8606,7 +9285,7 @@
         </p:nvSpPr>
         <p:spPr>
           <a:xfrm>
-            <a:off x="0" y="0"/>
+            <a:off x="0" y="342900"/>
             <a:ext cx="4059050" cy="6858000"/>
           </a:xfrm>
           <a:prstGeom prst="rect">
@@ -8656,7 +9335,7 @@
               <a:tabLst/>
               <a:defRPr/>
             </a:pPr>
-            <a:endParaRPr kumimoji="0" lang="en-US" sz="1800" b="0" i="0" u="none" strike="noStrike" kern="1200" cap="none" spc="0" normalizeH="0" baseline="0" noProof="0">
+            <a:endParaRPr kumimoji="0" lang="en-US" sz="1440" b="0" i="0" u="none" strike="noStrike" kern="1200" cap="none" spc="0" normalizeH="0" baseline="0" noProof="0">
               <a:ln>
                 <a:noFill/>
               </a:ln>
@@ -8666,7 +9345,7 @@
               <a:effectLst/>
               <a:uLnTx/>
               <a:uFillTx/>
-              <a:latin typeface="Calibri" panose="020F0502020204030204"/>
+              <a:latin typeface="Arial" panose="020F0502020204030204"/>
               <a:ea typeface="+mn-ea"/>
               <a:cs typeface="+mn-cs"/>
             </a:endParaRPr>
@@ -8698,7 +9377,7 @@
         </p:nvCxnSpPr>
         <p:spPr>
           <a:xfrm>
-            <a:off x="8129871" y="1412488"/>
+            <a:off x="8129871" y="1755388"/>
             <a:ext cx="0" cy="3657600"/>
           </a:xfrm>
           <a:prstGeom prst="line">
@@ -8746,7 +9425,7 @@
         </p:nvSpPr>
         <p:spPr>
           <a:xfrm>
-            <a:off x="838200" y="1412488"/>
+            <a:off x="838200" y="1755388"/>
             <a:ext cx="2899189" cy="4363844"/>
           </a:xfrm>
         </p:spPr>
@@ -8757,7 +9436,7 @@
           <a:lstStyle/>
           <a:p>
             <a:r>
-              <a:rPr lang="en-US" sz="4000">
+              <a:rPr lang="en-US" sz="3200">
                 <a:solidFill>
                   <a:srgbClr val="FFFFFF"/>
                 </a:solidFill>
@@ -8785,7 +9464,7 @@
         </p:nvSpPr>
         <p:spPr>
           <a:xfrm>
-            <a:off x="4380855" y="1412489"/>
+            <a:off x="4380855" y="1755389"/>
             <a:ext cx="3427283" cy="4363844"/>
           </a:xfrm>
         </p:spPr>
@@ -8796,7 +9475,7 @@
           <a:lstStyle/>
           <a:p>
             <a:r>
-              <a:rPr lang="en-US" sz="2400" dirty="0"/>
+              <a:rPr lang="en-US" sz="1920" dirty="0"/>
               <a:t>Fourier transform of a sum of signals = sum of Fourier transforms </a:t>
             </a:r>
           </a:p>
@@ -8820,7 +9499,7 @@
         </p:nvSpPr>
         <p:spPr>
           <a:xfrm>
-            <a:off x="8451604" y="1412489"/>
+            <a:off x="8451604" y="1755389"/>
             <a:ext cx="3197701" cy="4363844"/>
           </a:xfrm>
         </p:spPr>
@@ -8831,7 +9510,7 @@
           <a:lstStyle/>
           <a:p>
             <a:r>
-              <a:rPr lang="en-US" sz="2400" dirty="0"/>
+              <a:rPr lang="en-US" sz="1920" dirty="0"/>
               <a:t>Example</a:t>
             </a:r>
           </a:p>
@@ -8839,30 +9518,202 @@
       </p:sp>
       <p:sp>
         <p:nvSpPr>
-          <p:cNvPr id="5" name="Slide Number Placeholder 4">
-            <a:extLst>
-              <a:ext uri="{FF2B5EF4-FFF2-40B4-BE49-F238E27FC236}">
-                <a16:creationId xmlns:a16="http://schemas.microsoft.com/office/drawing/2014/main" id="{58E5F522-9C0C-413D-8E82-2E440EAFA1F7}"/>
-              </a:ext>
-            </a:extLst>
-          </p:cNvPr>
+          <p:cNvPr id="19" name="DSPIRA 1"/>
           <p:cNvSpPr>
             <a:spLocks noGrp="1"/>
           </p:cNvSpPr>
-          <p:nvPr>
-            <p:ph type="sldNum" sz="quarter" idx="12"/>
-          </p:nvPr>
-        </p:nvSpPr>
-        <p:spPr/>
+          <p:nvPr/>
+        </p:nvSpPr>
+        <p:spPr>
+          <a:xfrm>
+            <a:off x="0" y="0"/>
+            <a:ext cx="12192000" cy="342900"/>
+          </a:xfrm>
+          <a:prstGeom prst="rect">
+            <a:avLst/>
+          </a:prstGeom>
+          <a:solidFill>
+            <a:srgbClr val="FFFFFF"/>
+          </a:solidFill>
+          <a:ln w="0">
+            <a:noFill/>
+          </a:ln>
+        </p:spPr>
+      </p:sp>
+      <p:sp>
+        <p:nvSpPr>
+          <p:cNvPr id="20" name="DSPIRA 2"/>
+          <p:cNvSpPr>
+            <a:spLocks noGrp="1"/>
+          </p:cNvSpPr>
+          <p:nvPr/>
+        </p:nvSpPr>
+        <p:spPr>
+          <a:xfrm>
+            <a:off x="0" y="7200900"/>
+            <a:ext cx="12192000" cy="342900"/>
+          </a:xfrm>
+          <a:prstGeom prst="rect">
+            <a:avLst/>
+          </a:prstGeom>
+          <a:solidFill>
+            <a:srgbClr val="FFFFFF"/>
+          </a:solidFill>
+          <a:ln w="0">
+            <a:noFill/>
+          </a:ln>
+        </p:spPr>
+      </p:sp>
+      <p:sp>
+        <p:nvSpPr>
+          <p:cNvPr id="21" name="DSPIRA 3"/>
+          <p:cNvSpPr>
+            <a:spLocks noGrp="1"/>
+          </p:cNvSpPr>
+          <p:nvPr/>
+        </p:nvSpPr>
+        <p:spPr>
+          <a:xfrm>
+            <a:off x="228600" y="76200"/>
+            <a:ext cx="4762500" cy="228600"/>
+          </a:xfrm>
+          <a:prstGeom prst="rect">
+            <a:avLst/>
+          </a:prstGeom>
+          <a:noFill/>
+          <a:ln w="0">
+            <a:noFill/>
+          </a:ln>
+        </p:spPr>
         <p:txBody>
-          <a:bodyPr/>
+          <a:bodyPr>
+            <a:noAutofit/>
+          </a:bodyPr>
           <a:lstStyle/>
           <a:p>
-            <a:fld id="{A7A2ED00-DBE6-4EB1-9131-CB7486CD5D1F}" type="slidenum">
-              <a:rPr lang="en-US" smtClean="0"/>
-              <a:t>5</a:t>
-            </a:fld>
-            <a:endParaRPr lang="en-US"/>
+            <a:pPr>
+              <a:defRPr sz="1200" b="1">
+                <a:solidFill>
+                  <a:srgbClr val="002855"/>
+                </a:solidFill>
+                <a:latin typeface="Arial"/>
+                <a:ea typeface="Arial"/>
+                <a:cs typeface="Arial"/>
+              </a:defRPr>
+            </a:pPr>
+            <a:r>
+              <a:rPr sz="1200" b="1">
+                <a:solidFill>
+                  <a:srgbClr val="002855"/>
+                </a:solidFill>
+                <a:latin typeface="Arial"/>
+                <a:ea typeface="Arial"/>
+                <a:cs typeface="Arial"/>
+              </a:rPr>
+              <a:t>WVU DSPIRA</a:t>
+            </a:r>
+          </a:p>
+        </p:txBody>
+      </p:sp>
+      <p:sp>
+        <p:nvSpPr>
+          <p:cNvPr id="22" name="DSPIRA 4"/>
+          <p:cNvSpPr>
+            <a:spLocks noGrp="1"/>
+          </p:cNvSpPr>
+          <p:nvPr/>
+        </p:nvSpPr>
+        <p:spPr>
+          <a:xfrm>
+            <a:off x="228600" y="7277100"/>
+            <a:ext cx="6667500" cy="228600"/>
+          </a:xfrm>
+          <a:prstGeom prst="rect">
+            <a:avLst/>
+          </a:prstGeom>
+          <a:noFill/>
+          <a:ln w="0">
+            <a:noFill/>
+          </a:ln>
+        </p:spPr>
+        <p:txBody>
+          <a:bodyPr>
+            <a:noAutofit/>
+          </a:bodyPr>
+          <a:lstStyle/>
+          <a:p>
+            <a:pPr>
+              <a:defRPr sz="900" b="0">
+                <a:solidFill>
+                  <a:srgbClr val="002855"/>
+                </a:solidFill>
+                <a:latin typeface="Arial"/>
+                <a:ea typeface="Arial"/>
+                <a:cs typeface="Arial"/>
+              </a:defRPr>
+            </a:pPr>
+            <a:r>
+              <a:rPr sz="900" b="0">
+                <a:solidFill>
+                  <a:srgbClr val="002855"/>
+                </a:solidFill>
+                <a:latin typeface="Arial"/>
+                <a:ea typeface="Arial"/>
+                <a:cs typeface="Arial"/>
+              </a:rPr>
+              <a:t>wvurail.org/dspira</a:t>
+            </a:r>
+          </a:p>
+        </p:txBody>
+      </p:sp>
+      <p:sp>
+        <p:nvSpPr>
+          <p:cNvPr id="23" name="DSPIRA 5"/>
+          <p:cNvSpPr>
+            <a:spLocks noGrp="1"/>
+          </p:cNvSpPr>
+          <p:nvPr/>
+        </p:nvSpPr>
+        <p:spPr>
+          <a:xfrm>
+            <a:off x="11191875" y="7277100"/>
+            <a:ext cx="762000" cy="228600"/>
+          </a:xfrm>
+          <a:prstGeom prst="rect">
+            <a:avLst/>
+          </a:prstGeom>
+          <a:noFill/>
+          <a:ln w="0">
+            <a:noFill/>
+          </a:ln>
+        </p:spPr>
+        <p:txBody>
+          <a:bodyPr>
+            <a:noAutofit/>
+          </a:bodyPr>
+          <a:lstStyle/>
+          <a:p>
+            <a:pPr>
+              <a:defRPr sz="900" b="0">
+                <a:solidFill>
+                  <a:srgbClr val="002855"/>
+                </a:solidFill>
+                <a:latin typeface="Arial"/>
+                <a:ea typeface="Arial"/>
+                <a:cs typeface="Arial"/>
+              </a:defRPr>
+            </a:pPr>
+            <a:r>
+              <a:rPr sz="900" b="0">
+                <a:solidFill>
+                  <a:srgbClr val="002855"/>
+                </a:solidFill>
+                <a:latin typeface="Arial"/>
+                <a:ea typeface="Arial"/>
+                <a:cs typeface="Arial"/>
+              </a:rPr>
+              <a:t>5 of 10</a:t>
+            </a:r>
           </a:p>
         </p:txBody>
       </p:sp>
@@ -8914,7 +9765,7 @@
         </p:nvSpPr>
         <p:spPr>
           <a:xfrm>
-            <a:off x="838200" y="365126"/>
+            <a:off x="838200" y="708026"/>
             <a:ext cx="10515600" cy="693654"/>
           </a:xfrm>
         </p:spPr>
@@ -9735,30 +10586,202 @@
       </mc:AlternateContent>
       <p:sp>
         <p:nvSpPr>
-          <p:cNvPr id="4" name="Slide Number Placeholder 3">
-            <a:extLst>
-              <a:ext uri="{FF2B5EF4-FFF2-40B4-BE49-F238E27FC236}">
-                <a16:creationId xmlns:a16="http://schemas.microsoft.com/office/drawing/2014/main" id="{DE3AAC6A-9B4F-4962-B966-9147B56DDF5D}"/>
-              </a:ext>
-            </a:extLst>
-          </p:cNvPr>
+          <p:cNvPr id="4" name="DSPIRA 1"/>
           <p:cNvSpPr>
             <a:spLocks noGrp="1"/>
           </p:cNvSpPr>
-          <p:nvPr>
-            <p:ph type="sldNum" sz="quarter" idx="12"/>
-          </p:nvPr>
-        </p:nvSpPr>
-        <p:spPr/>
+          <p:nvPr/>
+        </p:nvSpPr>
+        <p:spPr>
+          <a:xfrm>
+            <a:off x="0" y="0"/>
+            <a:ext cx="12192000" cy="342900"/>
+          </a:xfrm>
+          <a:prstGeom prst="rect">
+            <a:avLst/>
+          </a:prstGeom>
+          <a:solidFill>
+            <a:srgbClr val="FFFFFF"/>
+          </a:solidFill>
+          <a:ln w="0">
+            <a:noFill/>
+          </a:ln>
+        </p:spPr>
+      </p:sp>
+      <p:sp>
+        <p:nvSpPr>
+          <p:cNvPr id="5" name="DSPIRA 2"/>
+          <p:cNvSpPr>
+            <a:spLocks noGrp="1"/>
+          </p:cNvSpPr>
+          <p:nvPr/>
+        </p:nvSpPr>
+        <p:spPr>
+          <a:xfrm>
+            <a:off x="0" y="7200900"/>
+            <a:ext cx="12192000" cy="342900"/>
+          </a:xfrm>
+          <a:prstGeom prst="rect">
+            <a:avLst/>
+          </a:prstGeom>
+          <a:solidFill>
+            <a:srgbClr val="FFFFFF"/>
+          </a:solidFill>
+          <a:ln w="0">
+            <a:noFill/>
+          </a:ln>
+        </p:spPr>
+      </p:sp>
+      <p:sp>
+        <p:nvSpPr>
+          <p:cNvPr id="6" name="DSPIRA 3"/>
+          <p:cNvSpPr>
+            <a:spLocks noGrp="1"/>
+          </p:cNvSpPr>
+          <p:nvPr/>
+        </p:nvSpPr>
+        <p:spPr>
+          <a:xfrm>
+            <a:off x="228600" y="76200"/>
+            <a:ext cx="4762500" cy="228600"/>
+          </a:xfrm>
+          <a:prstGeom prst="rect">
+            <a:avLst/>
+          </a:prstGeom>
+          <a:noFill/>
+          <a:ln w="0">
+            <a:noFill/>
+          </a:ln>
+        </p:spPr>
         <p:txBody>
-          <a:bodyPr/>
+          <a:bodyPr>
+            <a:noAutofit/>
+          </a:bodyPr>
           <a:lstStyle/>
           <a:p>
-            <a:fld id="{A7A2ED00-DBE6-4EB1-9131-CB7486CD5D1F}" type="slidenum">
-              <a:rPr lang="en-US" smtClean="0"/>
-              <a:t>6</a:t>
-            </a:fld>
-            <a:endParaRPr lang="en-US"/>
+            <a:pPr>
+              <a:defRPr sz="1200" b="1">
+                <a:solidFill>
+                  <a:srgbClr val="002855"/>
+                </a:solidFill>
+                <a:latin typeface="Arial"/>
+                <a:ea typeface="Arial"/>
+                <a:cs typeface="Arial"/>
+              </a:defRPr>
+            </a:pPr>
+            <a:r>
+              <a:rPr sz="1200" b="1">
+                <a:solidFill>
+                  <a:srgbClr val="002855"/>
+                </a:solidFill>
+                <a:latin typeface="Arial"/>
+                <a:ea typeface="Arial"/>
+                <a:cs typeface="Arial"/>
+              </a:rPr>
+              <a:t>WVU DSPIRA</a:t>
+            </a:r>
+          </a:p>
+        </p:txBody>
+      </p:sp>
+      <p:sp>
+        <p:nvSpPr>
+          <p:cNvPr id="7" name="DSPIRA 4"/>
+          <p:cNvSpPr>
+            <a:spLocks noGrp="1"/>
+          </p:cNvSpPr>
+          <p:nvPr/>
+        </p:nvSpPr>
+        <p:spPr>
+          <a:xfrm>
+            <a:off x="228600" y="7277100"/>
+            <a:ext cx="6667500" cy="228600"/>
+          </a:xfrm>
+          <a:prstGeom prst="rect">
+            <a:avLst/>
+          </a:prstGeom>
+          <a:noFill/>
+          <a:ln w="0">
+            <a:noFill/>
+          </a:ln>
+        </p:spPr>
+        <p:txBody>
+          <a:bodyPr>
+            <a:noAutofit/>
+          </a:bodyPr>
+          <a:lstStyle/>
+          <a:p>
+            <a:pPr>
+              <a:defRPr sz="900" b="0">
+                <a:solidFill>
+                  <a:srgbClr val="002855"/>
+                </a:solidFill>
+                <a:latin typeface="Arial"/>
+                <a:ea typeface="Arial"/>
+                <a:cs typeface="Arial"/>
+              </a:defRPr>
+            </a:pPr>
+            <a:r>
+              <a:rPr sz="900" b="0">
+                <a:solidFill>
+                  <a:srgbClr val="002855"/>
+                </a:solidFill>
+                <a:latin typeface="Arial"/>
+                <a:ea typeface="Arial"/>
+                <a:cs typeface="Arial"/>
+              </a:rPr>
+              <a:t>wvurail.org/dspira</a:t>
+            </a:r>
+          </a:p>
+        </p:txBody>
+      </p:sp>
+      <p:sp>
+        <p:nvSpPr>
+          <p:cNvPr id="8" name="DSPIRA 5"/>
+          <p:cNvSpPr>
+            <a:spLocks noGrp="1"/>
+          </p:cNvSpPr>
+          <p:nvPr/>
+        </p:nvSpPr>
+        <p:spPr>
+          <a:xfrm>
+            <a:off x="11191875" y="7277100"/>
+            <a:ext cx="762000" cy="228600"/>
+          </a:xfrm>
+          <a:prstGeom prst="rect">
+            <a:avLst/>
+          </a:prstGeom>
+          <a:noFill/>
+          <a:ln w="0">
+            <a:noFill/>
+          </a:ln>
+        </p:spPr>
+        <p:txBody>
+          <a:bodyPr>
+            <a:noAutofit/>
+          </a:bodyPr>
+          <a:lstStyle/>
+          <a:p>
+            <a:pPr>
+              <a:defRPr sz="900" b="0">
+                <a:solidFill>
+                  <a:srgbClr val="002855"/>
+                </a:solidFill>
+                <a:latin typeface="Arial"/>
+                <a:ea typeface="Arial"/>
+                <a:cs typeface="Arial"/>
+              </a:defRPr>
+            </a:pPr>
+            <a:r>
+              <a:rPr sz="900" b="0">
+                <a:solidFill>
+                  <a:srgbClr val="002855"/>
+                </a:solidFill>
+                <a:latin typeface="Arial"/>
+                <a:ea typeface="Arial"/>
+                <a:cs typeface="Arial"/>
+              </a:rPr>
+              <a:t>6 of 10</a:t>
+            </a:r>
           </a:p>
         </p:txBody>
       </p:sp>
@@ -9841,7 +10864,7 @@
         </p:blipFill>
         <p:spPr>
           <a:xfrm>
-            <a:off x="6641431" y="816337"/>
+            <a:off x="6641431" y="1159237"/>
             <a:ext cx="5225327" cy="5225327"/>
           </a:xfrm>
           <a:prstGeom prst="rect">
@@ -9880,7 +10903,7 @@
         </p:blipFill>
         <p:spPr>
           <a:xfrm>
-            <a:off x="838201" y="2743201"/>
+            <a:off x="838201" y="3086101"/>
             <a:ext cx="1371600" cy="1371600"/>
           </a:xfrm>
           <a:prstGeom prst="rect">
@@ -9906,7 +10929,7 @@
         </p:nvSpPr>
         <p:spPr>
           <a:xfrm>
-            <a:off x="2370666" y="2187743"/>
+            <a:off x="2370666" y="2530643"/>
             <a:ext cx="5650387" cy="3853920"/>
           </a:xfrm>
         </p:spPr>
@@ -9921,7 +10944,7 @@
                 <a:solidFill>
                   <a:schemeClr val="tx1"/>
                 </a:solidFill>
-                <a:latin typeface="+mj-lt"/>
+                <a:latin typeface="Arial"/>
                 <a:ea typeface="+mj-ea"/>
                 <a:cs typeface="+mj-cs"/>
               </a:rPr>
@@ -9935,7 +10958,7 @@
               <a:solidFill>
                 <a:schemeClr val="tx1"/>
               </a:solidFill>
-              <a:latin typeface="+mj-lt"/>
+              <a:latin typeface="Arial"/>
               <a:ea typeface="+mj-ea"/>
               <a:cs typeface="+mj-cs"/>
             </a:endParaRPr>
@@ -9944,30 +10967,202 @@
       </p:sp>
       <p:sp>
         <p:nvSpPr>
-          <p:cNvPr id="3" name="Slide Number Placeholder 2">
-            <a:extLst>
-              <a:ext uri="{FF2B5EF4-FFF2-40B4-BE49-F238E27FC236}">
-                <a16:creationId xmlns:a16="http://schemas.microsoft.com/office/drawing/2014/main" id="{6649CAD5-16F6-4B0A-A734-738E80261B3F}"/>
-              </a:ext>
-            </a:extLst>
-          </p:cNvPr>
+          <p:cNvPr id="12" name="DSPIRA 1"/>
           <p:cNvSpPr>
             <a:spLocks noGrp="1"/>
           </p:cNvSpPr>
-          <p:nvPr>
-            <p:ph type="sldNum" sz="quarter" idx="12"/>
-          </p:nvPr>
-        </p:nvSpPr>
-        <p:spPr/>
+          <p:nvPr/>
+        </p:nvSpPr>
+        <p:spPr>
+          <a:xfrm>
+            <a:off x="0" y="0"/>
+            <a:ext cx="12192000" cy="342900"/>
+          </a:xfrm>
+          <a:prstGeom prst="rect">
+            <a:avLst/>
+          </a:prstGeom>
+          <a:solidFill>
+            <a:srgbClr val="FFFFFF"/>
+          </a:solidFill>
+          <a:ln w="0">
+            <a:noFill/>
+          </a:ln>
+        </p:spPr>
+      </p:sp>
+      <p:sp>
+        <p:nvSpPr>
+          <p:cNvPr id="13" name="DSPIRA 2"/>
+          <p:cNvSpPr>
+            <a:spLocks noGrp="1"/>
+          </p:cNvSpPr>
+          <p:nvPr/>
+        </p:nvSpPr>
+        <p:spPr>
+          <a:xfrm>
+            <a:off x="0" y="7200900"/>
+            <a:ext cx="12192000" cy="342900"/>
+          </a:xfrm>
+          <a:prstGeom prst="rect">
+            <a:avLst/>
+          </a:prstGeom>
+          <a:solidFill>
+            <a:srgbClr val="FFFFFF"/>
+          </a:solidFill>
+          <a:ln w="0">
+            <a:noFill/>
+          </a:ln>
+        </p:spPr>
+      </p:sp>
+      <p:sp>
+        <p:nvSpPr>
+          <p:cNvPr id="14" name="DSPIRA 3"/>
+          <p:cNvSpPr>
+            <a:spLocks noGrp="1"/>
+          </p:cNvSpPr>
+          <p:nvPr/>
+        </p:nvSpPr>
+        <p:spPr>
+          <a:xfrm>
+            <a:off x="228600" y="76200"/>
+            <a:ext cx="4762500" cy="228600"/>
+          </a:xfrm>
+          <a:prstGeom prst="rect">
+            <a:avLst/>
+          </a:prstGeom>
+          <a:noFill/>
+          <a:ln w="0">
+            <a:noFill/>
+          </a:ln>
+        </p:spPr>
         <p:txBody>
-          <a:bodyPr/>
+          <a:bodyPr>
+            <a:noAutofit/>
+          </a:bodyPr>
           <a:lstStyle/>
           <a:p>
-            <a:fld id="{A7A2ED00-DBE6-4EB1-9131-CB7486CD5D1F}" type="slidenum">
-              <a:rPr lang="en-US" smtClean="0"/>
-              <a:t>7</a:t>
-            </a:fld>
-            <a:endParaRPr lang="en-US"/>
+            <a:pPr>
+              <a:defRPr sz="1200" b="1">
+                <a:solidFill>
+                  <a:srgbClr val="002855"/>
+                </a:solidFill>
+                <a:latin typeface="Arial"/>
+                <a:ea typeface="Arial"/>
+                <a:cs typeface="Arial"/>
+              </a:defRPr>
+            </a:pPr>
+            <a:r>
+              <a:rPr sz="1200" b="1">
+                <a:solidFill>
+                  <a:srgbClr val="002855"/>
+                </a:solidFill>
+                <a:latin typeface="Arial"/>
+                <a:ea typeface="Arial"/>
+                <a:cs typeface="Arial"/>
+              </a:rPr>
+              <a:t>WVU DSPIRA</a:t>
+            </a:r>
+          </a:p>
+        </p:txBody>
+      </p:sp>
+      <p:sp>
+        <p:nvSpPr>
+          <p:cNvPr id="15" name="DSPIRA 4"/>
+          <p:cNvSpPr>
+            <a:spLocks noGrp="1"/>
+          </p:cNvSpPr>
+          <p:nvPr/>
+        </p:nvSpPr>
+        <p:spPr>
+          <a:xfrm>
+            <a:off x="228600" y="7277100"/>
+            <a:ext cx="6667500" cy="228600"/>
+          </a:xfrm>
+          <a:prstGeom prst="rect">
+            <a:avLst/>
+          </a:prstGeom>
+          <a:noFill/>
+          <a:ln w="0">
+            <a:noFill/>
+          </a:ln>
+        </p:spPr>
+        <p:txBody>
+          <a:bodyPr>
+            <a:noAutofit/>
+          </a:bodyPr>
+          <a:lstStyle/>
+          <a:p>
+            <a:pPr>
+              <a:defRPr sz="900" b="0">
+                <a:solidFill>
+                  <a:srgbClr val="002855"/>
+                </a:solidFill>
+                <a:latin typeface="Arial"/>
+                <a:ea typeface="Arial"/>
+                <a:cs typeface="Arial"/>
+              </a:defRPr>
+            </a:pPr>
+            <a:r>
+              <a:rPr sz="900" b="0">
+                <a:solidFill>
+                  <a:srgbClr val="002855"/>
+                </a:solidFill>
+                <a:latin typeface="Arial"/>
+                <a:ea typeface="Arial"/>
+                <a:cs typeface="Arial"/>
+              </a:rPr>
+              <a:t>wvurail.org/dspira</a:t>
+            </a:r>
+          </a:p>
+        </p:txBody>
+      </p:sp>
+      <p:sp>
+        <p:nvSpPr>
+          <p:cNvPr id="16" name="DSPIRA 5"/>
+          <p:cNvSpPr>
+            <a:spLocks noGrp="1"/>
+          </p:cNvSpPr>
+          <p:nvPr/>
+        </p:nvSpPr>
+        <p:spPr>
+          <a:xfrm>
+            <a:off x="11191875" y="7277100"/>
+            <a:ext cx="762000" cy="228600"/>
+          </a:xfrm>
+          <a:prstGeom prst="rect">
+            <a:avLst/>
+          </a:prstGeom>
+          <a:noFill/>
+          <a:ln w="0">
+            <a:noFill/>
+          </a:ln>
+        </p:spPr>
+        <p:txBody>
+          <a:bodyPr>
+            <a:noAutofit/>
+          </a:bodyPr>
+          <a:lstStyle/>
+          <a:p>
+            <a:pPr>
+              <a:defRPr sz="900" b="0">
+                <a:solidFill>
+                  <a:srgbClr val="002855"/>
+                </a:solidFill>
+                <a:latin typeface="Arial"/>
+                <a:ea typeface="Arial"/>
+                <a:cs typeface="Arial"/>
+              </a:defRPr>
+            </a:pPr>
+            <a:r>
+              <a:rPr sz="900" b="0">
+                <a:solidFill>
+                  <a:srgbClr val="002855"/>
+                </a:solidFill>
+                <a:latin typeface="Arial"/>
+                <a:ea typeface="Arial"/>
+                <a:cs typeface="Arial"/>
+              </a:rPr>
+              <a:t>7 of 10</a:t>
+            </a:r>
           </a:p>
         </p:txBody>
       </p:sp>
@@ -10019,7 +11214,7 @@
         </p:nvSpPr>
         <p:spPr>
           <a:xfrm>
-            <a:off x="838200" y="220747"/>
+            <a:off x="838200" y="563647"/>
             <a:ext cx="10515600" cy="922499"/>
           </a:xfrm>
         </p:spPr>
@@ -10310,30 +11505,202 @@
       </mc:AlternateContent>
       <p:sp>
         <p:nvSpPr>
-          <p:cNvPr id="4" name="Slide Number Placeholder 3">
-            <a:extLst>
-              <a:ext uri="{FF2B5EF4-FFF2-40B4-BE49-F238E27FC236}">
-                <a16:creationId xmlns:a16="http://schemas.microsoft.com/office/drawing/2014/main" id="{88B31700-10E5-4AB6-B57C-A76010F4F280}"/>
-              </a:ext>
-            </a:extLst>
-          </p:cNvPr>
+          <p:cNvPr id="4" name="DSPIRA 1"/>
           <p:cNvSpPr>
             <a:spLocks noGrp="1"/>
           </p:cNvSpPr>
-          <p:nvPr>
-            <p:ph type="sldNum" sz="quarter" idx="12"/>
-          </p:nvPr>
-        </p:nvSpPr>
-        <p:spPr/>
+          <p:nvPr/>
+        </p:nvSpPr>
+        <p:spPr>
+          <a:xfrm>
+            <a:off x="0" y="0"/>
+            <a:ext cx="12192000" cy="342900"/>
+          </a:xfrm>
+          <a:prstGeom prst="rect">
+            <a:avLst/>
+          </a:prstGeom>
+          <a:solidFill>
+            <a:srgbClr val="FFFFFF"/>
+          </a:solidFill>
+          <a:ln w="0">
+            <a:noFill/>
+          </a:ln>
+        </p:spPr>
+      </p:sp>
+      <p:sp>
+        <p:nvSpPr>
+          <p:cNvPr id="5" name="DSPIRA 2"/>
+          <p:cNvSpPr>
+            <a:spLocks noGrp="1"/>
+          </p:cNvSpPr>
+          <p:nvPr/>
+        </p:nvSpPr>
+        <p:spPr>
+          <a:xfrm>
+            <a:off x="0" y="7200900"/>
+            <a:ext cx="12192000" cy="342900"/>
+          </a:xfrm>
+          <a:prstGeom prst="rect">
+            <a:avLst/>
+          </a:prstGeom>
+          <a:solidFill>
+            <a:srgbClr val="FFFFFF"/>
+          </a:solidFill>
+          <a:ln w="0">
+            <a:noFill/>
+          </a:ln>
+        </p:spPr>
+      </p:sp>
+      <p:sp>
+        <p:nvSpPr>
+          <p:cNvPr id="6" name="DSPIRA 3"/>
+          <p:cNvSpPr>
+            <a:spLocks noGrp="1"/>
+          </p:cNvSpPr>
+          <p:nvPr/>
+        </p:nvSpPr>
+        <p:spPr>
+          <a:xfrm>
+            <a:off x="228600" y="76200"/>
+            <a:ext cx="4762500" cy="228600"/>
+          </a:xfrm>
+          <a:prstGeom prst="rect">
+            <a:avLst/>
+          </a:prstGeom>
+          <a:noFill/>
+          <a:ln w="0">
+            <a:noFill/>
+          </a:ln>
+        </p:spPr>
         <p:txBody>
-          <a:bodyPr/>
+          <a:bodyPr>
+            <a:noAutofit/>
+          </a:bodyPr>
           <a:lstStyle/>
           <a:p>
-            <a:fld id="{A7A2ED00-DBE6-4EB1-9131-CB7486CD5D1F}" type="slidenum">
-              <a:rPr lang="en-US" smtClean="0"/>
-              <a:t>8</a:t>
-            </a:fld>
-            <a:endParaRPr lang="en-US"/>
+            <a:pPr>
+              <a:defRPr sz="1200" b="1">
+                <a:solidFill>
+                  <a:srgbClr val="002855"/>
+                </a:solidFill>
+                <a:latin typeface="Arial"/>
+                <a:ea typeface="Arial"/>
+                <a:cs typeface="Arial"/>
+              </a:defRPr>
+            </a:pPr>
+            <a:r>
+              <a:rPr sz="1200" b="1">
+                <a:solidFill>
+                  <a:srgbClr val="002855"/>
+                </a:solidFill>
+                <a:latin typeface="Arial"/>
+                <a:ea typeface="Arial"/>
+                <a:cs typeface="Arial"/>
+              </a:rPr>
+              <a:t>WVU DSPIRA</a:t>
+            </a:r>
+          </a:p>
+        </p:txBody>
+      </p:sp>
+      <p:sp>
+        <p:nvSpPr>
+          <p:cNvPr id="7" name="DSPIRA 4"/>
+          <p:cNvSpPr>
+            <a:spLocks noGrp="1"/>
+          </p:cNvSpPr>
+          <p:nvPr/>
+        </p:nvSpPr>
+        <p:spPr>
+          <a:xfrm>
+            <a:off x="228600" y="7277100"/>
+            <a:ext cx="6667500" cy="228600"/>
+          </a:xfrm>
+          <a:prstGeom prst="rect">
+            <a:avLst/>
+          </a:prstGeom>
+          <a:noFill/>
+          <a:ln w="0">
+            <a:noFill/>
+          </a:ln>
+        </p:spPr>
+        <p:txBody>
+          <a:bodyPr>
+            <a:noAutofit/>
+          </a:bodyPr>
+          <a:lstStyle/>
+          <a:p>
+            <a:pPr>
+              <a:defRPr sz="900" b="0">
+                <a:solidFill>
+                  <a:srgbClr val="002855"/>
+                </a:solidFill>
+                <a:latin typeface="Arial"/>
+                <a:ea typeface="Arial"/>
+                <a:cs typeface="Arial"/>
+              </a:defRPr>
+            </a:pPr>
+            <a:r>
+              <a:rPr sz="900" b="0">
+                <a:solidFill>
+                  <a:srgbClr val="002855"/>
+                </a:solidFill>
+                <a:latin typeface="Arial"/>
+                <a:ea typeface="Arial"/>
+                <a:cs typeface="Arial"/>
+              </a:rPr>
+              <a:t>wvurail.org/dspira</a:t>
+            </a:r>
+          </a:p>
+        </p:txBody>
+      </p:sp>
+      <p:sp>
+        <p:nvSpPr>
+          <p:cNvPr id="8" name="DSPIRA 5"/>
+          <p:cNvSpPr>
+            <a:spLocks noGrp="1"/>
+          </p:cNvSpPr>
+          <p:nvPr/>
+        </p:nvSpPr>
+        <p:spPr>
+          <a:xfrm>
+            <a:off x="11191875" y="7277100"/>
+            <a:ext cx="762000" cy="228600"/>
+          </a:xfrm>
+          <a:prstGeom prst="rect">
+            <a:avLst/>
+          </a:prstGeom>
+          <a:noFill/>
+          <a:ln w="0">
+            <a:noFill/>
+          </a:ln>
+        </p:spPr>
+        <p:txBody>
+          <a:bodyPr>
+            <a:noAutofit/>
+          </a:bodyPr>
+          <a:lstStyle/>
+          <a:p>
+            <a:pPr>
+              <a:defRPr sz="900" b="0">
+                <a:solidFill>
+                  <a:srgbClr val="002855"/>
+                </a:solidFill>
+                <a:latin typeface="Arial"/>
+                <a:ea typeface="Arial"/>
+                <a:cs typeface="Arial"/>
+              </a:defRPr>
+            </a:pPr>
+            <a:r>
+              <a:rPr sz="900" b="0">
+                <a:solidFill>
+                  <a:srgbClr val="002855"/>
+                </a:solidFill>
+                <a:latin typeface="Arial"/>
+                <a:ea typeface="Arial"/>
+                <a:cs typeface="Arial"/>
+              </a:rPr>
+              <a:t>8 of 10</a:t>
+            </a:r>
           </a:p>
         </p:txBody>
       </p:sp>
@@ -10379,7 +11746,7 @@
         </p:nvSpPr>
         <p:spPr>
           <a:xfrm>
-            <a:off x="838200" y="365125"/>
+            <a:off x="838200" y="708025"/>
             <a:ext cx="10515600" cy="743239"/>
           </a:xfrm>
         </p:spPr>
@@ -10406,7 +11773,7 @@
         </p:nvSpPr>
         <p:spPr>
           <a:xfrm>
-            <a:off x="838200" y="1243716"/>
+            <a:off x="838200" y="1586616"/>
             <a:ext cx="6975764" cy="1750450"/>
           </a:xfrm>
         </p:spPr>
@@ -10417,25 +11784,25 @@
           <a:lstStyle/>
           <a:p>
             <a:r>
-              <a:rPr lang="en-US" sz="2600" dirty="0"/>
+              <a:rPr lang="en-US" sz="2080" dirty="0"/>
               <a:t>Correlate filter-bank data with a dispersed pulse.</a:t>
             </a:r>
           </a:p>
           <a:p>
             <a:r>
-              <a:rPr lang="en-US" sz="2600" dirty="0"/>
+              <a:rPr lang="en-US" sz="2080" dirty="0"/>
               <a:t>Vary pulse width and its shape.  Also vary DM value. </a:t>
             </a:r>
           </a:p>
           <a:p>
             <a:r>
-              <a:rPr lang="en-US" sz="2600" dirty="0"/>
+              <a:rPr lang="en-US" sz="2080" dirty="0"/>
               <a:t>Computationally it is very expensive.  </a:t>
             </a:r>
           </a:p>
           <a:p>
             <a:r>
-              <a:rPr lang="en-US" sz="2600" dirty="0"/>
+              <a:rPr lang="en-US" sz="2080" dirty="0"/>
               <a:t>PSNR can be used as detection criterion.</a:t>
             </a:r>
           </a:p>
@@ -10449,36 +11816,13 @@
       </p:sp>
       <p:sp>
         <p:nvSpPr>
-          <p:cNvPr id="4" name="Slide Number Placeholder 3"/>
-          <p:cNvSpPr>
-            <a:spLocks noGrp="1"/>
-          </p:cNvSpPr>
-          <p:nvPr>
-            <p:ph type="sldNum" sz="quarter" idx="12"/>
-          </p:nvPr>
-        </p:nvSpPr>
-        <p:spPr/>
-        <p:txBody>
-          <a:bodyPr/>
-          <a:lstStyle/>
-          <a:p>
-            <a:fld id="{EC5CD700-21AC-4AB9-ADAF-7B355889A718}" type="slidenum">
-              <a:rPr lang="en-US" smtClean="0"/>
-              <a:t>9</a:t>
-            </a:fld>
-            <a:endParaRPr lang="en-US" dirty="0"/>
-          </a:p>
-        </p:txBody>
-      </p:sp>
-      <p:sp>
-        <p:nvSpPr>
           <p:cNvPr id="6" name="TextBox 5"/>
           <p:cNvSpPr txBox="1"/>
           <p:nvPr/>
         </p:nvSpPr>
         <p:spPr>
           <a:xfrm>
-            <a:off x="2895589" y="4100952"/>
+            <a:off x="2895589" y="4443852"/>
             <a:ext cx="694421" cy="707886"/>
           </a:xfrm>
           <a:prstGeom prst="rect">
@@ -10493,7 +11837,7 @@
           <a:lstStyle/>
           <a:p>
             <a:r>
-              <a:rPr lang="en-US" sz="4000" dirty="0"/>
+              <a:rPr lang="en-US" sz="3200" dirty="0"/>
               <a:t>**</a:t>
             </a:r>
           </a:p>
@@ -10507,7 +11851,7 @@
         </p:nvSpPr>
         <p:spPr>
           <a:xfrm>
-            <a:off x="6470075" y="3920846"/>
+            <a:off x="6470075" y="4263746"/>
             <a:ext cx="439544" cy="707886"/>
           </a:xfrm>
           <a:prstGeom prst="rect">
@@ -10522,7 +11866,7 @@
           <a:lstStyle/>
           <a:p>
             <a:r>
-              <a:rPr lang="en-US" sz="4000" dirty="0"/>
+              <a:rPr lang="en-US" sz="3200" dirty="0"/>
               <a:t>=</a:t>
             </a:r>
           </a:p>
@@ -10536,7 +11880,7 @@
         </p:nvSpPr>
         <p:spPr>
           <a:xfrm>
-            <a:off x="2327563" y="3158835"/>
+            <a:off x="2327563" y="3501735"/>
             <a:ext cx="1936877" cy="461665"/>
           </a:xfrm>
           <a:prstGeom prst="rect">
@@ -10551,7 +11895,7 @@
           <a:lstStyle/>
           <a:p>
             <a:r>
-              <a:rPr lang="en-US" sz="2400" dirty="0"/>
+              <a:rPr lang="en-US" sz="1920" dirty="0"/>
               <a:t>2d correlation</a:t>
             </a:r>
           </a:p>
@@ -10565,7 +11909,7 @@
         </p:nvSpPr>
         <p:spPr>
           <a:xfrm>
-            <a:off x="623460" y="5237010"/>
+            <a:off x="623460" y="5579910"/>
             <a:ext cx="1972015" cy="461665"/>
           </a:xfrm>
           <a:prstGeom prst="rect">
@@ -10580,7 +11924,7 @@
           <a:lstStyle/>
           <a:p>
             <a:r>
-              <a:rPr lang="en-US" sz="2400" dirty="0"/>
+              <a:rPr lang="en-US" sz="1920" dirty="0"/>
               <a:t>a spectrogram</a:t>
             </a:r>
           </a:p>
@@ -10594,7 +11938,7 @@
         </p:nvSpPr>
         <p:spPr>
           <a:xfrm>
-            <a:off x="3463621" y="5223168"/>
+            <a:off x="3463621" y="5566068"/>
             <a:ext cx="3477619" cy="461665"/>
           </a:xfrm>
           <a:prstGeom prst="rect">
@@ -10609,7 +11953,7 @@
           <a:lstStyle/>
           <a:p>
             <a:r>
-              <a:rPr lang="en-US" sz="2400" dirty="0"/>
+              <a:rPr lang="en-US" sz="1920" dirty="0"/>
               <a:t>response of matched filter</a:t>
             </a:r>
           </a:p>
@@ -10623,7 +11967,7 @@
         </p:nvSpPr>
         <p:spPr>
           <a:xfrm>
-            <a:off x="8021772" y="2258288"/>
+            <a:off x="8021772" y="2601188"/>
             <a:ext cx="2664640" cy="461665"/>
           </a:xfrm>
           <a:prstGeom prst="rect">
@@ -10638,7 +11982,7 @@
           <a:lstStyle/>
           <a:p>
             <a:r>
-              <a:rPr lang="en-US" sz="2400" dirty="0"/>
+              <a:rPr lang="en-US" sz="1920" dirty="0"/>
               <a:t>correlation function</a:t>
             </a:r>
           </a:p>
@@ -10666,7 +12010,7 @@
         </p:blipFill>
         <p:spPr>
           <a:xfrm>
-            <a:off x="346364" y="3629165"/>
+            <a:off x="346364" y="3972065"/>
             <a:ext cx="2234150" cy="1675613"/>
           </a:xfrm>
           <a:prstGeom prst="rect">
@@ -10696,7 +12040,7 @@
         </p:blipFill>
         <p:spPr>
           <a:xfrm>
-            <a:off x="3759324" y="3632723"/>
+            <a:off x="3759324" y="3975623"/>
             <a:ext cx="2237781" cy="1678335"/>
           </a:xfrm>
           <a:prstGeom prst="rect">
@@ -10726,7 +12070,7 @@
         </p:blipFill>
         <p:spPr>
           <a:xfrm>
-            <a:off x="6968606" y="2795481"/>
+            <a:off x="6968606" y="3138381"/>
             <a:ext cx="4967096" cy="2958616"/>
           </a:xfrm>
           <a:prstGeom prst="rect">
@@ -10756,7 +12100,7 @@
         </p:blipFill>
         <p:spPr>
           <a:xfrm>
-            <a:off x="3759334" y="3632716"/>
+            <a:off x="3759334" y="3975616"/>
             <a:ext cx="2249897" cy="1687423"/>
           </a:xfrm>
           <a:prstGeom prst="rect">
@@ -10786,7 +12130,7 @@
         </p:blipFill>
         <p:spPr>
           <a:xfrm>
-            <a:off x="6962827" y="2793912"/>
+            <a:off x="6962827" y="3136812"/>
             <a:ext cx="4980640" cy="2966683"/>
           </a:xfrm>
           <a:prstGeom prst="rect">
@@ -10794,6 +12138,207 @@
           </a:prstGeom>
         </p:spPr>
       </p:pic>
+      <p:sp>
+        <p:nvSpPr>
+          <p:cNvPr id="21" name="DSPIRA 1"/>
+          <p:cNvSpPr>
+            <a:spLocks noGrp="1"/>
+          </p:cNvSpPr>
+          <p:nvPr/>
+        </p:nvSpPr>
+        <p:spPr>
+          <a:xfrm>
+            <a:off x="0" y="0"/>
+            <a:ext cx="12192000" cy="342900"/>
+          </a:xfrm>
+          <a:prstGeom prst="rect">
+            <a:avLst/>
+          </a:prstGeom>
+          <a:solidFill>
+            <a:srgbClr val="FFFFFF"/>
+          </a:solidFill>
+          <a:ln w="0">
+            <a:noFill/>
+          </a:ln>
+        </p:spPr>
+      </p:sp>
+      <p:sp>
+        <p:nvSpPr>
+          <p:cNvPr id="22" name="DSPIRA 2"/>
+          <p:cNvSpPr>
+            <a:spLocks noGrp="1"/>
+          </p:cNvSpPr>
+          <p:nvPr/>
+        </p:nvSpPr>
+        <p:spPr>
+          <a:xfrm>
+            <a:off x="0" y="7200900"/>
+            <a:ext cx="12192000" cy="342900"/>
+          </a:xfrm>
+          <a:prstGeom prst="rect">
+            <a:avLst/>
+          </a:prstGeom>
+          <a:solidFill>
+            <a:srgbClr val="FFFFFF"/>
+          </a:solidFill>
+          <a:ln w="0">
+            <a:noFill/>
+          </a:ln>
+        </p:spPr>
+      </p:sp>
+      <p:sp>
+        <p:nvSpPr>
+          <p:cNvPr id="23" name="DSPIRA 3"/>
+          <p:cNvSpPr>
+            <a:spLocks noGrp="1"/>
+          </p:cNvSpPr>
+          <p:nvPr/>
+        </p:nvSpPr>
+        <p:spPr>
+          <a:xfrm>
+            <a:off x="228600" y="76200"/>
+            <a:ext cx="4762500" cy="228600"/>
+          </a:xfrm>
+          <a:prstGeom prst="rect">
+            <a:avLst/>
+          </a:prstGeom>
+          <a:noFill/>
+          <a:ln w="0">
+            <a:noFill/>
+          </a:ln>
+        </p:spPr>
+        <p:txBody>
+          <a:bodyPr>
+            <a:noAutofit/>
+          </a:bodyPr>
+          <a:lstStyle/>
+          <a:p>
+            <a:pPr>
+              <a:defRPr sz="1200" b="1">
+                <a:solidFill>
+                  <a:srgbClr val="002855"/>
+                </a:solidFill>
+                <a:latin typeface="Arial"/>
+                <a:ea typeface="Arial"/>
+                <a:cs typeface="Arial"/>
+              </a:defRPr>
+            </a:pPr>
+            <a:r>
+              <a:rPr sz="1200" b="1">
+                <a:solidFill>
+                  <a:srgbClr val="002855"/>
+                </a:solidFill>
+                <a:latin typeface="Arial"/>
+                <a:ea typeface="Arial"/>
+                <a:cs typeface="Arial"/>
+              </a:rPr>
+              <a:t>WVU DSPIRA</a:t>
+            </a:r>
+          </a:p>
+        </p:txBody>
+      </p:sp>
+      <p:sp>
+        <p:nvSpPr>
+          <p:cNvPr id="24" name="DSPIRA 4"/>
+          <p:cNvSpPr>
+            <a:spLocks noGrp="1"/>
+          </p:cNvSpPr>
+          <p:nvPr/>
+        </p:nvSpPr>
+        <p:spPr>
+          <a:xfrm>
+            <a:off x="228600" y="7277100"/>
+            <a:ext cx="6667500" cy="228600"/>
+          </a:xfrm>
+          <a:prstGeom prst="rect">
+            <a:avLst/>
+          </a:prstGeom>
+          <a:noFill/>
+          <a:ln w="0">
+            <a:noFill/>
+          </a:ln>
+        </p:spPr>
+        <p:txBody>
+          <a:bodyPr>
+            <a:noAutofit/>
+          </a:bodyPr>
+          <a:lstStyle/>
+          <a:p>
+            <a:pPr>
+              <a:defRPr sz="900" b="0">
+                <a:solidFill>
+                  <a:srgbClr val="002855"/>
+                </a:solidFill>
+                <a:latin typeface="Arial"/>
+                <a:ea typeface="Arial"/>
+                <a:cs typeface="Arial"/>
+              </a:defRPr>
+            </a:pPr>
+            <a:r>
+              <a:rPr sz="900" b="0">
+                <a:solidFill>
+                  <a:srgbClr val="002855"/>
+                </a:solidFill>
+                <a:latin typeface="Arial"/>
+                <a:ea typeface="Arial"/>
+                <a:cs typeface="Arial"/>
+              </a:rPr>
+              <a:t>wvurail.org/dspira</a:t>
+            </a:r>
+          </a:p>
+        </p:txBody>
+      </p:sp>
+      <p:sp>
+        <p:nvSpPr>
+          <p:cNvPr id="25" name="DSPIRA 5"/>
+          <p:cNvSpPr>
+            <a:spLocks noGrp="1"/>
+          </p:cNvSpPr>
+          <p:nvPr/>
+        </p:nvSpPr>
+        <p:spPr>
+          <a:xfrm>
+            <a:off x="11191875" y="7277100"/>
+            <a:ext cx="762000" cy="228600"/>
+          </a:xfrm>
+          <a:prstGeom prst="rect">
+            <a:avLst/>
+          </a:prstGeom>
+          <a:noFill/>
+          <a:ln w="0">
+            <a:noFill/>
+          </a:ln>
+        </p:spPr>
+        <p:txBody>
+          <a:bodyPr>
+            <a:noAutofit/>
+          </a:bodyPr>
+          <a:lstStyle/>
+          <a:p>
+            <a:pPr>
+              <a:defRPr sz="900" b="0">
+                <a:solidFill>
+                  <a:srgbClr val="002855"/>
+                </a:solidFill>
+                <a:latin typeface="Arial"/>
+                <a:ea typeface="Arial"/>
+                <a:cs typeface="Arial"/>
+              </a:defRPr>
+            </a:pPr>
+            <a:r>
+              <a:rPr sz="900" b="0">
+                <a:solidFill>
+                  <a:srgbClr val="002855"/>
+                </a:solidFill>
+                <a:latin typeface="Arial"/>
+                <a:ea typeface="Arial"/>
+                <a:cs typeface="Arial"/>
+              </a:rPr>
+              <a:t>9 of 10</a:t>
+            </a:r>
+          </a:p>
+        </p:txBody>
+      </p:sp>
     </p:spTree>
     <p:extLst>
       <p:ext uri="{BB962C8B-B14F-4D97-AF65-F5344CB8AC3E}">
@@ -11065,7 +12610,7 @@
     </a:clrScheme>
     <a:fontScheme name="Office">
       <a:majorFont>
-        <a:latin typeface="Calibri Light" panose="020F0302020204030204"/>
+        <a:latin typeface="Arial" panose="020F0302020204030204"/>
         <a:ea typeface=""/>
         <a:cs typeface=""/>
         <a:font script="Jpan" typeface="游ゴシック Light"/>
@@ -11117,7 +12662,7 @@
         <a:font script="Tfng" typeface="Ebrima"/>
       </a:majorFont>
       <a:minorFont>
-        <a:latin typeface="Calibri" panose="020F0502020204030204"/>
+        <a:latin typeface="Arial" panose="020F0502020204030204"/>
         <a:ea typeface=""/>
         <a:cs typeface=""/>
         <a:font script="Jpan" typeface="游ゴシック"/>
@@ -11360,7 +12905,7 @@
     </a:clrScheme>
     <a:fontScheme name="Office">
       <a:majorFont>
-        <a:latin typeface="Calibri Light" panose="020F0302020204030204"/>
+        <a:latin typeface="Arial" panose="020F0302020204030204"/>
         <a:ea typeface=""/>
         <a:cs typeface=""/>
         <a:font script="Jpan" typeface="游ゴシック Light"/>
@@ -11412,7 +12957,7 @@
         <a:font script="Tfng" typeface="Ebrima"/>
       </a:majorFont>
       <a:minorFont>
-        <a:latin typeface="Calibri" panose="020F0502020204030204"/>
+        <a:latin typeface="Arial" panose="020F0502020204030204"/>
         <a:ea typeface=""/>
         <a:cs typeface=""/>
         <a:font script="Jpan" typeface="游ゴシック"/>
@@ -11610,183 +13155,4 @@
     </a:ext>
   </a:extLst>
 </a:theme>
-</file>
-
-<file path=customXml/item1.xml><?xml version="1.0" encoding="utf-8"?>
-<ct:contentTypeSchema xmlns:ct="http://schemas.microsoft.com/office/2006/metadata/contentType" xmlns:ma="http://schemas.microsoft.com/office/2006/metadata/properties/metaAttributes" ct:_="" ma:_="" ma:contentTypeName="Document" ma:contentTypeID="0x01010016C36F108F9F92488C988DDF36346911" ma:contentTypeVersion="5" ma:contentTypeDescription="Create a new document." ma:contentTypeScope="" ma:versionID="c417924321fef32731141cd966ef6f94">
-  <xsd:schema xmlns:xsd="http://www.w3.org/2001/XMLSchema" xmlns:xs="http://www.w3.org/2001/XMLSchema" xmlns:p="http://schemas.microsoft.com/office/2006/metadata/properties" xmlns:ns2="1bb24863-89de-455f-aabf-4424925aa312" targetNamespace="http://schemas.microsoft.com/office/2006/metadata/properties" ma:root="true" ma:fieldsID="a7d3b2212d350eb904df17fc79fef4f4" ns2:_="">
-    <xsd:import namespace="1bb24863-89de-455f-aabf-4424925aa312"/>
-    <xsd:element name="properties">
-      <xsd:complexType>
-        <xsd:sequence>
-          <xsd:element name="documentManagement">
-            <xsd:complexType>
-              <xsd:all>
-                <xsd:element ref="ns2:MediaServiceMetadata" minOccurs="0"/>
-                <xsd:element ref="ns2:MediaServiceFastMetadata" minOccurs="0"/>
-                <xsd:element ref="ns2:MediaServiceAutoTags" minOccurs="0"/>
-                <xsd:element ref="ns2:MediaServiceOCR" minOccurs="0"/>
-                <xsd:element ref="ns2:MediaServiceDateTaken" minOccurs="0"/>
-              </xsd:all>
-            </xsd:complexType>
-          </xsd:element>
-        </xsd:sequence>
-      </xsd:complexType>
-    </xsd:element>
-  </xsd:schema>
-  <xsd:schema xmlns:xsd="http://www.w3.org/2001/XMLSchema" xmlns:xs="http://www.w3.org/2001/XMLSchema" xmlns:dms="http://schemas.microsoft.com/office/2006/documentManagement/types" xmlns:pc="http://schemas.microsoft.com/office/infopath/2007/PartnerControls" targetNamespace="1bb24863-89de-455f-aabf-4424925aa312" elementFormDefault="qualified">
-    <xsd:import namespace="http://schemas.microsoft.com/office/2006/documentManagement/types"/>
-    <xsd:import namespace="http://schemas.microsoft.com/office/infopath/2007/PartnerControls"/>
-    <xsd:element name="MediaServiceMetadata" ma:index="8" nillable="true" ma:displayName="MediaServiceMetadata" ma:hidden="true" ma:internalName="MediaServiceMetadata" ma:readOnly="true">
-      <xsd:simpleType>
-        <xsd:restriction base="dms:Note"/>
-      </xsd:simpleType>
-    </xsd:element>
-    <xsd:element name="MediaServiceFastMetadata" ma:index="9" nillable="true" ma:displayName="MediaServiceFastMetadata" ma:hidden="true" ma:internalName="MediaServiceFastMetadata" ma:readOnly="true">
-      <xsd:simpleType>
-        <xsd:restriction base="dms:Note"/>
-      </xsd:simpleType>
-    </xsd:element>
-    <xsd:element name="MediaServiceAutoTags" ma:index="10" nillable="true" ma:displayName="MediaServiceAutoTags" ma:internalName="MediaServiceAutoTags" ma:readOnly="true">
-      <xsd:simpleType>
-        <xsd:restriction base="dms:Text"/>
-      </xsd:simpleType>
-    </xsd:element>
-    <xsd:element name="MediaServiceOCR" ma:index="11" nillable="true" ma:displayName="MediaServiceOCR" ma:internalName="MediaServiceOCR" ma:readOnly="true">
-      <xsd:simpleType>
-        <xsd:restriction base="dms:Note">
-          <xsd:maxLength value="255"/>
-        </xsd:restriction>
-      </xsd:simpleType>
-    </xsd:element>
-    <xsd:element name="MediaServiceDateTaken" ma:index="12" nillable="true" ma:displayName="MediaServiceDateTaken" ma:hidden="true" ma:internalName="MediaServiceDateTaken" ma:readOnly="true">
-      <xsd:simpleType>
-        <xsd:restriction base="dms:Text"/>
-      </xsd:simpleType>
-    </xsd:element>
-  </xsd:schema>
-  <xsd:schema xmlns="http://schemas.openxmlformats.org/package/2006/metadata/core-properties" xmlns:xsd="http://www.w3.org/2001/XMLSchema" xmlns:xsi="http://www.w3.org/2001/XMLSchema-instance" xmlns:dc="http://purl.org/dc/elements/1.1/" xmlns:dcterms="http://purl.org/dc/terms/" xmlns:odoc="http://schemas.microsoft.com/internal/obd" targetNamespace="http://schemas.openxmlformats.org/package/2006/metadata/core-properties" elementFormDefault="qualified" attributeFormDefault="unqualified" blockDefault="#all">
-    <xsd:import namespace="http://purl.org/dc/elements/1.1/" schemaLocation="http://dublincore.org/schemas/xmls/qdc/2003/04/02/dc.xsd"/>
-    <xsd:import namespace="http://purl.org/dc/terms/" schemaLocation="http://dublincore.org/schemas/xmls/qdc/2003/04/02/dcterms.xsd"/>
-    <xsd:element name="coreProperties" type="CT_coreProperties"/>
-    <xsd:complexType name="CT_coreProperties">
-      <xsd:all>
-        <xsd:element ref="dc:creator" minOccurs="0" maxOccurs="1"/>
-        <xsd:element ref="dcterms:created" minOccurs="0" maxOccurs="1"/>
-        <xsd:element ref="dc:identifier" minOccurs="0" maxOccurs="1"/>
-        <xsd:element name="contentType" minOccurs="0" maxOccurs="1" type="xsd:string" ma:index="0" ma:displayName="Content Type"/>
-        <xsd:element ref="dc:title" minOccurs="0" maxOccurs="1" ma:index="4" ma:displayName="Title"/>
-        <xsd:element ref="dc:subject" minOccurs="0" maxOccurs="1"/>
-        <xsd:element ref="dc:description" minOccurs="0" maxOccurs="1"/>
-        <xsd:element name="keywords" minOccurs="0" maxOccurs="1" type="xsd:string"/>
-        <xsd:element ref="dc:language" minOccurs="0" maxOccurs="1"/>
-        <xsd:element name="category" minOccurs="0" maxOccurs="1" type="xsd:string"/>
-        <xsd:element name="version" minOccurs="0" maxOccurs="1" type="xsd:string"/>
-        <xsd:element name="revision" minOccurs="0" maxOccurs="1" type="xsd:string">
-          <xsd:annotation>
-            <xsd:documentation>
-                        This value indicates the number of saves or revisions. The application is responsible for updating this value after each revision.
-                    </xsd:documentation>
-          </xsd:annotation>
-        </xsd:element>
-        <xsd:element name="lastModifiedBy" minOccurs="0" maxOccurs="1" type="xsd:string"/>
-        <xsd:element ref="dcterms:modified" minOccurs="0" maxOccurs="1"/>
-        <xsd:element name="contentStatus" minOccurs="0" maxOccurs="1" type="xsd:string"/>
-      </xsd:all>
-    </xsd:complexType>
-  </xsd:schema>
-  <xs:schema xmlns:pc="http://schemas.microsoft.com/office/infopath/2007/PartnerControls" xmlns:xs="http://www.w3.org/2001/XMLSchema" targetNamespace="http://schemas.microsoft.com/office/infopath/2007/PartnerControls" elementFormDefault="qualified" attributeFormDefault="unqualified">
-    <xs:element name="Person">
-      <xs:complexType>
-        <xs:sequence>
-          <xs:element ref="pc:DisplayName" minOccurs="0"/>
-          <xs:element ref="pc:AccountId" minOccurs="0"/>
-          <xs:element ref="pc:AccountType" minOccurs="0"/>
-        </xs:sequence>
-      </xs:complexType>
-    </xs:element>
-    <xs:element name="DisplayName" type="xs:string"/>
-    <xs:element name="AccountId" type="xs:string"/>
-    <xs:element name="AccountType" type="xs:string"/>
-    <xs:element name="BDCAssociatedEntity">
-      <xs:complexType>
-        <xs:sequence>
-          <xs:element ref="pc:BDCEntity" minOccurs="0" maxOccurs="unbounded"/>
-        </xs:sequence>
-        <xs:attribute ref="pc:EntityNamespace"/>
-        <xs:attribute ref="pc:EntityName"/>
-        <xs:attribute ref="pc:SystemInstanceName"/>
-        <xs:attribute ref="pc:AssociationName"/>
-      </xs:complexType>
-    </xs:element>
-    <xs:attribute name="EntityNamespace" type="xs:string"/>
-    <xs:attribute name="EntityName" type="xs:string"/>
-    <xs:attribute name="SystemInstanceName" type="xs:string"/>
-    <xs:attribute name="AssociationName" type="xs:string"/>
-    <xs:element name="BDCEntity">
-      <xs:complexType>
-        <xs:sequence>
-          <xs:element ref="pc:EntityDisplayName" minOccurs="0"/>
-          <xs:element ref="pc:EntityInstanceReference" minOccurs="0"/>
-          <xs:element ref="pc:EntityId1" minOccurs="0"/>
-          <xs:element ref="pc:EntityId2" minOccurs="0"/>
-          <xs:element ref="pc:EntityId3" minOccurs="0"/>
-          <xs:element ref="pc:EntityId4" minOccurs="0"/>
-          <xs:element ref="pc:EntityId5" minOccurs="0"/>
-        </xs:sequence>
-      </xs:complexType>
-    </xs:element>
-    <xs:element name="EntityDisplayName" type="xs:string"/>
-    <xs:element name="EntityInstanceReference" type="xs:string"/>
-    <xs:element name="EntityId1" type="xs:string"/>
-    <xs:element name="EntityId2" type="xs:string"/>
-    <xs:element name="EntityId3" type="xs:string"/>
-    <xs:element name="EntityId4" type="xs:string"/>
-    <xs:element name="EntityId5" type="xs:string"/>
-    <xs:element name="Terms">
-      <xs:complexType>
-        <xs:sequence>
-          <xs:element ref="pc:TermInfo" minOccurs="0" maxOccurs="unbounded"/>
-        </xs:sequence>
-      </xs:complexType>
-    </xs:element>
-    <xs:element name="TermInfo">
-      <xs:complexType>
-        <xs:sequence>
-          <xs:element ref="pc:TermName" minOccurs="0"/>
-          <xs:element ref="pc:TermId" minOccurs="0"/>
-        </xs:sequence>
-      </xs:complexType>
-    </xs:element>
-    <xs:element name="TermName" type="xs:string"/>
-    <xs:element name="TermId" type="xs:string"/>
-  </xs:schema>
-</ct:contentTypeSchema>
-</file>
-
-<file path=customXml/item2.xml><?xml version="1.0" encoding="utf-8"?>
-<?mso-contentType ?>
-<FormTemplates xmlns="http://schemas.microsoft.com/sharepoint/v3/contenttype/forms">
-  <Display>DocumentLibraryForm</Display>
-  <Edit>DocumentLibraryForm</Edit>
-  <New>DocumentLibraryForm</New>
-</FormTemplates>
-</file>
-
-<file path=customXml/item3.xml><?xml version="1.0" encoding="utf-8"?>
-<p:properties xmlns:p="http://schemas.microsoft.com/office/2006/metadata/properties" xmlns:xsi="http://www.w3.org/2001/XMLSchema-instance" xmlns:pc="http://schemas.microsoft.com/office/infopath/2007/PartnerControls">
-  <documentManagement/>
-</p:properties>
-</file>
-
-<file path=customXml/itemProps1.xml><?xml version="1.0" encoding="utf-8"?>
-<ds:datastoreItem xmlns:ds="http://schemas.openxmlformats.org/officeDocument/2006/customXml" ds:itemID="{B8E7755C-1895-46E5-A40F-F24D3B32E1D8}"/>
-</file>
-
-<file path=customXml/itemProps2.xml><?xml version="1.0" encoding="utf-8"?>
-<ds:datastoreItem xmlns:ds="http://schemas.openxmlformats.org/officeDocument/2006/customXml" ds:itemID="{E0F840A3-BDB6-4416-AA30-A85F865FB74D}"/>
-</file>
-
-<file path=customXml/itemProps3.xml><?xml version="1.0" encoding="utf-8"?>
-<ds:datastoreItem xmlns:ds="http://schemas.openxmlformats.org/officeDocument/2006/customXml" ds:itemID="{865623FC-D581-47FE-9CAC-3BA026FBA1AF}"/>
 </file>
--- a/assets/lessons/lectures/digital-signal-processing/fourier-transform-2018.pptx
+++ b/assets/lessons/lectures/digital-signal-processing/fourier-transform-2018.pptx
@@ -4997,7 +4997,7 @@
       </mc:AlternateContent>
       <p:sp>
         <p:nvSpPr>
-          <p:cNvPr id="14" name="DSPIRA 1"/>
+          <p:cNvPr id="15" name="DSPIRA 2"/>
           <p:cNvSpPr>
             <a:spLocks noGrp="1"/>
           </p:cNvSpPr>
@@ -5005,7 +5005,7 @@
         </p:nvSpPr>
         <p:spPr>
           <a:xfrm>
-            <a:off x="0" y="0"/>
+            <a:off x="0" y="7200900"/>
             <a:ext cx="12192000" cy="342900"/>
           </a:xfrm>
           <a:prstGeom prst="rect">
@@ -5018,81 +5018,6 @@
             <a:noFill/>
           </a:ln>
         </p:spPr>
-      </p:sp>
-      <p:sp>
-        <p:nvSpPr>
-          <p:cNvPr id="15" name="DSPIRA 2"/>
-          <p:cNvSpPr>
-            <a:spLocks noGrp="1"/>
-          </p:cNvSpPr>
-          <p:nvPr/>
-        </p:nvSpPr>
-        <p:spPr>
-          <a:xfrm>
-            <a:off x="0" y="7200900"/>
-            <a:ext cx="12192000" cy="342900"/>
-          </a:xfrm>
-          <a:prstGeom prst="rect">
-            <a:avLst/>
-          </a:prstGeom>
-          <a:solidFill>
-            <a:srgbClr val="FFFFFF"/>
-          </a:solidFill>
-          <a:ln w="0">
-            <a:noFill/>
-          </a:ln>
-        </p:spPr>
-      </p:sp>
-      <p:sp>
-        <p:nvSpPr>
-          <p:cNvPr id="16" name="DSPIRA 3"/>
-          <p:cNvSpPr>
-            <a:spLocks noGrp="1"/>
-          </p:cNvSpPr>
-          <p:nvPr/>
-        </p:nvSpPr>
-        <p:spPr>
-          <a:xfrm>
-            <a:off x="228600" y="76200"/>
-            <a:ext cx="4762500" cy="228600"/>
-          </a:xfrm>
-          <a:prstGeom prst="rect">
-            <a:avLst/>
-          </a:prstGeom>
-          <a:noFill/>
-          <a:ln w="0">
-            <a:noFill/>
-          </a:ln>
-        </p:spPr>
-        <p:txBody>
-          <a:bodyPr>
-            <a:noAutofit/>
-          </a:bodyPr>
-          <a:lstStyle/>
-          <a:p>
-            <a:pPr>
-              <a:defRPr sz="1200" b="1">
-                <a:solidFill>
-                  <a:srgbClr val="002855"/>
-                </a:solidFill>
-                <a:latin typeface="Arial"/>
-                <a:ea typeface="Arial"/>
-                <a:cs typeface="Arial"/>
-              </a:defRPr>
-            </a:pPr>
-            <a:r>
-              <a:rPr sz="1200" b="1">
-                <a:solidFill>
-                  <a:srgbClr val="002855"/>
-                </a:solidFill>
-                <a:latin typeface="Arial"/>
-                <a:ea typeface="Arial"/>
-                <a:cs typeface="Arial"/>
-              </a:rPr>
-              <a:t>WVU DSPIRA</a:t>
-            </a:r>
-          </a:p>
-        </p:txBody>
       </p:sp>
       <p:sp>
         <p:nvSpPr>
@@ -5192,6 +5117,156 @@
                 <a:cs typeface="Arial"/>
               </a:rPr>
               <a:t>1 of 10</a:t>
+            </a:r>
+          </a:p>
+        </p:txBody>
+      </p:sp>
+      <p:sp>
+        <p:nvSpPr>
+          <p:cNvPr id="19" name="WVU DSPIRA navy band"/>
+          <p:cNvSpPr>
+            <a:spLocks noGrp="1"/>
+          </p:cNvSpPr>
+          <p:nvPr/>
+        </p:nvSpPr>
+        <p:spPr>
+          <a:xfrm>
+            <a:off x="0" y="0"/>
+            <a:ext cx="12192000" cy="323850"/>
+          </a:xfrm>
+          <a:prstGeom prst="rect">
+            <a:avLst/>
+          </a:prstGeom>
+          <a:solidFill>
+            <a:srgbClr val="002855"/>
+          </a:solidFill>
+          <a:ln w="0">
+            <a:noFill/>
+          </a:ln>
+        </p:spPr>
+      </p:sp>
+      <p:sp>
+        <p:nvSpPr>
+          <p:cNvPr id="20" name="WVU DSPIRA gold rule"/>
+          <p:cNvSpPr>
+            <a:spLocks noGrp="1"/>
+          </p:cNvSpPr>
+          <p:nvPr/>
+        </p:nvSpPr>
+        <p:spPr>
+          <a:xfrm>
+            <a:off x="0" y="323850"/>
+            <a:ext cx="12192000" cy="19050"/>
+          </a:xfrm>
+          <a:prstGeom prst="rect">
+            <a:avLst/>
+          </a:prstGeom>
+          <a:solidFill>
+            <a:srgbClr val="EEAA00"/>
+          </a:solidFill>
+          <a:ln w="0">
+            <a:noFill/>
+          </a:ln>
+        </p:spPr>
+      </p:sp>
+      <p:sp>
+        <p:nvSpPr>
+          <p:cNvPr id="21" name="WVU DSPIRA name"/>
+          <p:cNvSpPr>
+            <a:spLocks noGrp="1"/>
+          </p:cNvSpPr>
+          <p:nvPr/>
+        </p:nvSpPr>
+        <p:spPr>
+          <a:xfrm>
+            <a:off x="228600" y="19050"/>
+            <a:ext cx="2857500" cy="257175"/>
+          </a:xfrm>
+          <a:prstGeom prst="rect">
+            <a:avLst/>
+          </a:prstGeom>
+          <a:noFill/>
+          <a:ln w="0">
+            <a:noFill/>
+          </a:ln>
+        </p:spPr>
+        <p:txBody>
+          <a:bodyPr>
+            <a:noAutofit/>
+          </a:bodyPr>
+          <a:lstStyle/>
+          <a:p>
+            <a:pPr>
+              <a:defRPr sz="1600" b="1">
+                <a:solidFill>
+                  <a:srgbClr val="FFFFFF"/>
+                </a:solidFill>
+                <a:latin typeface="Arial"/>
+                <a:ea typeface="Arial"/>
+                <a:cs typeface="Arial"/>
+              </a:defRPr>
+            </a:pPr>
+            <a:r>
+              <a:rPr sz="1600" b="1">
+                <a:solidFill>
+                  <a:srgbClr val="FFFFFF"/>
+                </a:solidFill>
+                <a:latin typeface="Arial"/>
+                <a:ea typeface="Arial"/>
+                <a:cs typeface="Arial"/>
+              </a:rPr>
+              <a:t>WVU DSPIRA</a:t>
+            </a:r>
+          </a:p>
+        </p:txBody>
+      </p:sp>
+      <p:sp>
+        <p:nvSpPr>
+          <p:cNvPr id="22" name="WVU DSPIRA university"/>
+          <p:cNvSpPr>
+            <a:spLocks noGrp="1"/>
+          </p:cNvSpPr>
+          <p:nvPr/>
+        </p:nvSpPr>
+        <p:spPr>
+          <a:xfrm>
+            <a:off x="9334500" y="114300"/>
+            <a:ext cx="2628900" cy="171450"/>
+          </a:xfrm>
+          <a:prstGeom prst="rect">
+            <a:avLst/>
+          </a:prstGeom>
+          <a:noFill/>
+          <a:ln w="0">
+            <a:noFill/>
+          </a:ln>
+        </p:spPr>
+        <p:txBody>
+          <a:bodyPr>
+            <a:noAutofit/>
+          </a:bodyPr>
+          <a:lstStyle/>
+          <a:p>
+            <a:pPr algn="r">
+              <a:defRPr sz="900">
+                <a:solidFill>
+                  <a:srgbClr val="FFFFFF"/>
+                </a:solidFill>
+                <a:latin typeface="Arial"/>
+                <a:ea typeface="Arial"/>
+                <a:cs typeface="Arial"/>
+              </a:defRPr>
+            </a:pPr>
+            <a:r>
+              <a:rPr sz="900">
+                <a:solidFill>
+                  <a:srgbClr val="FFFFFF"/>
+                </a:solidFill>
+                <a:latin typeface="Arial"/>
+                <a:ea typeface="Arial"/>
+                <a:cs typeface="Arial"/>
+              </a:rPr>
+              <a:t>WEST VIRGINIA UNIVERSITY</a:t>
             </a:r>
           </a:p>
         </p:txBody>
@@ -5869,7 +5944,7 @@
       </p:sp>
       <p:sp>
         <p:nvSpPr>
-          <p:cNvPr id="35" name="DSPIRA 1"/>
+          <p:cNvPr id="36" name="DSPIRA 2"/>
           <p:cNvSpPr>
             <a:spLocks noGrp="1"/>
           </p:cNvSpPr>
@@ -5877,7 +5952,7 @@
         </p:nvSpPr>
         <p:spPr>
           <a:xfrm>
-            <a:off x="0" y="0"/>
+            <a:off x="0" y="7200900"/>
             <a:ext cx="12192000" cy="342900"/>
           </a:xfrm>
           <a:prstGeom prst="rect">
@@ -5890,81 +5965,6 @@
             <a:noFill/>
           </a:ln>
         </p:spPr>
-      </p:sp>
-      <p:sp>
-        <p:nvSpPr>
-          <p:cNvPr id="36" name="DSPIRA 2"/>
-          <p:cNvSpPr>
-            <a:spLocks noGrp="1"/>
-          </p:cNvSpPr>
-          <p:nvPr/>
-        </p:nvSpPr>
-        <p:spPr>
-          <a:xfrm>
-            <a:off x="0" y="7200900"/>
-            <a:ext cx="12192000" cy="342900"/>
-          </a:xfrm>
-          <a:prstGeom prst="rect">
-            <a:avLst/>
-          </a:prstGeom>
-          <a:solidFill>
-            <a:srgbClr val="FFFFFF"/>
-          </a:solidFill>
-          <a:ln w="0">
-            <a:noFill/>
-          </a:ln>
-        </p:spPr>
-      </p:sp>
-      <p:sp>
-        <p:nvSpPr>
-          <p:cNvPr id="37" name="DSPIRA 3"/>
-          <p:cNvSpPr>
-            <a:spLocks noGrp="1"/>
-          </p:cNvSpPr>
-          <p:nvPr/>
-        </p:nvSpPr>
-        <p:spPr>
-          <a:xfrm>
-            <a:off x="228600" y="76200"/>
-            <a:ext cx="4762500" cy="228600"/>
-          </a:xfrm>
-          <a:prstGeom prst="rect">
-            <a:avLst/>
-          </a:prstGeom>
-          <a:noFill/>
-          <a:ln w="0">
-            <a:noFill/>
-          </a:ln>
-        </p:spPr>
-        <p:txBody>
-          <a:bodyPr>
-            <a:noAutofit/>
-          </a:bodyPr>
-          <a:lstStyle/>
-          <a:p>
-            <a:pPr>
-              <a:defRPr sz="1200" b="1">
-                <a:solidFill>
-                  <a:srgbClr val="002855"/>
-                </a:solidFill>
-                <a:latin typeface="Arial"/>
-                <a:ea typeface="Arial"/>
-                <a:cs typeface="Arial"/>
-              </a:defRPr>
-            </a:pPr>
-            <a:r>
-              <a:rPr sz="1200" b="1">
-                <a:solidFill>
-                  <a:srgbClr val="002855"/>
-                </a:solidFill>
-                <a:latin typeface="Arial"/>
-                <a:ea typeface="Arial"/>
-                <a:cs typeface="Arial"/>
-              </a:rPr>
-              <a:t>WVU DSPIRA</a:t>
-            </a:r>
-          </a:p>
-        </p:txBody>
       </p:sp>
       <p:sp>
         <p:nvSpPr>
@@ -6064,6 +6064,156 @@
                 <a:cs typeface="Arial"/>
               </a:rPr>
               <a:t>10 of 10</a:t>
+            </a:r>
+          </a:p>
+        </p:txBody>
+      </p:sp>
+      <p:sp>
+        <p:nvSpPr>
+          <p:cNvPr id="40" name="WVU DSPIRA navy band"/>
+          <p:cNvSpPr>
+            <a:spLocks noGrp="1"/>
+          </p:cNvSpPr>
+          <p:nvPr/>
+        </p:nvSpPr>
+        <p:spPr>
+          <a:xfrm>
+            <a:off x="0" y="0"/>
+            <a:ext cx="12192000" cy="323850"/>
+          </a:xfrm>
+          <a:prstGeom prst="rect">
+            <a:avLst/>
+          </a:prstGeom>
+          <a:solidFill>
+            <a:srgbClr val="002855"/>
+          </a:solidFill>
+          <a:ln w="0">
+            <a:noFill/>
+          </a:ln>
+        </p:spPr>
+      </p:sp>
+      <p:sp>
+        <p:nvSpPr>
+          <p:cNvPr id="41" name="WVU DSPIRA gold rule"/>
+          <p:cNvSpPr>
+            <a:spLocks noGrp="1"/>
+          </p:cNvSpPr>
+          <p:nvPr/>
+        </p:nvSpPr>
+        <p:spPr>
+          <a:xfrm>
+            <a:off x="0" y="323850"/>
+            <a:ext cx="12192000" cy="19050"/>
+          </a:xfrm>
+          <a:prstGeom prst="rect">
+            <a:avLst/>
+          </a:prstGeom>
+          <a:solidFill>
+            <a:srgbClr val="EEAA00"/>
+          </a:solidFill>
+          <a:ln w="0">
+            <a:noFill/>
+          </a:ln>
+        </p:spPr>
+      </p:sp>
+      <p:sp>
+        <p:nvSpPr>
+          <p:cNvPr id="42" name="WVU DSPIRA name"/>
+          <p:cNvSpPr>
+            <a:spLocks noGrp="1"/>
+          </p:cNvSpPr>
+          <p:nvPr/>
+        </p:nvSpPr>
+        <p:spPr>
+          <a:xfrm>
+            <a:off x="228600" y="19050"/>
+            <a:ext cx="2857500" cy="257175"/>
+          </a:xfrm>
+          <a:prstGeom prst="rect">
+            <a:avLst/>
+          </a:prstGeom>
+          <a:noFill/>
+          <a:ln w="0">
+            <a:noFill/>
+          </a:ln>
+        </p:spPr>
+        <p:txBody>
+          <a:bodyPr>
+            <a:noAutofit/>
+          </a:bodyPr>
+          <a:lstStyle/>
+          <a:p>
+            <a:pPr>
+              <a:defRPr sz="1600" b="1">
+                <a:solidFill>
+                  <a:srgbClr val="FFFFFF"/>
+                </a:solidFill>
+                <a:latin typeface="Arial"/>
+                <a:ea typeface="Arial"/>
+                <a:cs typeface="Arial"/>
+              </a:defRPr>
+            </a:pPr>
+            <a:r>
+              <a:rPr sz="1600" b="1">
+                <a:solidFill>
+                  <a:srgbClr val="FFFFFF"/>
+                </a:solidFill>
+                <a:latin typeface="Arial"/>
+                <a:ea typeface="Arial"/>
+                <a:cs typeface="Arial"/>
+              </a:rPr>
+              <a:t>WVU DSPIRA</a:t>
+            </a:r>
+          </a:p>
+        </p:txBody>
+      </p:sp>
+      <p:sp>
+        <p:nvSpPr>
+          <p:cNvPr id="43" name="WVU DSPIRA university"/>
+          <p:cNvSpPr>
+            <a:spLocks noGrp="1"/>
+          </p:cNvSpPr>
+          <p:nvPr/>
+        </p:nvSpPr>
+        <p:spPr>
+          <a:xfrm>
+            <a:off x="9334500" y="114300"/>
+            <a:ext cx="2628900" cy="171450"/>
+          </a:xfrm>
+          <a:prstGeom prst="rect">
+            <a:avLst/>
+          </a:prstGeom>
+          <a:noFill/>
+          <a:ln w="0">
+            <a:noFill/>
+          </a:ln>
+        </p:spPr>
+        <p:txBody>
+          <a:bodyPr>
+            <a:noAutofit/>
+          </a:bodyPr>
+          <a:lstStyle/>
+          <a:p>
+            <a:pPr algn="r">
+              <a:defRPr sz="900">
+                <a:solidFill>
+                  <a:srgbClr val="FFFFFF"/>
+                </a:solidFill>
+                <a:latin typeface="Arial"/>
+                <a:ea typeface="Arial"/>
+                <a:cs typeface="Arial"/>
+              </a:defRPr>
+            </a:pPr>
+            <a:r>
+              <a:rPr sz="900">
+                <a:solidFill>
+                  <a:srgbClr val="FFFFFF"/>
+                </a:solidFill>
+                <a:latin typeface="Arial"/>
+                <a:ea typeface="Arial"/>
+                <a:cs typeface="Arial"/>
+              </a:rPr>
+              <a:t>WEST VIRGINIA UNIVERSITY</a:t>
             </a:r>
           </a:p>
         </p:txBody>
@@ -7126,7 +7276,7 @@
       </p:pic>
       <p:sp>
         <p:nvSpPr>
-          <p:cNvPr id="21" name="DSPIRA 1"/>
+          <p:cNvPr id="22" name="DSPIRA 2"/>
           <p:cNvSpPr>
             <a:spLocks noGrp="1"/>
           </p:cNvSpPr>
@@ -7134,7 +7284,7 @@
         </p:nvSpPr>
         <p:spPr>
           <a:xfrm>
-            <a:off x="0" y="0"/>
+            <a:off x="0" y="7200900"/>
             <a:ext cx="12192000" cy="342900"/>
           </a:xfrm>
           <a:prstGeom prst="rect">
@@ -7147,81 +7297,6 @@
             <a:noFill/>
           </a:ln>
         </p:spPr>
-      </p:sp>
-      <p:sp>
-        <p:nvSpPr>
-          <p:cNvPr id="22" name="DSPIRA 2"/>
-          <p:cNvSpPr>
-            <a:spLocks noGrp="1"/>
-          </p:cNvSpPr>
-          <p:nvPr/>
-        </p:nvSpPr>
-        <p:spPr>
-          <a:xfrm>
-            <a:off x="0" y="7200900"/>
-            <a:ext cx="12192000" cy="342900"/>
-          </a:xfrm>
-          <a:prstGeom prst="rect">
-            <a:avLst/>
-          </a:prstGeom>
-          <a:solidFill>
-            <a:srgbClr val="FFFFFF"/>
-          </a:solidFill>
-          <a:ln w="0">
-            <a:noFill/>
-          </a:ln>
-        </p:spPr>
-      </p:sp>
-      <p:sp>
-        <p:nvSpPr>
-          <p:cNvPr id="23" name="DSPIRA 3"/>
-          <p:cNvSpPr>
-            <a:spLocks noGrp="1"/>
-          </p:cNvSpPr>
-          <p:nvPr/>
-        </p:nvSpPr>
-        <p:spPr>
-          <a:xfrm>
-            <a:off x="228600" y="76200"/>
-            <a:ext cx="4762500" cy="228600"/>
-          </a:xfrm>
-          <a:prstGeom prst="rect">
-            <a:avLst/>
-          </a:prstGeom>
-          <a:noFill/>
-          <a:ln w="0">
-            <a:noFill/>
-          </a:ln>
-        </p:spPr>
-        <p:txBody>
-          <a:bodyPr>
-            <a:noAutofit/>
-          </a:bodyPr>
-          <a:lstStyle/>
-          <a:p>
-            <a:pPr>
-              <a:defRPr sz="1200" b="1">
-                <a:solidFill>
-                  <a:srgbClr val="002855"/>
-                </a:solidFill>
-                <a:latin typeface="Arial"/>
-                <a:ea typeface="Arial"/>
-                <a:cs typeface="Arial"/>
-              </a:defRPr>
-            </a:pPr>
-            <a:r>
-              <a:rPr sz="1200" b="1">
-                <a:solidFill>
-                  <a:srgbClr val="002855"/>
-                </a:solidFill>
-                <a:latin typeface="Arial"/>
-                <a:ea typeface="Arial"/>
-                <a:cs typeface="Arial"/>
-              </a:rPr>
-              <a:t>WVU DSPIRA</a:t>
-            </a:r>
-          </a:p>
-        </p:txBody>
       </p:sp>
       <p:sp>
         <p:nvSpPr>
@@ -7321,6 +7396,156 @@
                 <a:cs typeface="Arial"/>
               </a:rPr>
               <a:t>2 of 10</a:t>
+            </a:r>
+          </a:p>
+        </p:txBody>
+      </p:sp>
+      <p:sp>
+        <p:nvSpPr>
+          <p:cNvPr id="26" name="WVU DSPIRA navy band"/>
+          <p:cNvSpPr>
+            <a:spLocks noGrp="1"/>
+          </p:cNvSpPr>
+          <p:nvPr/>
+        </p:nvSpPr>
+        <p:spPr>
+          <a:xfrm>
+            <a:off x="0" y="0"/>
+            <a:ext cx="12192000" cy="323850"/>
+          </a:xfrm>
+          <a:prstGeom prst="rect">
+            <a:avLst/>
+          </a:prstGeom>
+          <a:solidFill>
+            <a:srgbClr val="002855"/>
+          </a:solidFill>
+          <a:ln w="0">
+            <a:noFill/>
+          </a:ln>
+        </p:spPr>
+      </p:sp>
+      <p:sp>
+        <p:nvSpPr>
+          <p:cNvPr id="27" name="WVU DSPIRA gold rule"/>
+          <p:cNvSpPr>
+            <a:spLocks noGrp="1"/>
+          </p:cNvSpPr>
+          <p:nvPr/>
+        </p:nvSpPr>
+        <p:spPr>
+          <a:xfrm>
+            <a:off x="0" y="323850"/>
+            <a:ext cx="12192000" cy="19050"/>
+          </a:xfrm>
+          <a:prstGeom prst="rect">
+            <a:avLst/>
+          </a:prstGeom>
+          <a:solidFill>
+            <a:srgbClr val="EEAA00"/>
+          </a:solidFill>
+          <a:ln w="0">
+            <a:noFill/>
+          </a:ln>
+        </p:spPr>
+      </p:sp>
+      <p:sp>
+        <p:nvSpPr>
+          <p:cNvPr id="28" name="WVU DSPIRA name"/>
+          <p:cNvSpPr>
+            <a:spLocks noGrp="1"/>
+          </p:cNvSpPr>
+          <p:nvPr/>
+        </p:nvSpPr>
+        <p:spPr>
+          <a:xfrm>
+            <a:off x="228600" y="19050"/>
+            <a:ext cx="2857500" cy="257175"/>
+          </a:xfrm>
+          <a:prstGeom prst="rect">
+            <a:avLst/>
+          </a:prstGeom>
+          <a:noFill/>
+          <a:ln w="0">
+            <a:noFill/>
+          </a:ln>
+        </p:spPr>
+        <p:txBody>
+          <a:bodyPr>
+            <a:noAutofit/>
+          </a:bodyPr>
+          <a:lstStyle/>
+          <a:p>
+            <a:pPr>
+              <a:defRPr sz="1600" b="1">
+                <a:solidFill>
+                  <a:srgbClr val="FFFFFF"/>
+                </a:solidFill>
+                <a:latin typeface="Arial"/>
+                <a:ea typeface="Arial"/>
+                <a:cs typeface="Arial"/>
+              </a:defRPr>
+            </a:pPr>
+            <a:r>
+              <a:rPr sz="1600" b="1">
+                <a:solidFill>
+                  <a:srgbClr val="FFFFFF"/>
+                </a:solidFill>
+                <a:latin typeface="Arial"/>
+                <a:ea typeface="Arial"/>
+                <a:cs typeface="Arial"/>
+              </a:rPr>
+              <a:t>WVU DSPIRA</a:t>
+            </a:r>
+          </a:p>
+        </p:txBody>
+      </p:sp>
+      <p:sp>
+        <p:nvSpPr>
+          <p:cNvPr id="29" name="WVU DSPIRA university"/>
+          <p:cNvSpPr>
+            <a:spLocks noGrp="1"/>
+          </p:cNvSpPr>
+          <p:nvPr/>
+        </p:nvSpPr>
+        <p:spPr>
+          <a:xfrm>
+            <a:off x="9334500" y="114300"/>
+            <a:ext cx="2628900" cy="171450"/>
+          </a:xfrm>
+          <a:prstGeom prst="rect">
+            <a:avLst/>
+          </a:prstGeom>
+          <a:noFill/>
+          <a:ln w="0">
+            <a:noFill/>
+          </a:ln>
+        </p:spPr>
+        <p:txBody>
+          <a:bodyPr>
+            <a:noAutofit/>
+          </a:bodyPr>
+          <a:lstStyle/>
+          <a:p>
+            <a:pPr algn="r">
+              <a:defRPr sz="900">
+                <a:solidFill>
+                  <a:srgbClr val="FFFFFF"/>
+                </a:solidFill>
+                <a:latin typeface="Arial"/>
+                <a:ea typeface="Arial"/>
+                <a:cs typeface="Arial"/>
+              </a:defRPr>
+            </a:pPr>
+            <a:r>
+              <a:rPr sz="900">
+                <a:solidFill>
+                  <a:srgbClr val="FFFFFF"/>
+                </a:solidFill>
+                <a:latin typeface="Arial"/>
+                <a:ea typeface="Arial"/>
+                <a:cs typeface="Arial"/>
+              </a:rPr>
+              <a:t>WEST VIRGINIA UNIVERSITY</a:t>
             </a:r>
           </a:p>
         </p:txBody>
@@ -7913,7 +8138,7 @@
       </p:pic>
       <p:sp>
         <p:nvSpPr>
-          <p:cNvPr id="7" name="DSPIRA 1"/>
+          <p:cNvPr id="8" name="DSPIRA 2"/>
           <p:cNvSpPr>
             <a:spLocks noGrp="1"/>
           </p:cNvSpPr>
@@ -7921,7 +8146,7 @@
         </p:nvSpPr>
         <p:spPr>
           <a:xfrm>
-            <a:off x="0" y="0"/>
+            <a:off x="0" y="7200900"/>
             <a:ext cx="12192000" cy="342900"/>
           </a:xfrm>
           <a:prstGeom prst="rect">
@@ -7934,81 +8159,6 @@
             <a:noFill/>
           </a:ln>
         </p:spPr>
-      </p:sp>
-      <p:sp>
-        <p:nvSpPr>
-          <p:cNvPr id="8" name="DSPIRA 2"/>
-          <p:cNvSpPr>
-            <a:spLocks noGrp="1"/>
-          </p:cNvSpPr>
-          <p:nvPr/>
-        </p:nvSpPr>
-        <p:spPr>
-          <a:xfrm>
-            <a:off x="0" y="7200900"/>
-            <a:ext cx="12192000" cy="342900"/>
-          </a:xfrm>
-          <a:prstGeom prst="rect">
-            <a:avLst/>
-          </a:prstGeom>
-          <a:solidFill>
-            <a:srgbClr val="FFFFFF"/>
-          </a:solidFill>
-          <a:ln w="0">
-            <a:noFill/>
-          </a:ln>
-        </p:spPr>
-      </p:sp>
-      <p:sp>
-        <p:nvSpPr>
-          <p:cNvPr id="9" name="DSPIRA 3"/>
-          <p:cNvSpPr>
-            <a:spLocks noGrp="1"/>
-          </p:cNvSpPr>
-          <p:nvPr/>
-        </p:nvSpPr>
-        <p:spPr>
-          <a:xfrm>
-            <a:off x="228600" y="76200"/>
-            <a:ext cx="4762500" cy="228600"/>
-          </a:xfrm>
-          <a:prstGeom prst="rect">
-            <a:avLst/>
-          </a:prstGeom>
-          <a:noFill/>
-          <a:ln w="0">
-            <a:noFill/>
-          </a:ln>
-        </p:spPr>
-        <p:txBody>
-          <a:bodyPr>
-            <a:noAutofit/>
-          </a:bodyPr>
-          <a:lstStyle/>
-          <a:p>
-            <a:pPr>
-              <a:defRPr sz="1200" b="1">
-                <a:solidFill>
-                  <a:srgbClr val="002855"/>
-                </a:solidFill>
-                <a:latin typeface="Arial"/>
-                <a:ea typeface="Arial"/>
-                <a:cs typeface="Arial"/>
-              </a:defRPr>
-            </a:pPr>
-            <a:r>
-              <a:rPr sz="1200" b="1">
-                <a:solidFill>
-                  <a:srgbClr val="002855"/>
-                </a:solidFill>
-                <a:latin typeface="Arial"/>
-                <a:ea typeface="Arial"/>
-                <a:cs typeface="Arial"/>
-              </a:rPr>
-              <a:t>WVU DSPIRA</a:t>
-            </a:r>
-          </a:p>
-        </p:txBody>
       </p:sp>
       <p:sp>
         <p:nvSpPr>
@@ -8108,6 +8258,156 @@
                 <a:cs typeface="Arial"/>
               </a:rPr>
               <a:t>3 of 10</a:t>
+            </a:r>
+          </a:p>
+        </p:txBody>
+      </p:sp>
+      <p:sp>
+        <p:nvSpPr>
+          <p:cNvPr id="12" name="WVU DSPIRA navy band"/>
+          <p:cNvSpPr>
+            <a:spLocks noGrp="1"/>
+          </p:cNvSpPr>
+          <p:nvPr/>
+        </p:nvSpPr>
+        <p:spPr>
+          <a:xfrm>
+            <a:off x="0" y="0"/>
+            <a:ext cx="12192000" cy="323850"/>
+          </a:xfrm>
+          <a:prstGeom prst="rect">
+            <a:avLst/>
+          </a:prstGeom>
+          <a:solidFill>
+            <a:srgbClr val="002855"/>
+          </a:solidFill>
+          <a:ln w="0">
+            <a:noFill/>
+          </a:ln>
+        </p:spPr>
+      </p:sp>
+      <p:sp>
+        <p:nvSpPr>
+          <p:cNvPr id="13" name="WVU DSPIRA gold rule"/>
+          <p:cNvSpPr>
+            <a:spLocks noGrp="1"/>
+          </p:cNvSpPr>
+          <p:nvPr/>
+        </p:nvSpPr>
+        <p:spPr>
+          <a:xfrm>
+            <a:off x="0" y="323850"/>
+            <a:ext cx="12192000" cy="19050"/>
+          </a:xfrm>
+          <a:prstGeom prst="rect">
+            <a:avLst/>
+          </a:prstGeom>
+          <a:solidFill>
+            <a:srgbClr val="EEAA00"/>
+          </a:solidFill>
+          <a:ln w="0">
+            <a:noFill/>
+          </a:ln>
+        </p:spPr>
+      </p:sp>
+      <p:sp>
+        <p:nvSpPr>
+          <p:cNvPr id="14" name="WVU DSPIRA name"/>
+          <p:cNvSpPr>
+            <a:spLocks noGrp="1"/>
+          </p:cNvSpPr>
+          <p:nvPr/>
+        </p:nvSpPr>
+        <p:spPr>
+          <a:xfrm>
+            <a:off x="228600" y="19050"/>
+            <a:ext cx="2857500" cy="257175"/>
+          </a:xfrm>
+          <a:prstGeom prst="rect">
+            <a:avLst/>
+          </a:prstGeom>
+          <a:noFill/>
+          <a:ln w="0">
+            <a:noFill/>
+          </a:ln>
+        </p:spPr>
+        <p:txBody>
+          <a:bodyPr>
+            <a:noAutofit/>
+          </a:bodyPr>
+          <a:lstStyle/>
+          <a:p>
+            <a:pPr>
+              <a:defRPr sz="1600" b="1">
+                <a:solidFill>
+                  <a:srgbClr val="FFFFFF"/>
+                </a:solidFill>
+                <a:latin typeface="Arial"/>
+                <a:ea typeface="Arial"/>
+                <a:cs typeface="Arial"/>
+              </a:defRPr>
+            </a:pPr>
+            <a:r>
+              <a:rPr sz="1600" b="1">
+                <a:solidFill>
+                  <a:srgbClr val="FFFFFF"/>
+                </a:solidFill>
+                <a:latin typeface="Arial"/>
+                <a:ea typeface="Arial"/>
+                <a:cs typeface="Arial"/>
+              </a:rPr>
+              <a:t>WVU DSPIRA</a:t>
+            </a:r>
+          </a:p>
+        </p:txBody>
+      </p:sp>
+      <p:sp>
+        <p:nvSpPr>
+          <p:cNvPr id="15" name="WVU DSPIRA university"/>
+          <p:cNvSpPr>
+            <a:spLocks noGrp="1"/>
+          </p:cNvSpPr>
+          <p:nvPr/>
+        </p:nvSpPr>
+        <p:spPr>
+          <a:xfrm>
+            <a:off x="9334500" y="114300"/>
+            <a:ext cx="2628900" cy="171450"/>
+          </a:xfrm>
+          <a:prstGeom prst="rect">
+            <a:avLst/>
+          </a:prstGeom>
+          <a:noFill/>
+          <a:ln w="0">
+            <a:noFill/>
+          </a:ln>
+        </p:spPr>
+        <p:txBody>
+          <a:bodyPr>
+            <a:noAutofit/>
+          </a:bodyPr>
+          <a:lstStyle/>
+          <a:p>
+            <a:pPr algn="r">
+              <a:defRPr sz="900">
+                <a:solidFill>
+                  <a:srgbClr val="FFFFFF"/>
+                </a:solidFill>
+                <a:latin typeface="Arial"/>
+                <a:ea typeface="Arial"/>
+                <a:cs typeface="Arial"/>
+              </a:defRPr>
+            </a:pPr>
+            <a:r>
+              <a:rPr sz="900">
+                <a:solidFill>
+                  <a:srgbClr val="FFFFFF"/>
+                </a:solidFill>
+                <a:latin typeface="Arial"/>
+                <a:ea typeface="Arial"/>
+                <a:cs typeface="Arial"/>
+              </a:rPr>
+              <a:t>WEST VIRGINIA UNIVERSITY</a:t>
             </a:r>
           </a:p>
         </p:txBody>
@@ -9023,7 +9323,7 @@
       </p:pic>
       <p:sp>
         <p:nvSpPr>
-          <p:cNvPr id="11" name="DSPIRA 1"/>
+          <p:cNvPr id="12" name="DSPIRA 2"/>
           <p:cNvSpPr>
             <a:spLocks noGrp="1"/>
           </p:cNvSpPr>
@@ -9031,7 +9331,7 @@
         </p:nvSpPr>
         <p:spPr>
           <a:xfrm>
-            <a:off x="0" y="0"/>
+            <a:off x="0" y="7200900"/>
             <a:ext cx="12192000" cy="342900"/>
           </a:xfrm>
           <a:prstGeom prst="rect">
@@ -9044,81 +9344,6 @@
             <a:noFill/>
           </a:ln>
         </p:spPr>
-      </p:sp>
-      <p:sp>
-        <p:nvSpPr>
-          <p:cNvPr id="12" name="DSPIRA 2"/>
-          <p:cNvSpPr>
-            <a:spLocks noGrp="1"/>
-          </p:cNvSpPr>
-          <p:nvPr/>
-        </p:nvSpPr>
-        <p:spPr>
-          <a:xfrm>
-            <a:off x="0" y="7200900"/>
-            <a:ext cx="12192000" cy="342900"/>
-          </a:xfrm>
-          <a:prstGeom prst="rect">
-            <a:avLst/>
-          </a:prstGeom>
-          <a:solidFill>
-            <a:srgbClr val="FFFFFF"/>
-          </a:solidFill>
-          <a:ln w="0">
-            <a:noFill/>
-          </a:ln>
-        </p:spPr>
-      </p:sp>
-      <p:sp>
-        <p:nvSpPr>
-          <p:cNvPr id="13" name="DSPIRA 3"/>
-          <p:cNvSpPr>
-            <a:spLocks noGrp="1"/>
-          </p:cNvSpPr>
-          <p:nvPr/>
-        </p:nvSpPr>
-        <p:spPr>
-          <a:xfrm>
-            <a:off x="228600" y="76200"/>
-            <a:ext cx="4762500" cy="228600"/>
-          </a:xfrm>
-          <a:prstGeom prst="rect">
-            <a:avLst/>
-          </a:prstGeom>
-          <a:noFill/>
-          <a:ln w="0">
-            <a:noFill/>
-          </a:ln>
-        </p:spPr>
-        <p:txBody>
-          <a:bodyPr>
-            <a:noAutofit/>
-          </a:bodyPr>
-          <a:lstStyle/>
-          <a:p>
-            <a:pPr>
-              <a:defRPr sz="1200" b="1">
-                <a:solidFill>
-                  <a:srgbClr val="002855"/>
-                </a:solidFill>
-                <a:latin typeface="Arial"/>
-                <a:ea typeface="Arial"/>
-                <a:cs typeface="Arial"/>
-              </a:defRPr>
-            </a:pPr>
-            <a:r>
-              <a:rPr sz="1200" b="1">
-                <a:solidFill>
-                  <a:srgbClr val="002855"/>
-                </a:solidFill>
-                <a:latin typeface="Arial"/>
-                <a:ea typeface="Arial"/>
-                <a:cs typeface="Arial"/>
-              </a:rPr>
-              <a:t>WVU DSPIRA</a:t>
-            </a:r>
-          </a:p>
-        </p:txBody>
       </p:sp>
       <p:sp>
         <p:nvSpPr>
@@ -9218,6 +9443,156 @@
                 <a:cs typeface="Arial"/>
               </a:rPr>
               <a:t>4 of 10</a:t>
+            </a:r>
+          </a:p>
+        </p:txBody>
+      </p:sp>
+      <p:sp>
+        <p:nvSpPr>
+          <p:cNvPr id="16" name="WVU DSPIRA navy band"/>
+          <p:cNvSpPr>
+            <a:spLocks noGrp="1"/>
+          </p:cNvSpPr>
+          <p:nvPr/>
+        </p:nvSpPr>
+        <p:spPr>
+          <a:xfrm>
+            <a:off x="0" y="0"/>
+            <a:ext cx="12192000" cy="323850"/>
+          </a:xfrm>
+          <a:prstGeom prst="rect">
+            <a:avLst/>
+          </a:prstGeom>
+          <a:solidFill>
+            <a:srgbClr val="002855"/>
+          </a:solidFill>
+          <a:ln w="0">
+            <a:noFill/>
+          </a:ln>
+        </p:spPr>
+      </p:sp>
+      <p:sp>
+        <p:nvSpPr>
+          <p:cNvPr id="17" name="WVU DSPIRA gold rule"/>
+          <p:cNvSpPr>
+            <a:spLocks noGrp="1"/>
+          </p:cNvSpPr>
+          <p:nvPr/>
+        </p:nvSpPr>
+        <p:spPr>
+          <a:xfrm>
+            <a:off x="0" y="323850"/>
+            <a:ext cx="12192000" cy="19050"/>
+          </a:xfrm>
+          <a:prstGeom prst="rect">
+            <a:avLst/>
+          </a:prstGeom>
+          <a:solidFill>
+            <a:srgbClr val="EEAA00"/>
+          </a:solidFill>
+          <a:ln w="0">
+            <a:noFill/>
+          </a:ln>
+        </p:spPr>
+      </p:sp>
+      <p:sp>
+        <p:nvSpPr>
+          <p:cNvPr id="18" name="WVU DSPIRA name"/>
+          <p:cNvSpPr>
+            <a:spLocks noGrp="1"/>
+          </p:cNvSpPr>
+          <p:nvPr/>
+        </p:nvSpPr>
+        <p:spPr>
+          <a:xfrm>
+            <a:off x="228600" y="19050"/>
+            <a:ext cx="2857500" cy="257175"/>
+          </a:xfrm>
+          <a:prstGeom prst="rect">
+            <a:avLst/>
+          </a:prstGeom>
+          <a:noFill/>
+          <a:ln w="0">
+            <a:noFill/>
+          </a:ln>
+        </p:spPr>
+        <p:txBody>
+          <a:bodyPr>
+            <a:noAutofit/>
+          </a:bodyPr>
+          <a:lstStyle/>
+          <a:p>
+            <a:pPr>
+              <a:defRPr sz="1600" b="1">
+                <a:solidFill>
+                  <a:srgbClr val="FFFFFF"/>
+                </a:solidFill>
+                <a:latin typeface="Arial"/>
+                <a:ea typeface="Arial"/>
+                <a:cs typeface="Arial"/>
+              </a:defRPr>
+            </a:pPr>
+            <a:r>
+              <a:rPr sz="1600" b="1">
+                <a:solidFill>
+                  <a:srgbClr val="FFFFFF"/>
+                </a:solidFill>
+                <a:latin typeface="Arial"/>
+                <a:ea typeface="Arial"/>
+                <a:cs typeface="Arial"/>
+              </a:rPr>
+              <a:t>WVU DSPIRA</a:t>
+            </a:r>
+          </a:p>
+        </p:txBody>
+      </p:sp>
+      <p:sp>
+        <p:nvSpPr>
+          <p:cNvPr id="19" name="WVU DSPIRA university"/>
+          <p:cNvSpPr>
+            <a:spLocks noGrp="1"/>
+          </p:cNvSpPr>
+          <p:nvPr/>
+        </p:nvSpPr>
+        <p:spPr>
+          <a:xfrm>
+            <a:off x="9334500" y="114300"/>
+            <a:ext cx="2628900" cy="171450"/>
+          </a:xfrm>
+          <a:prstGeom prst="rect">
+            <a:avLst/>
+          </a:prstGeom>
+          <a:noFill/>
+          <a:ln w="0">
+            <a:noFill/>
+          </a:ln>
+        </p:spPr>
+        <p:txBody>
+          <a:bodyPr>
+            <a:noAutofit/>
+          </a:bodyPr>
+          <a:lstStyle/>
+          <a:p>
+            <a:pPr algn="r">
+              <a:defRPr sz="900">
+                <a:solidFill>
+                  <a:srgbClr val="FFFFFF"/>
+                </a:solidFill>
+                <a:latin typeface="Arial"/>
+                <a:ea typeface="Arial"/>
+                <a:cs typeface="Arial"/>
+              </a:defRPr>
+            </a:pPr>
+            <a:r>
+              <a:rPr sz="900">
+                <a:solidFill>
+                  <a:srgbClr val="FFFFFF"/>
+                </a:solidFill>
+                <a:latin typeface="Arial"/>
+                <a:ea typeface="Arial"/>
+                <a:cs typeface="Arial"/>
+              </a:rPr>
+              <a:t>WEST VIRGINIA UNIVERSITY</a:t>
             </a:r>
           </a:p>
         </p:txBody>
@@ -9518,7 +9893,7 @@
       </p:sp>
       <p:sp>
         <p:nvSpPr>
-          <p:cNvPr id="19" name="DSPIRA 1"/>
+          <p:cNvPr id="20" name="DSPIRA 2"/>
           <p:cNvSpPr>
             <a:spLocks noGrp="1"/>
           </p:cNvSpPr>
@@ -9526,7 +9901,7 @@
         </p:nvSpPr>
         <p:spPr>
           <a:xfrm>
-            <a:off x="0" y="0"/>
+            <a:off x="0" y="7200900"/>
             <a:ext cx="12192000" cy="342900"/>
           </a:xfrm>
           <a:prstGeom prst="rect">
@@ -9539,81 +9914,6 @@
             <a:noFill/>
           </a:ln>
         </p:spPr>
-      </p:sp>
-      <p:sp>
-        <p:nvSpPr>
-          <p:cNvPr id="20" name="DSPIRA 2"/>
-          <p:cNvSpPr>
-            <a:spLocks noGrp="1"/>
-          </p:cNvSpPr>
-          <p:nvPr/>
-        </p:nvSpPr>
-        <p:spPr>
-          <a:xfrm>
-            <a:off x="0" y="7200900"/>
-            <a:ext cx="12192000" cy="342900"/>
-          </a:xfrm>
-          <a:prstGeom prst="rect">
-            <a:avLst/>
-          </a:prstGeom>
-          <a:solidFill>
-            <a:srgbClr val="FFFFFF"/>
-          </a:solidFill>
-          <a:ln w="0">
-            <a:noFill/>
-          </a:ln>
-        </p:spPr>
-      </p:sp>
-      <p:sp>
-        <p:nvSpPr>
-          <p:cNvPr id="21" name="DSPIRA 3"/>
-          <p:cNvSpPr>
-            <a:spLocks noGrp="1"/>
-          </p:cNvSpPr>
-          <p:nvPr/>
-        </p:nvSpPr>
-        <p:spPr>
-          <a:xfrm>
-            <a:off x="228600" y="76200"/>
-            <a:ext cx="4762500" cy="228600"/>
-          </a:xfrm>
-          <a:prstGeom prst="rect">
-            <a:avLst/>
-          </a:prstGeom>
-          <a:noFill/>
-          <a:ln w="0">
-            <a:noFill/>
-          </a:ln>
-        </p:spPr>
-        <p:txBody>
-          <a:bodyPr>
-            <a:noAutofit/>
-          </a:bodyPr>
-          <a:lstStyle/>
-          <a:p>
-            <a:pPr>
-              <a:defRPr sz="1200" b="1">
-                <a:solidFill>
-                  <a:srgbClr val="002855"/>
-                </a:solidFill>
-                <a:latin typeface="Arial"/>
-                <a:ea typeface="Arial"/>
-                <a:cs typeface="Arial"/>
-              </a:defRPr>
-            </a:pPr>
-            <a:r>
-              <a:rPr sz="1200" b="1">
-                <a:solidFill>
-                  <a:srgbClr val="002855"/>
-                </a:solidFill>
-                <a:latin typeface="Arial"/>
-                <a:ea typeface="Arial"/>
-                <a:cs typeface="Arial"/>
-              </a:rPr>
-              <a:t>WVU DSPIRA</a:t>
-            </a:r>
-          </a:p>
-        </p:txBody>
       </p:sp>
       <p:sp>
         <p:nvSpPr>
@@ -9713,6 +10013,156 @@
                 <a:cs typeface="Arial"/>
               </a:rPr>
               <a:t>5 of 10</a:t>
+            </a:r>
+          </a:p>
+        </p:txBody>
+      </p:sp>
+      <p:sp>
+        <p:nvSpPr>
+          <p:cNvPr id="24" name="WVU DSPIRA navy band"/>
+          <p:cNvSpPr>
+            <a:spLocks noGrp="1"/>
+          </p:cNvSpPr>
+          <p:nvPr/>
+        </p:nvSpPr>
+        <p:spPr>
+          <a:xfrm>
+            <a:off x="0" y="0"/>
+            <a:ext cx="12192000" cy="323850"/>
+          </a:xfrm>
+          <a:prstGeom prst="rect">
+            <a:avLst/>
+          </a:prstGeom>
+          <a:solidFill>
+            <a:srgbClr val="002855"/>
+          </a:solidFill>
+          <a:ln w="0">
+            <a:noFill/>
+          </a:ln>
+        </p:spPr>
+      </p:sp>
+      <p:sp>
+        <p:nvSpPr>
+          <p:cNvPr id="25" name="WVU DSPIRA gold rule"/>
+          <p:cNvSpPr>
+            <a:spLocks noGrp="1"/>
+          </p:cNvSpPr>
+          <p:nvPr/>
+        </p:nvSpPr>
+        <p:spPr>
+          <a:xfrm>
+            <a:off x="0" y="323850"/>
+            <a:ext cx="12192000" cy="19050"/>
+          </a:xfrm>
+          <a:prstGeom prst="rect">
+            <a:avLst/>
+          </a:prstGeom>
+          <a:solidFill>
+            <a:srgbClr val="EEAA00"/>
+          </a:solidFill>
+          <a:ln w="0">
+            <a:noFill/>
+          </a:ln>
+        </p:spPr>
+      </p:sp>
+      <p:sp>
+        <p:nvSpPr>
+          <p:cNvPr id="26" name="WVU DSPIRA name"/>
+          <p:cNvSpPr>
+            <a:spLocks noGrp="1"/>
+          </p:cNvSpPr>
+          <p:nvPr/>
+        </p:nvSpPr>
+        <p:spPr>
+          <a:xfrm>
+            <a:off x="228600" y="19050"/>
+            <a:ext cx="2857500" cy="257175"/>
+          </a:xfrm>
+          <a:prstGeom prst="rect">
+            <a:avLst/>
+          </a:prstGeom>
+          <a:noFill/>
+          <a:ln w="0">
+            <a:noFill/>
+          </a:ln>
+        </p:spPr>
+        <p:txBody>
+          <a:bodyPr>
+            <a:noAutofit/>
+          </a:bodyPr>
+          <a:lstStyle/>
+          <a:p>
+            <a:pPr>
+              <a:defRPr sz="1600" b="1">
+                <a:solidFill>
+                  <a:srgbClr val="FFFFFF"/>
+                </a:solidFill>
+                <a:latin typeface="Arial"/>
+                <a:ea typeface="Arial"/>
+                <a:cs typeface="Arial"/>
+              </a:defRPr>
+            </a:pPr>
+            <a:r>
+              <a:rPr sz="1600" b="1">
+                <a:solidFill>
+                  <a:srgbClr val="FFFFFF"/>
+                </a:solidFill>
+                <a:latin typeface="Arial"/>
+                <a:ea typeface="Arial"/>
+                <a:cs typeface="Arial"/>
+              </a:rPr>
+              <a:t>WVU DSPIRA</a:t>
+            </a:r>
+          </a:p>
+        </p:txBody>
+      </p:sp>
+      <p:sp>
+        <p:nvSpPr>
+          <p:cNvPr id="27" name="WVU DSPIRA university"/>
+          <p:cNvSpPr>
+            <a:spLocks noGrp="1"/>
+          </p:cNvSpPr>
+          <p:nvPr/>
+        </p:nvSpPr>
+        <p:spPr>
+          <a:xfrm>
+            <a:off x="9334500" y="114300"/>
+            <a:ext cx="2628900" cy="171450"/>
+          </a:xfrm>
+          <a:prstGeom prst="rect">
+            <a:avLst/>
+          </a:prstGeom>
+          <a:noFill/>
+          <a:ln w="0">
+            <a:noFill/>
+          </a:ln>
+        </p:spPr>
+        <p:txBody>
+          <a:bodyPr>
+            <a:noAutofit/>
+          </a:bodyPr>
+          <a:lstStyle/>
+          <a:p>
+            <a:pPr algn="r">
+              <a:defRPr sz="900">
+                <a:solidFill>
+                  <a:srgbClr val="FFFFFF"/>
+                </a:solidFill>
+                <a:latin typeface="Arial"/>
+                <a:ea typeface="Arial"/>
+                <a:cs typeface="Arial"/>
+              </a:defRPr>
+            </a:pPr>
+            <a:r>
+              <a:rPr sz="900">
+                <a:solidFill>
+                  <a:srgbClr val="FFFFFF"/>
+                </a:solidFill>
+                <a:latin typeface="Arial"/>
+                <a:ea typeface="Arial"/>
+                <a:cs typeface="Arial"/>
+              </a:rPr>
+              <a:t>WEST VIRGINIA UNIVERSITY</a:t>
             </a:r>
           </a:p>
         </p:txBody>
@@ -10586,7 +11036,7 @@
       </mc:AlternateContent>
       <p:sp>
         <p:nvSpPr>
-          <p:cNvPr id="4" name="DSPIRA 1"/>
+          <p:cNvPr id="5" name="DSPIRA 2"/>
           <p:cNvSpPr>
             <a:spLocks noGrp="1"/>
           </p:cNvSpPr>
@@ -10594,7 +11044,7 @@
         </p:nvSpPr>
         <p:spPr>
           <a:xfrm>
-            <a:off x="0" y="0"/>
+            <a:off x="0" y="7200900"/>
             <a:ext cx="12192000" cy="342900"/>
           </a:xfrm>
           <a:prstGeom prst="rect">
@@ -10607,81 +11057,6 @@
             <a:noFill/>
           </a:ln>
         </p:spPr>
-      </p:sp>
-      <p:sp>
-        <p:nvSpPr>
-          <p:cNvPr id="5" name="DSPIRA 2"/>
-          <p:cNvSpPr>
-            <a:spLocks noGrp="1"/>
-          </p:cNvSpPr>
-          <p:nvPr/>
-        </p:nvSpPr>
-        <p:spPr>
-          <a:xfrm>
-            <a:off x="0" y="7200900"/>
-            <a:ext cx="12192000" cy="342900"/>
-          </a:xfrm>
-          <a:prstGeom prst="rect">
-            <a:avLst/>
-          </a:prstGeom>
-          <a:solidFill>
-            <a:srgbClr val="FFFFFF"/>
-          </a:solidFill>
-          <a:ln w="0">
-            <a:noFill/>
-          </a:ln>
-        </p:spPr>
-      </p:sp>
-      <p:sp>
-        <p:nvSpPr>
-          <p:cNvPr id="6" name="DSPIRA 3"/>
-          <p:cNvSpPr>
-            <a:spLocks noGrp="1"/>
-          </p:cNvSpPr>
-          <p:nvPr/>
-        </p:nvSpPr>
-        <p:spPr>
-          <a:xfrm>
-            <a:off x="228600" y="76200"/>
-            <a:ext cx="4762500" cy="228600"/>
-          </a:xfrm>
-          <a:prstGeom prst="rect">
-            <a:avLst/>
-          </a:prstGeom>
-          <a:noFill/>
-          <a:ln w="0">
-            <a:noFill/>
-          </a:ln>
-        </p:spPr>
-        <p:txBody>
-          <a:bodyPr>
-            <a:noAutofit/>
-          </a:bodyPr>
-          <a:lstStyle/>
-          <a:p>
-            <a:pPr>
-              <a:defRPr sz="1200" b="1">
-                <a:solidFill>
-                  <a:srgbClr val="002855"/>
-                </a:solidFill>
-                <a:latin typeface="Arial"/>
-                <a:ea typeface="Arial"/>
-                <a:cs typeface="Arial"/>
-              </a:defRPr>
-            </a:pPr>
-            <a:r>
-              <a:rPr sz="1200" b="1">
-                <a:solidFill>
-                  <a:srgbClr val="002855"/>
-                </a:solidFill>
-                <a:latin typeface="Arial"/>
-                <a:ea typeface="Arial"/>
-                <a:cs typeface="Arial"/>
-              </a:rPr>
-              <a:t>WVU DSPIRA</a:t>
-            </a:r>
-          </a:p>
-        </p:txBody>
       </p:sp>
       <p:sp>
         <p:nvSpPr>
@@ -10781,6 +11156,156 @@
                 <a:cs typeface="Arial"/>
               </a:rPr>
               <a:t>6 of 10</a:t>
+            </a:r>
+          </a:p>
+        </p:txBody>
+      </p:sp>
+      <p:sp>
+        <p:nvSpPr>
+          <p:cNvPr id="9" name="WVU DSPIRA navy band"/>
+          <p:cNvSpPr>
+            <a:spLocks noGrp="1"/>
+          </p:cNvSpPr>
+          <p:nvPr/>
+        </p:nvSpPr>
+        <p:spPr>
+          <a:xfrm>
+            <a:off x="0" y="0"/>
+            <a:ext cx="12192000" cy="323850"/>
+          </a:xfrm>
+          <a:prstGeom prst="rect">
+            <a:avLst/>
+          </a:prstGeom>
+          <a:solidFill>
+            <a:srgbClr val="002855"/>
+          </a:solidFill>
+          <a:ln w="0">
+            <a:noFill/>
+          </a:ln>
+        </p:spPr>
+      </p:sp>
+      <p:sp>
+        <p:nvSpPr>
+          <p:cNvPr id="10" name="WVU DSPIRA gold rule"/>
+          <p:cNvSpPr>
+            <a:spLocks noGrp="1"/>
+          </p:cNvSpPr>
+          <p:nvPr/>
+        </p:nvSpPr>
+        <p:spPr>
+          <a:xfrm>
+            <a:off x="0" y="323850"/>
+            <a:ext cx="12192000" cy="19050"/>
+          </a:xfrm>
+          <a:prstGeom prst="rect">
+            <a:avLst/>
+          </a:prstGeom>
+          <a:solidFill>
+            <a:srgbClr val="EEAA00"/>
+          </a:solidFill>
+          <a:ln w="0">
+            <a:noFill/>
+          </a:ln>
+        </p:spPr>
+      </p:sp>
+      <p:sp>
+        <p:nvSpPr>
+          <p:cNvPr id="11" name="WVU DSPIRA name"/>
+          <p:cNvSpPr>
+            <a:spLocks noGrp="1"/>
+          </p:cNvSpPr>
+          <p:nvPr/>
+        </p:nvSpPr>
+        <p:spPr>
+          <a:xfrm>
+            <a:off x="228600" y="19050"/>
+            <a:ext cx="2857500" cy="257175"/>
+          </a:xfrm>
+          <a:prstGeom prst="rect">
+            <a:avLst/>
+          </a:prstGeom>
+          <a:noFill/>
+          <a:ln w="0">
+            <a:noFill/>
+          </a:ln>
+        </p:spPr>
+        <p:txBody>
+          <a:bodyPr>
+            <a:noAutofit/>
+          </a:bodyPr>
+          <a:lstStyle/>
+          <a:p>
+            <a:pPr>
+              <a:defRPr sz="1600" b="1">
+                <a:solidFill>
+                  <a:srgbClr val="FFFFFF"/>
+                </a:solidFill>
+                <a:latin typeface="Arial"/>
+                <a:ea typeface="Arial"/>
+                <a:cs typeface="Arial"/>
+              </a:defRPr>
+            </a:pPr>
+            <a:r>
+              <a:rPr sz="1600" b="1">
+                <a:solidFill>
+                  <a:srgbClr val="FFFFFF"/>
+                </a:solidFill>
+                <a:latin typeface="Arial"/>
+                <a:ea typeface="Arial"/>
+                <a:cs typeface="Arial"/>
+              </a:rPr>
+              <a:t>WVU DSPIRA</a:t>
+            </a:r>
+          </a:p>
+        </p:txBody>
+      </p:sp>
+      <p:sp>
+        <p:nvSpPr>
+          <p:cNvPr id="12" name="WVU DSPIRA university"/>
+          <p:cNvSpPr>
+            <a:spLocks noGrp="1"/>
+          </p:cNvSpPr>
+          <p:nvPr/>
+        </p:nvSpPr>
+        <p:spPr>
+          <a:xfrm>
+            <a:off x="9334500" y="114300"/>
+            <a:ext cx="2628900" cy="171450"/>
+          </a:xfrm>
+          <a:prstGeom prst="rect">
+            <a:avLst/>
+          </a:prstGeom>
+          <a:noFill/>
+          <a:ln w="0">
+            <a:noFill/>
+          </a:ln>
+        </p:spPr>
+        <p:txBody>
+          <a:bodyPr>
+            <a:noAutofit/>
+          </a:bodyPr>
+          <a:lstStyle/>
+          <a:p>
+            <a:pPr algn="r">
+              <a:defRPr sz="900">
+                <a:solidFill>
+                  <a:srgbClr val="FFFFFF"/>
+                </a:solidFill>
+                <a:latin typeface="Arial"/>
+                <a:ea typeface="Arial"/>
+                <a:cs typeface="Arial"/>
+              </a:defRPr>
+            </a:pPr>
+            <a:r>
+              <a:rPr sz="900">
+                <a:solidFill>
+                  <a:srgbClr val="FFFFFF"/>
+                </a:solidFill>
+                <a:latin typeface="Arial"/>
+                <a:ea typeface="Arial"/>
+                <a:cs typeface="Arial"/>
+              </a:rPr>
+              <a:t>WEST VIRGINIA UNIVERSITY</a:t>
             </a:r>
           </a:p>
         </p:txBody>
@@ -10967,7 +11492,7 @@
       </p:sp>
       <p:sp>
         <p:nvSpPr>
-          <p:cNvPr id="12" name="DSPIRA 1"/>
+          <p:cNvPr id="13" name="DSPIRA 2"/>
           <p:cNvSpPr>
             <a:spLocks noGrp="1"/>
           </p:cNvSpPr>
@@ -10975,7 +11500,7 @@
         </p:nvSpPr>
         <p:spPr>
           <a:xfrm>
-            <a:off x="0" y="0"/>
+            <a:off x="0" y="7200900"/>
             <a:ext cx="12192000" cy="342900"/>
           </a:xfrm>
           <a:prstGeom prst="rect">
@@ -10988,81 +11513,6 @@
             <a:noFill/>
           </a:ln>
         </p:spPr>
-      </p:sp>
-      <p:sp>
-        <p:nvSpPr>
-          <p:cNvPr id="13" name="DSPIRA 2"/>
-          <p:cNvSpPr>
-            <a:spLocks noGrp="1"/>
-          </p:cNvSpPr>
-          <p:nvPr/>
-        </p:nvSpPr>
-        <p:spPr>
-          <a:xfrm>
-            <a:off x="0" y="7200900"/>
-            <a:ext cx="12192000" cy="342900"/>
-          </a:xfrm>
-          <a:prstGeom prst="rect">
-            <a:avLst/>
-          </a:prstGeom>
-          <a:solidFill>
-            <a:srgbClr val="FFFFFF"/>
-          </a:solidFill>
-          <a:ln w="0">
-            <a:noFill/>
-          </a:ln>
-        </p:spPr>
-      </p:sp>
-      <p:sp>
-        <p:nvSpPr>
-          <p:cNvPr id="14" name="DSPIRA 3"/>
-          <p:cNvSpPr>
-            <a:spLocks noGrp="1"/>
-          </p:cNvSpPr>
-          <p:nvPr/>
-        </p:nvSpPr>
-        <p:spPr>
-          <a:xfrm>
-            <a:off x="228600" y="76200"/>
-            <a:ext cx="4762500" cy="228600"/>
-          </a:xfrm>
-          <a:prstGeom prst="rect">
-            <a:avLst/>
-          </a:prstGeom>
-          <a:noFill/>
-          <a:ln w="0">
-            <a:noFill/>
-          </a:ln>
-        </p:spPr>
-        <p:txBody>
-          <a:bodyPr>
-            <a:noAutofit/>
-          </a:bodyPr>
-          <a:lstStyle/>
-          <a:p>
-            <a:pPr>
-              <a:defRPr sz="1200" b="1">
-                <a:solidFill>
-                  <a:srgbClr val="002855"/>
-                </a:solidFill>
-                <a:latin typeface="Arial"/>
-                <a:ea typeface="Arial"/>
-                <a:cs typeface="Arial"/>
-              </a:defRPr>
-            </a:pPr>
-            <a:r>
-              <a:rPr sz="1200" b="1">
-                <a:solidFill>
-                  <a:srgbClr val="002855"/>
-                </a:solidFill>
-                <a:latin typeface="Arial"/>
-                <a:ea typeface="Arial"/>
-                <a:cs typeface="Arial"/>
-              </a:rPr>
-              <a:t>WVU DSPIRA</a:t>
-            </a:r>
-          </a:p>
-        </p:txBody>
       </p:sp>
       <p:sp>
         <p:nvSpPr>
@@ -11162,6 +11612,156 @@
                 <a:cs typeface="Arial"/>
               </a:rPr>
               <a:t>7 of 10</a:t>
+            </a:r>
+          </a:p>
+        </p:txBody>
+      </p:sp>
+      <p:sp>
+        <p:nvSpPr>
+          <p:cNvPr id="17" name="WVU DSPIRA navy band"/>
+          <p:cNvSpPr>
+            <a:spLocks noGrp="1"/>
+          </p:cNvSpPr>
+          <p:nvPr/>
+        </p:nvSpPr>
+        <p:spPr>
+          <a:xfrm>
+            <a:off x="0" y="0"/>
+            <a:ext cx="12192000" cy="323850"/>
+          </a:xfrm>
+          <a:prstGeom prst="rect">
+            <a:avLst/>
+          </a:prstGeom>
+          <a:solidFill>
+            <a:srgbClr val="002855"/>
+          </a:solidFill>
+          <a:ln w="0">
+            <a:noFill/>
+          </a:ln>
+        </p:spPr>
+      </p:sp>
+      <p:sp>
+        <p:nvSpPr>
+          <p:cNvPr id="18" name="WVU DSPIRA gold rule"/>
+          <p:cNvSpPr>
+            <a:spLocks noGrp="1"/>
+          </p:cNvSpPr>
+          <p:nvPr/>
+        </p:nvSpPr>
+        <p:spPr>
+          <a:xfrm>
+            <a:off x="0" y="323850"/>
+            <a:ext cx="12192000" cy="19050"/>
+          </a:xfrm>
+          <a:prstGeom prst="rect">
+            <a:avLst/>
+          </a:prstGeom>
+          <a:solidFill>
+            <a:srgbClr val="EEAA00"/>
+          </a:solidFill>
+          <a:ln w="0">
+            <a:noFill/>
+          </a:ln>
+        </p:spPr>
+      </p:sp>
+      <p:sp>
+        <p:nvSpPr>
+          <p:cNvPr id="19" name="WVU DSPIRA name"/>
+          <p:cNvSpPr>
+            <a:spLocks noGrp="1"/>
+          </p:cNvSpPr>
+          <p:nvPr/>
+        </p:nvSpPr>
+        <p:spPr>
+          <a:xfrm>
+            <a:off x="228600" y="19050"/>
+            <a:ext cx="2857500" cy="257175"/>
+          </a:xfrm>
+          <a:prstGeom prst="rect">
+            <a:avLst/>
+          </a:prstGeom>
+          <a:noFill/>
+          <a:ln w="0">
+            <a:noFill/>
+          </a:ln>
+        </p:spPr>
+        <p:txBody>
+          <a:bodyPr>
+            <a:noAutofit/>
+          </a:bodyPr>
+          <a:lstStyle/>
+          <a:p>
+            <a:pPr>
+              <a:defRPr sz="1600" b="1">
+                <a:solidFill>
+                  <a:srgbClr val="FFFFFF"/>
+                </a:solidFill>
+                <a:latin typeface="Arial"/>
+                <a:ea typeface="Arial"/>
+                <a:cs typeface="Arial"/>
+              </a:defRPr>
+            </a:pPr>
+            <a:r>
+              <a:rPr sz="1600" b="1">
+                <a:solidFill>
+                  <a:srgbClr val="FFFFFF"/>
+                </a:solidFill>
+                <a:latin typeface="Arial"/>
+                <a:ea typeface="Arial"/>
+                <a:cs typeface="Arial"/>
+              </a:rPr>
+              <a:t>WVU DSPIRA</a:t>
+            </a:r>
+          </a:p>
+        </p:txBody>
+      </p:sp>
+      <p:sp>
+        <p:nvSpPr>
+          <p:cNvPr id="20" name="WVU DSPIRA university"/>
+          <p:cNvSpPr>
+            <a:spLocks noGrp="1"/>
+          </p:cNvSpPr>
+          <p:nvPr/>
+        </p:nvSpPr>
+        <p:spPr>
+          <a:xfrm>
+            <a:off x="9334500" y="114300"/>
+            <a:ext cx="2628900" cy="171450"/>
+          </a:xfrm>
+          <a:prstGeom prst="rect">
+            <a:avLst/>
+          </a:prstGeom>
+          <a:noFill/>
+          <a:ln w="0">
+            <a:noFill/>
+          </a:ln>
+        </p:spPr>
+        <p:txBody>
+          <a:bodyPr>
+            <a:noAutofit/>
+          </a:bodyPr>
+          <a:lstStyle/>
+          <a:p>
+            <a:pPr algn="r">
+              <a:defRPr sz="900">
+                <a:solidFill>
+                  <a:srgbClr val="FFFFFF"/>
+                </a:solidFill>
+                <a:latin typeface="Arial"/>
+                <a:ea typeface="Arial"/>
+                <a:cs typeface="Arial"/>
+              </a:defRPr>
+            </a:pPr>
+            <a:r>
+              <a:rPr sz="900">
+                <a:solidFill>
+                  <a:srgbClr val="FFFFFF"/>
+                </a:solidFill>
+                <a:latin typeface="Arial"/>
+                <a:ea typeface="Arial"/>
+                <a:cs typeface="Arial"/>
+              </a:rPr>
+              <a:t>WEST VIRGINIA UNIVERSITY</a:t>
             </a:r>
           </a:p>
         </p:txBody>
@@ -11505,7 +12105,7 @@
       </mc:AlternateContent>
       <p:sp>
         <p:nvSpPr>
-          <p:cNvPr id="4" name="DSPIRA 1"/>
+          <p:cNvPr id="5" name="DSPIRA 2"/>
           <p:cNvSpPr>
             <a:spLocks noGrp="1"/>
           </p:cNvSpPr>
@@ -11513,7 +12113,7 @@
         </p:nvSpPr>
         <p:spPr>
           <a:xfrm>
-            <a:off x="0" y="0"/>
+            <a:off x="0" y="7200900"/>
             <a:ext cx="12192000" cy="342900"/>
           </a:xfrm>
           <a:prstGeom prst="rect">
@@ -11526,81 +12126,6 @@
             <a:noFill/>
           </a:ln>
         </p:spPr>
-      </p:sp>
-      <p:sp>
-        <p:nvSpPr>
-          <p:cNvPr id="5" name="DSPIRA 2"/>
-          <p:cNvSpPr>
-            <a:spLocks noGrp="1"/>
-          </p:cNvSpPr>
-          <p:nvPr/>
-        </p:nvSpPr>
-        <p:spPr>
-          <a:xfrm>
-            <a:off x="0" y="7200900"/>
-            <a:ext cx="12192000" cy="342900"/>
-          </a:xfrm>
-          <a:prstGeom prst="rect">
-            <a:avLst/>
-          </a:prstGeom>
-          <a:solidFill>
-            <a:srgbClr val="FFFFFF"/>
-          </a:solidFill>
-          <a:ln w="0">
-            <a:noFill/>
-          </a:ln>
-        </p:spPr>
-      </p:sp>
-      <p:sp>
-        <p:nvSpPr>
-          <p:cNvPr id="6" name="DSPIRA 3"/>
-          <p:cNvSpPr>
-            <a:spLocks noGrp="1"/>
-          </p:cNvSpPr>
-          <p:nvPr/>
-        </p:nvSpPr>
-        <p:spPr>
-          <a:xfrm>
-            <a:off x="228600" y="76200"/>
-            <a:ext cx="4762500" cy="228600"/>
-          </a:xfrm>
-          <a:prstGeom prst="rect">
-            <a:avLst/>
-          </a:prstGeom>
-          <a:noFill/>
-          <a:ln w="0">
-            <a:noFill/>
-          </a:ln>
-        </p:spPr>
-        <p:txBody>
-          <a:bodyPr>
-            <a:noAutofit/>
-          </a:bodyPr>
-          <a:lstStyle/>
-          <a:p>
-            <a:pPr>
-              <a:defRPr sz="1200" b="1">
-                <a:solidFill>
-                  <a:srgbClr val="002855"/>
-                </a:solidFill>
-                <a:latin typeface="Arial"/>
-                <a:ea typeface="Arial"/>
-                <a:cs typeface="Arial"/>
-              </a:defRPr>
-            </a:pPr>
-            <a:r>
-              <a:rPr sz="1200" b="1">
-                <a:solidFill>
-                  <a:srgbClr val="002855"/>
-                </a:solidFill>
-                <a:latin typeface="Arial"/>
-                <a:ea typeface="Arial"/>
-                <a:cs typeface="Arial"/>
-              </a:rPr>
-              <a:t>WVU DSPIRA</a:t>
-            </a:r>
-          </a:p>
-        </p:txBody>
       </p:sp>
       <p:sp>
         <p:nvSpPr>
@@ -11700,6 +12225,156 @@
                 <a:cs typeface="Arial"/>
               </a:rPr>
               <a:t>8 of 10</a:t>
+            </a:r>
+          </a:p>
+        </p:txBody>
+      </p:sp>
+      <p:sp>
+        <p:nvSpPr>
+          <p:cNvPr id="9" name="WVU DSPIRA navy band"/>
+          <p:cNvSpPr>
+            <a:spLocks noGrp="1"/>
+          </p:cNvSpPr>
+          <p:nvPr/>
+        </p:nvSpPr>
+        <p:spPr>
+          <a:xfrm>
+            <a:off x="0" y="0"/>
+            <a:ext cx="12192000" cy="323850"/>
+          </a:xfrm>
+          <a:prstGeom prst="rect">
+            <a:avLst/>
+          </a:prstGeom>
+          <a:solidFill>
+            <a:srgbClr val="002855"/>
+          </a:solidFill>
+          <a:ln w="0">
+            <a:noFill/>
+          </a:ln>
+        </p:spPr>
+      </p:sp>
+      <p:sp>
+        <p:nvSpPr>
+          <p:cNvPr id="10" name="WVU DSPIRA gold rule"/>
+          <p:cNvSpPr>
+            <a:spLocks noGrp="1"/>
+          </p:cNvSpPr>
+          <p:nvPr/>
+        </p:nvSpPr>
+        <p:spPr>
+          <a:xfrm>
+            <a:off x="0" y="323850"/>
+            <a:ext cx="12192000" cy="19050"/>
+          </a:xfrm>
+          <a:prstGeom prst="rect">
+            <a:avLst/>
+          </a:prstGeom>
+          <a:solidFill>
+            <a:srgbClr val="EEAA00"/>
+          </a:solidFill>
+          <a:ln w="0">
+            <a:noFill/>
+          </a:ln>
+        </p:spPr>
+      </p:sp>
+      <p:sp>
+        <p:nvSpPr>
+          <p:cNvPr id="11" name="WVU DSPIRA name"/>
+          <p:cNvSpPr>
+            <a:spLocks noGrp="1"/>
+          </p:cNvSpPr>
+          <p:nvPr/>
+        </p:nvSpPr>
+        <p:spPr>
+          <a:xfrm>
+            <a:off x="228600" y="19050"/>
+            <a:ext cx="2857500" cy="257175"/>
+          </a:xfrm>
+          <a:prstGeom prst="rect">
+            <a:avLst/>
+          </a:prstGeom>
+          <a:noFill/>
+          <a:ln w="0">
+            <a:noFill/>
+          </a:ln>
+        </p:spPr>
+        <p:txBody>
+          <a:bodyPr>
+            <a:noAutofit/>
+          </a:bodyPr>
+          <a:lstStyle/>
+          <a:p>
+            <a:pPr>
+              <a:defRPr sz="1600" b="1">
+                <a:solidFill>
+                  <a:srgbClr val="FFFFFF"/>
+                </a:solidFill>
+                <a:latin typeface="Arial"/>
+                <a:ea typeface="Arial"/>
+                <a:cs typeface="Arial"/>
+              </a:defRPr>
+            </a:pPr>
+            <a:r>
+              <a:rPr sz="1600" b="1">
+                <a:solidFill>
+                  <a:srgbClr val="FFFFFF"/>
+                </a:solidFill>
+                <a:latin typeface="Arial"/>
+                <a:ea typeface="Arial"/>
+                <a:cs typeface="Arial"/>
+              </a:rPr>
+              <a:t>WVU DSPIRA</a:t>
+            </a:r>
+          </a:p>
+        </p:txBody>
+      </p:sp>
+      <p:sp>
+        <p:nvSpPr>
+          <p:cNvPr id="12" name="WVU DSPIRA university"/>
+          <p:cNvSpPr>
+            <a:spLocks noGrp="1"/>
+          </p:cNvSpPr>
+          <p:nvPr/>
+        </p:nvSpPr>
+        <p:spPr>
+          <a:xfrm>
+            <a:off x="9334500" y="114300"/>
+            <a:ext cx="2628900" cy="171450"/>
+          </a:xfrm>
+          <a:prstGeom prst="rect">
+            <a:avLst/>
+          </a:prstGeom>
+          <a:noFill/>
+          <a:ln w="0">
+            <a:noFill/>
+          </a:ln>
+        </p:spPr>
+        <p:txBody>
+          <a:bodyPr>
+            <a:noAutofit/>
+          </a:bodyPr>
+          <a:lstStyle/>
+          <a:p>
+            <a:pPr algn="r">
+              <a:defRPr sz="900">
+                <a:solidFill>
+                  <a:srgbClr val="FFFFFF"/>
+                </a:solidFill>
+                <a:latin typeface="Arial"/>
+                <a:ea typeface="Arial"/>
+                <a:cs typeface="Arial"/>
+              </a:defRPr>
+            </a:pPr>
+            <a:r>
+              <a:rPr sz="900">
+                <a:solidFill>
+                  <a:srgbClr val="FFFFFF"/>
+                </a:solidFill>
+                <a:latin typeface="Arial"/>
+                <a:ea typeface="Arial"/>
+                <a:cs typeface="Arial"/>
+              </a:rPr>
+              <a:t>WEST VIRGINIA UNIVERSITY</a:t>
             </a:r>
           </a:p>
         </p:txBody>
@@ -12140,7 +12815,7 @@
       </p:pic>
       <p:sp>
         <p:nvSpPr>
-          <p:cNvPr id="21" name="DSPIRA 1"/>
+          <p:cNvPr id="22" name="DSPIRA 2"/>
           <p:cNvSpPr>
             <a:spLocks noGrp="1"/>
           </p:cNvSpPr>
@@ -12148,7 +12823,7 @@
         </p:nvSpPr>
         <p:spPr>
           <a:xfrm>
-            <a:off x="0" y="0"/>
+            <a:off x="0" y="7200900"/>
             <a:ext cx="12192000" cy="342900"/>
           </a:xfrm>
           <a:prstGeom prst="rect">
@@ -12161,81 +12836,6 @@
             <a:noFill/>
           </a:ln>
         </p:spPr>
-      </p:sp>
-      <p:sp>
-        <p:nvSpPr>
-          <p:cNvPr id="22" name="DSPIRA 2"/>
-          <p:cNvSpPr>
-            <a:spLocks noGrp="1"/>
-          </p:cNvSpPr>
-          <p:nvPr/>
-        </p:nvSpPr>
-        <p:spPr>
-          <a:xfrm>
-            <a:off x="0" y="7200900"/>
-            <a:ext cx="12192000" cy="342900"/>
-          </a:xfrm>
-          <a:prstGeom prst="rect">
-            <a:avLst/>
-          </a:prstGeom>
-          <a:solidFill>
-            <a:srgbClr val="FFFFFF"/>
-          </a:solidFill>
-          <a:ln w="0">
-            <a:noFill/>
-          </a:ln>
-        </p:spPr>
-      </p:sp>
-      <p:sp>
-        <p:nvSpPr>
-          <p:cNvPr id="23" name="DSPIRA 3"/>
-          <p:cNvSpPr>
-            <a:spLocks noGrp="1"/>
-          </p:cNvSpPr>
-          <p:nvPr/>
-        </p:nvSpPr>
-        <p:spPr>
-          <a:xfrm>
-            <a:off x="228600" y="76200"/>
-            <a:ext cx="4762500" cy="228600"/>
-          </a:xfrm>
-          <a:prstGeom prst="rect">
-            <a:avLst/>
-          </a:prstGeom>
-          <a:noFill/>
-          <a:ln w="0">
-            <a:noFill/>
-          </a:ln>
-        </p:spPr>
-        <p:txBody>
-          <a:bodyPr>
-            <a:noAutofit/>
-          </a:bodyPr>
-          <a:lstStyle/>
-          <a:p>
-            <a:pPr>
-              <a:defRPr sz="1200" b="1">
-                <a:solidFill>
-                  <a:srgbClr val="002855"/>
-                </a:solidFill>
-                <a:latin typeface="Arial"/>
-                <a:ea typeface="Arial"/>
-                <a:cs typeface="Arial"/>
-              </a:defRPr>
-            </a:pPr>
-            <a:r>
-              <a:rPr sz="1200" b="1">
-                <a:solidFill>
-                  <a:srgbClr val="002855"/>
-                </a:solidFill>
-                <a:latin typeface="Arial"/>
-                <a:ea typeface="Arial"/>
-                <a:cs typeface="Arial"/>
-              </a:rPr>
-              <a:t>WVU DSPIRA</a:t>
-            </a:r>
-          </a:p>
-        </p:txBody>
       </p:sp>
       <p:sp>
         <p:nvSpPr>
@@ -12335,6 +12935,156 @@
                 <a:cs typeface="Arial"/>
               </a:rPr>
               <a:t>9 of 10</a:t>
+            </a:r>
+          </a:p>
+        </p:txBody>
+      </p:sp>
+      <p:sp>
+        <p:nvSpPr>
+          <p:cNvPr id="26" name="WVU DSPIRA navy band"/>
+          <p:cNvSpPr>
+            <a:spLocks noGrp="1"/>
+          </p:cNvSpPr>
+          <p:nvPr/>
+        </p:nvSpPr>
+        <p:spPr>
+          <a:xfrm>
+            <a:off x="0" y="0"/>
+            <a:ext cx="12192000" cy="323850"/>
+          </a:xfrm>
+          <a:prstGeom prst="rect">
+            <a:avLst/>
+          </a:prstGeom>
+          <a:solidFill>
+            <a:srgbClr val="002855"/>
+          </a:solidFill>
+          <a:ln w="0">
+            <a:noFill/>
+          </a:ln>
+        </p:spPr>
+      </p:sp>
+      <p:sp>
+        <p:nvSpPr>
+          <p:cNvPr id="27" name="WVU DSPIRA gold rule"/>
+          <p:cNvSpPr>
+            <a:spLocks noGrp="1"/>
+          </p:cNvSpPr>
+          <p:nvPr/>
+        </p:nvSpPr>
+        <p:spPr>
+          <a:xfrm>
+            <a:off x="0" y="323850"/>
+            <a:ext cx="12192000" cy="19050"/>
+          </a:xfrm>
+          <a:prstGeom prst="rect">
+            <a:avLst/>
+          </a:prstGeom>
+          <a:solidFill>
+            <a:srgbClr val="EEAA00"/>
+          </a:solidFill>
+          <a:ln w="0">
+            <a:noFill/>
+          </a:ln>
+        </p:spPr>
+      </p:sp>
+      <p:sp>
+        <p:nvSpPr>
+          <p:cNvPr id="28" name="WVU DSPIRA name"/>
+          <p:cNvSpPr>
+            <a:spLocks noGrp="1"/>
+          </p:cNvSpPr>
+          <p:nvPr/>
+        </p:nvSpPr>
+        <p:spPr>
+          <a:xfrm>
+            <a:off x="228600" y="19050"/>
+            <a:ext cx="2857500" cy="257175"/>
+          </a:xfrm>
+          <a:prstGeom prst="rect">
+            <a:avLst/>
+          </a:prstGeom>
+          <a:noFill/>
+          <a:ln w="0">
+            <a:noFill/>
+          </a:ln>
+        </p:spPr>
+        <p:txBody>
+          <a:bodyPr>
+            <a:noAutofit/>
+          </a:bodyPr>
+          <a:lstStyle/>
+          <a:p>
+            <a:pPr>
+              <a:defRPr sz="1600" b="1">
+                <a:solidFill>
+                  <a:srgbClr val="FFFFFF"/>
+                </a:solidFill>
+                <a:latin typeface="Arial"/>
+                <a:ea typeface="Arial"/>
+                <a:cs typeface="Arial"/>
+              </a:defRPr>
+            </a:pPr>
+            <a:r>
+              <a:rPr sz="1600" b="1">
+                <a:solidFill>
+                  <a:srgbClr val="FFFFFF"/>
+                </a:solidFill>
+                <a:latin typeface="Arial"/>
+                <a:ea typeface="Arial"/>
+                <a:cs typeface="Arial"/>
+              </a:rPr>
+              <a:t>WVU DSPIRA</a:t>
+            </a:r>
+          </a:p>
+        </p:txBody>
+      </p:sp>
+      <p:sp>
+        <p:nvSpPr>
+          <p:cNvPr id="29" name="WVU DSPIRA university"/>
+          <p:cNvSpPr>
+            <a:spLocks noGrp="1"/>
+          </p:cNvSpPr>
+          <p:nvPr/>
+        </p:nvSpPr>
+        <p:spPr>
+          <a:xfrm>
+            <a:off x="9334500" y="114300"/>
+            <a:ext cx="2628900" cy="171450"/>
+          </a:xfrm>
+          <a:prstGeom prst="rect">
+            <a:avLst/>
+          </a:prstGeom>
+          <a:noFill/>
+          <a:ln w="0">
+            <a:noFill/>
+          </a:ln>
+        </p:spPr>
+        <p:txBody>
+          <a:bodyPr>
+            <a:noAutofit/>
+          </a:bodyPr>
+          <a:lstStyle/>
+          <a:p>
+            <a:pPr algn="r">
+              <a:defRPr sz="900">
+                <a:solidFill>
+                  <a:srgbClr val="FFFFFF"/>
+                </a:solidFill>
+                <a:latin typeface="Arial"/>
+                <a:ea typeface="Arial"/>
+                <a:cs typeface="Arial"/>
+              </a:defRPr>
+            </a:pPr>
+            <a:r>
+              <a:rPr sz="900">
+                <a:solidFill>
+                  <a:srgbClr val="FFFFFF"/>
+                </a:solidFill>
+                <a:latin typeface="Arial"/>
+                <a:ea typeface="Arial"/>
+                <a:cs typeface="Arial"/>
+              </a:rPr>
+              <a:t>WEST VIRGINIA UNIVERSITY</a:t>
             </a:r>
           </a:p>
         </p:txBody>

--- a/assets/lessons/lectures/digital-signal-processing/fourier-transform-2018.pptx
+++ b/assets/lessons/lectures/digital-signal-processing/fourier-transform-2018.pptx
@@ -4007,7 +4007,7 @@
                 <a:ea typeface="Arial"/>
                 <a:cs typeface="Arial"/>
               </a:rPr>
-              <a:t>wvurail.org/dspira</a:t>
+              <a:t>rail.wvu.edu/dspira</a:t>
             </a:r>
           </a:p>
         </p:txBody>
